--- a/deliverables/Pitch_Deck_VersionB_Hero-Hybrid_EN.pptx
+++ b/deliverables/Pitch_Deck_VersionB_Hero-Hybrid_EN.pptx
@@ -937,7 +937,7 @@
           <a:lstStyle/>
           <a:p>
             <a:r>
-              <a:t>Finance goal = a 2nd meeting. Deep research 7/28: curve is credible but AGGRESSIVE (5.6x/3.6x), a strong-execution case; NRR 110% = top-quartile target not current (SaaS Capital); ACV $30K = competitor-median validated. Version B closes by recovering the Sarah persona (her world grows). At slide 8 Customer, tie back 'companies like Sarah = mid-market.'</a:t>
+              <a:t>Finance goal = a 2nd meeting. THE ASK IS INTRODUCTIONS, NOT CAPITAL (per narrative-strategy §4 CTA + 0-traction reality): AI/infra experts, companies to onboard as design partners, warm intros to production-agent CTOs like Sarah. Instructor's recommended CTA for a pre-traction team. Deep research 7/28: curve is credible but AGGRESSIVE (5.6x/3.6x), strong-execution case; NRR 110% = top-quartile target not current; ACV $30K = competitor-median validated. Don't name a funding amount unless a judge asks. Version B closes by recovering the Sarah persona (her world grows). At slide 8 Customer, tie back 'companies like Sarah = mid-market.'</a:t>
             </a:r>
           </a:p>
         </p:txBody>
@@ -1077,7 +1077,7 @@
           <a:lstStyle/>
           <a:p>
             <a:r>
-              <a:t>Keep the incident numbers ($47K, +400%) tied to Sarah so acute &amp; chronic ride in one breath.</a:t>
+              <a:t>Reframed 7/29 per Liner 2nd reply: the gap isn't 'total invisible' (cloud logging shows it) — it's per-feature/team/customer attribution, which needs deliberate data structuring. Keep the incident numbers ($47K, +400%) tied to Sarah so acute &amp; chronic ride in one breath.</a:t>
             </a:r>
           </a:p>
         </p:txBody>
@@ -1357,7 +1357,7 @@
           <a:lstStyle/>
           <a:p>
             <a:r>
-              <a:t>This slide pre-empts two rebuttals ('just buy tokens' / 'build it yourself'). Per the deck-defense doc: label the 'can't build' load-bearing claim as a ⚠ falsifiable bet, and pre-empt the Liner counter — 'estimable ≠ audit-grade attribution'.</a:t>
+              <a:t>This slide pre-empts two rebuttals ('just buy tokens' / 'build it yourself'). Per the deck-defense doc: label the 'can't build' load-bearing claim as a ⚠ falsifiable bet, and pre-empt the Liner counter — 'estimable ≠ audit-grade attribution'. B2B/per-customer rationale added 7/29 from Liner 2nd reply: 'B2C groups cost by category; per-customer is a B2B pattern' — sharpens why our paid ICP is B2B.</a:t>
             </a:r>
           </a:p>
         </p:txBody>
@@ -6000,7 +6000,7 @@
                 </a:solidFill>
                 <a:latin typeface="Calibri"/>
               </a:rPr>
-              <a:t>▸  First real signal — Liner Lead ML Eng confirmed build/buy is the primary variable that splits cost structure.</a:t>
+              <a:t>▸  First real signal — an ML lead at a Korean AI-search company (2 rounds) confirmed build/buy splits cost structure, and that per-customer attribution needs deliberate data work.</a:t>
             </a:r>
           </a:p>
           <a:p>
@@ -6016,7 +6016,7 @@
                 </a:solidFill>
                 <a:latin typeface="Calibri"/>
               </a:rPr>
-              <a:t>▸  Outreach sent (Korea: Dalpha, Liner / US mid-market Top 5). Design partners: N in progress.</a:t>
+              <a:t>▸  Outreach sent (Korea AI startups + US mid-market Top 5). Design partners: N in progress.</a:t>
             </a:r>
           </a:p>
           <a:p>
@@ -6582,11 +6582,27 @@
             <a:r>
               <a:rPr sz="1700" b="1" i="0">
                 <a:solidFill>
-                  <a:srgbClr val="F2C14E"/>
-                </a:solidFill>
-                <a:latin typeface="Calibri"/>
-              </a:rPr>
-              <a:t>▸  Ask: ⚠ (amount &amp; use TBD). CTA — 'introduce us to a CTO like Sarah.'</a:t>
+                  <a:srgbClr val="FF6B35"/>
+                </a:solidFill>
+                <a:latin typeface="Calibri"/>
+              </a:rPr>
+              <a:t>▸  Our ask isn't a check — it's connections:</a:t>
+            </a:r>
+          </a:p>
+          <a:p>
+            <a:pPr algn="l">
+              <a:spcAft>
+                <a:spcPts val="800"/>
+              </a:spcAft>
+            </a:pPr>
+            <a:r>
+              <a:rPr sz="1700" b="0" i="0">
+                <a:solidFill>
+                  <a:srgbClr val="35C9C9"/>
+                </a:solidFill>
+                <a:latin typeface="Calibri"/>
+              </a:rPr>
+              <a:t>▸  (a) AI / infra experts &amp; advisors to pressure-test the wedge  ·  (b) mid-market teams to onboard as design partners  ·  (c) warm intros to CTOs like Sarah running agents in production.</a:t>
             </a:r>
           </a:p>
         </p:txBody>
@@ -7282,7 +7298,7 @@
                 </a:solidFill>
                 <a:latin typeface="Calibri"/>
               </a:rPr>
-              <a:t>Today's tools rewind the CCTV after the fire.</a:t>
+              <a:t>Sarah's dashboard shows the total. It can't show the breakdown.</a:t>
             </a:r>
           </a:p>
         </p:txBody>
@@ -7315,13 +7331,13 @@
               </a:spcAft>
             </a:pPr>
             <a:r>
-              <a:rPr sz="1700" b="0" i="0">
+              <a:rPr sz="1700" b="1" i="0">
                 <a:solidFill>
                   <a:srgbClr val="E8ECF1"/>
                 </a:solidFill>
                 <a:latin typeface="Calibri"/>
               </a:rPr>
-              <a:t>▸  Observability tools = monthly, after-the-fact. Static keys &amp; caps = a blunt knife.</a:t>
+              <a:t>▸  Cloud logging gave Sarah the monthly total — but not 'per customer, per feature.' That split needs deliberate data structuring no tool did for her.</a:t>
             </a:r>
           </a:p>
           <a:p>
@@ -7337,7 +7353,7 @@
                 </a:solidFill>
                 <a:latin typeface="Calibri"/>
               </a:rPr>
-              <a:t>▸  They see only up to the LLM call. Search, crawling, third-party APIs are off-screen —</a:t>
+              <a:t>▸  Observability = monthly, after-the-fact. Static keys &amp; caps = a blunt knife. They see only up to the LLM call — search, crawling, third-party APIs off-screen.</a:t>
             </a:r>
           </a:p>
           <a:p>
@@ -7353,7 +7369,7 @@
                 </a:solidFill>
                 <a:latin typeface="Calibri"/>
               </a:rPr>
-              <a:t>▸  — the real reason Sarah couldn't explain total cost on one screen.</a:t>
+              <a:t>▸  — so Sarah could see how much, but never attribute why or to whom.</a:t>
             </a:r>
           </a:p>
         </p:txBody>
@@ -7811,7 +7827,7 @@
                 </a:solidFill>
                 <a:latin typeface="Calibri"/>
               </a:rPr>
-              <a:t>▸  Not an off-path dashboard. We attribute &amp; govern every LLM + tool + external-API call at request time.</a:t>
+              <a:t>▸  Logging gives you the total; we give you the breakdown. We attribute &amp; govern every LLM + tool + external-API call at request time — per feature / team / customer.</a:t>
             </a:r>
           </a:p>
           <a:p>
@@ -8349,7 +8365,7 @@
                 </a:solidFill>
                 <a:latin typeface="Calibri"/>
               </a:rPr>
-              <a:t>▸  Paid target: mid-market / scale-up — $50K–$500K/mo AI spend, 50–300 people, Series A–C. Not big enough to staff an infra team → can't build, must buy.</a:t>
+              <a:t>▸  Paid target: mid-market / scale-up B2B — $50K–$500K/mo AI spend, 50–300 people, Series A–C. Not big enough to staff an infra team → can't build, must buy.</a:t>
             </a:r>
           </a:p>
           <a:p>
@@ -8359,13 +8375,13 @@
               </a:spcAft>
             </a:pPr>
             <a:r>
-              <a:rPr sz="1700" b="0" i="0">
-                <a:solidFill>
-                  <a:srgbClr val="E8ECF1"/>
-                </a:solidFill>
-                <a:latin typeface="Calibri"/>
-              </a:rPr>
-              <a:t>▸  Tooling / spend = 1–3% (clear ROI). Skips the death valley (small = negative ROI / enterprise = builds its own).</a:t>
+              <a:rPr sz="1700" b="1" i="0">
+                <a:solidFill>
+                  <a:srgbClr val="35C9C9"/>
+                </a:solidFill>
+                <a:latin typeface="Calibri"/>
+              </a:rPr>
+              <a:t>▸  Why B2B: per-customer unit cost is a B2B need (customer = contract). B2C rolls cost up by category — a B2B CTO must defend margin per account. (An ML lead we spoke with framed it exactly this way.)</a:t>
             </a:r>
           </a:p>
           <a:p>
@@ -8381,7 +8397,7 @@
                 </a:solidFill>
                 <a:latin typeface="Calibri"/>
               </a:rPr>
-              <a:t>▸  Buyer = CTO (explains unit cost to the board). Champion = AI lead. Finance = influencer.</a:t>
+              <a:t>▸  Tooling / spend = 1–3% (clear ROI). Skips the death valley (small = negative ROI / enterprise = builds its own). Buyer = CTO, champion = AI lead, finance = influencer.</a:t>
             </a:r>
           </a:p>
           <a:p>
@@ -8393,7 +8409,7 @@
             <a:r>
               <a:rPr sz="1700" b="0" i="0">
                 <a:solidFill>
-                  <a:srgbClr val="35C9C9"/>
+                  <a:srgbClr val="9AA7B4"/>
                 </a:solidFill>
                 <a:latin typeface="Calibri"/>
               </a:rPr>

--- a/deliverables/Pitch_Deck_VersionB_Hero-Hybrid_EN.pptx
+++ b/deliverables/Pitch_Deck_VersionB_Hero-Hybrid_EN.pptx
@@ -1497,7 +1497,7 @@
           <a:lstStyle/>
           <a:p>
             <a:r>
-              <a:t>SatGate existing = double-edged (validates the problem is real + makes it a speed race). Our square — 'pre-execution control × COGS explanation' (finance + intelligence layer) — nobody occupies. 'Why has no one bought yet?' → category forming in 2026; acute pain already real, chronic need forming; SatGate pre-launch = timing validation, not absence of demand.</a:t>
+              <a:t>Reframed 7/29 (Liner 2nd reply): don't say rivals 'can't see cost' — they show totals. HONESTY: FinOps already sells per-unit attribution, but for cloud/infra spend, after-the-fact, not the agent execution path (LLM+tool+external API), no pre-execution control. Our differentiation = the intersection, not 'we attribute and they don't.' SatGate existing = double-edged (validates problem + speed race). 'Why no one bought yet?' → category forming 2026; acute pain real, chronic forming; SatGate pre-launch = timing validation, not absent demand.</a:t>
             </a:r>
           </a:p>
         </p:txBody>
@@ -4853,7 +4853,7 @@
                 </a:solidFill>
                 <a:latin typeface="Calibri"/>
               </a:rPr>
-              <a:t>Fault line = after-the-fact observability vs. pre-execution control. We add COGS explanation on top.</a:t>
+              <a:t>Two axes: after-the-fact vs. pre-execution × total visibility vs. audit-grade attribution.</a:t>
             </a:r>
           </a:p>
         </p:txBody>
@@ -4892,7 +4892,7 @@
                 </a:solidFill>
                 <a:latin typeface="Calibri"/>
               </a:rPr>
-              <a:t>▸  Direct: SatGate ('Economic Firewall') — near-identical problem/shape, but pre-launch (nobody owns the market yet = a speed game).</a:t>
+              <a:t>▸  Showing the total is table stakes — logging, observability &amp; billing all do it. The gap is attributing the agent's full cost per feature / team / customer, audit-grade.</a:t>
             </a:r>
           </a:p>
           <a:p>
@@ -4908,7 +4908,7 @@
                 </a:solidFill>
                 <a:latin typeface="Calibri"/>
               </a:rPr>
-              <a:t>▸  Observability (indirect): Langfuse · Helicone · LangSmith — tracking yes, control no (after-the-fact).</a:t>
+              <a:t>▸  Observability (Langfuse · Helicone): track &amp; show totals, no control, weak per-customer attribution.</a:t>
             </a:r>
           </a:p>
           <a:p>
@@ -4924,7 +4924,7 @@
                 </a:solidFill>
                 <a:latin typeface="Calibri"/>
               </a:rPr>
-              <a:t>▸  FinOps (indirect): CloudZero · Vantage · Finout — financial attribution after the fact, no real-time control.</a:t>
+              <a:t>▸  FinOps (CloudZero · Vantage): DO per-unit attribution — but for cloud spend, after-the-fact, off the agent path, no pre-execution control.</a:t>
             </a:r>
           </a:p>
           <a:p>
@@ -4940,7 +4940,23 @@
                 </a:solidFill>
                 <a:latin typeface="Calibri"/>
               </a:rPr>
-              <a:t>▸  Status quo (the real competitor): grepping logs, scripts, hard caps — we do what's structurally impossible for them.</a:t>
+              <a:t>▸  Direct: SatGate ('Economic Firewall') — near-identical, but pre-launch (speed game). Status quo: grep logs, scripts, hard caps.</a:t>
+            </a:r>
+          </a:p>
+          <a:p>
+            <a:pPr algn="l">
+              <a:spcAft>
+                <a:spcPts val="800"/>
+              </a:spcAft>
+            </a:pPr>
+            <a:r>
+              <a:rPr sz="1700" b="1" i="0">
+                <a:solidFill>
+                  <a:srgbClr val="35C9C9"/>
+                </a:solidFill>
+                <a:latin typeface="Calibri"/>
+              </a:rPr>
+              <a:t>▸  Our square = pre-execution control × audit-grade attribution of the agent's full cost. Nobody occupies it.</a:t>
             </a:r>
           </a:p>
         </p:txBody>

--- a/deliverables/Pitch_Deck_VersionB_Hero-Hybrid_EN.pptx
+++ b/deliverables/Pitch_Deck_VersionB_Hero-Hybrid_EN.pptx
@@ -517,7 +517,7 @@
           <a:lstStyle/>
           <a:p>
             <a:r>
-              <a:t>Q&amp;A point: opening with a specific person naturally conveys 'this is for a specific person (a mid-market CTO), not everyone.' The 'representative persona' label is mandatory (no fake traction).</a:t>
+              <a:t>Opening with a specific person conveys 'this is for a specific person (a mid-market CTO), not everyone.' The 'representative persona' label is mandatory.</a:t>
             </a:r>
           </a:p>
         </p:txBody>
@@ -657,7 +657,7 @@
           <a:lstStyle/>
           <a:p>
             <a:r>
-              <a:t>'Flat or usage?' → 'Subscription-led, but the usage axis is agent count, not spend.' ACV $30K = median of competitor mid-market ACVs (deep research 7/28): CloudZero $30-80K, Cloudability $30-130K, Langfuse $3-15K, Helicone $5-20K, Portkey $5-25K. Per-agent (seat-like) pricing keeps NRR predictable vs. consumption. Detail: Solution/가격-재무-딥리서치-2026-07.md.</a:t>
+              <a:t>'Flat or usage?' → 'Subscription-led, but the usage axis is agent count, not spend.' ACV $30K = median of competitor mid-market ACVs (deep research 7/28). Detail: Solution/가격-재무-딥리서치-2026-07.md.</a:t>
             </a:r>
           </a:p>
         </p:txBody>
@@ -797,7 +797,7 @@
           <a:lstStyle/>
           <a:p>
             <a:r>
-              <a:t>Don't hide the 0 formal interviews — frame as 'building pricing on data.' Reframe 'rejection data' NOT as traction-substitute but as 'search discipline + first real signal' (per deck-defense doc). Fill with real interview/design-partner counts before 8/6.</a:t>
+              <a:t>Don't hide the 0 formal interviews — frame as 'building pricing on data.' Fill with real interview/design-partner counts before 8/6.</a:t>
             </a:r>
           </a:p>
         </p:txBody>
@@ -867,7 +867,7 @@
           <a:lstStyle/>
           <a:p>
             <a:r>
-              <a:t>Keep it short. One line on 'why us' (hands-on agent-cost experience / problem ownership) to be filled by the team. NOTE: resolve the Team-slide role inconsistency flagged in the deck-defense doc.</a:t>
+              <a:t>Keep it short. One line on 'why us' to be filled by the team. Resolve the Team-slide role inconsistency before the pitch.</a:t>
             </a:r>
           </a:p>
         </p:txBody>
@@ -937,7 +937,7 @@
           <a:lstStyle/>
           <a:p>
             <a:r>
-              <a:t>Finance goal = a 2nd meeting. THE ASK IS INTRODUCTIONS, NOT CAPITAL (per narrative-strategy §4 CTA + 0-traction reality): AI/infra experts, companies to onboard as design partners, warm intros to production-agent CTOs like Sarah. Instructor's recommended CTA for a pre-traction team. Deep research 7/28: curve is credible but AGGRESSIVE (5.6x/3.6x), strong-execution case; NRR 110% = top-quartile target not current; ACV $30K = competitor-median validated. Don't name a funding amount unless a judge asks. Version B closes by recovering the Sarah persona (her world grows). At slide 8 Customer, tie back 'companies like Sarah = mid-market.'</a:t>
+              <a:t>Finance goal = a 2nd meeting. THE ASK IS INTRODUCTIONS, NOT CAPITAL. Curve credible but AGGRESSIVE; NRR 110% = top-quartile target; ACV $30K = competitor-median validated. Version B recovers the Sarah persona (her world grows). Don't name a funding amount unless a judge asks.</a:t>
             </a:r>
           </a:p>
         </p:txBody>
@@ -1007,7 +1007,7 @@
           <a:lstStyle/>
           <a:p>
             <a:r>
-              <a:t>The bridge slide from hero → market shift. Only here do we assert the shift as 'one undeniable layer.' Contentious claims stay ⚠ bets in the vehicle/customer layer.</a:t>
+              <a:t>Bridge slide hero → market shift. Only here assert the shift as 'one undeniable layer.'</a:t>
             </a:r>
           </a:p>
         </p:txBody>
@@ -1077,7 +1077,7 @@
           <a:lstStyle/>
           <a:p>
             <a:r>
-              <a:t>Reframed 7/29 per Liner 2nd reply: the gap isn't 'total invisible' (cloud logging shows it) — it's per-feature/team/customer attribution, which needs deliberate data structuring. Keep the incident numbers ($47K, +400%) tied to Sarah so acute &amp; chronic ride in one breath.</a:t>
+              <a:t>Reframed 7/29: the gap isn't 'total invisible' (cloud logging shows it) — it's per-feature/team/customer attribution + the 41% non-LLM spend. Keep incident numbers ($47K) tied to Sarah.</a:t>
             </a:r>
           </a:p>
         </p:txBody>
@@ -1147,7 +1147,7 @@
           <a:lstStyle/>
           <a:p>
             <a:r>
-              <a:t>Completes the hero journey (problem → experiencing the solution → change). This scene closes the emotional arc.</a:t>
+              <a:t>Completes the hero journey (problem → experiencing the solution → change).</a:t>
             </a:r>
           </a:p>
         </p:txBody>
@@ -1287,7 +1287,7 @@
           <a:lstStyle/>
           <a:p>
             <a:r>
-              <a:t>Demo slide = embed deliverables/ai_cost_gov_dashboard_prototype.html (per-customer unit economics + real-time budget hard-limits + routing). Never use the 'kernel/C++' framing from the old Gemini draft.</a:t>
+              <a:t>Demo slide = embed the React demo (per-customer unit economics + real-time budget hard-limits + routing). Never use the 'kernel/C++' framing from the old Gemini draft.</a:t>
             </a:r>
           </a:p>
         </p:txBody>
@@ -1357,7 +1357,7 @@
           <a:lstStyle/>
           <a:p>
             <a:r>
-              <a:t>This slide pre-empts two rebuttals ('just buy tokens' / 'build it yourself'). Per the deck-defense doc: label the 'can't build' load-bearing claim as a ⚠ falsifiable bet, and pre-empt the Liner counter — 'estimable ≠ audit-grade attribution'. B2B/per-customer rationale added 7/29 from Liner 2nd reply: 'B2C groups cost by category; per-customer is a B2B pattern' — sharpens why our paid ICP is B2B.</a:t>
+              <a:t>This slide pre-empts two rebuttals ('just buy tokens' / 'build it yourself'). Label the 'can't build' load-bearing claim as a ⚠ falsifiable bet, and pre-empt the Liner counter — 'estimable ≠ audit-grade attribution'. B2B/per-customer rationale added 7/29.</a:t>
             </a:r>
           </a:p>
         </p:txBody>
@@ -1427,7 +1427,7 @@
           <a:lstStyle/>
           <a:p>
             <a:r>
-              <a:t>Never present the old LAM $80K as market size. Take-rate anchor CORRECTED to ~1-2% (deep research 7/28): FinOps actuals cluster at 0.5-2%, NOT 2-3% — Cloudability official 0.75-3%, CloudZero real deals 0.5-1%, Finout ~1%, Vantage 0% (flat). 2-3% is the upper bound, not the market midpoint. We don't price on take-rate anyway (per-agent) — it's only a market-sizing sanity check. Source: Market/TAM-SAM-SOM.md + Solution/가격-재무-딥리서치-2026-07.md.</a:t>
+              <a:t>Never present the old LAM $80K as market size. Take-rate anchor CORRECTED to ~1-2% (deep research 7/28). We don't price on take-rate (per-agent) — it's a market-sizing sanity check only. Source: Market/TAM-SAM-SOM.md.</a:t>
             </a:r>
           </a:p>
         </p:txBody>
@@ -1497,7 +1497,7 @@
           <a:lstStyle/>
           <a:p>
             <a:r>
-              <a:t>Reframed 7/29 (Liner 2nd reply): don't say rivals 'can't see cost' — they show totals. HONESTY: FinOps already sells per-unit attribution, but for cloud/infra spend, after-the-fact, not the agent execution path (LLM+tool+external API), no pre-execution control. Our differentiation = the intersection, not 'we attribute and they don't.' SatGate existing = double-edged (validates problem + speed race). 'Why no one bought yet?' → category forming 2026; acute pain real, chronic forming; SatGate pre-launch = timing validation, not absent demand.</a:t>
+              <a:t>Reframed 7/29: don't say rivals 'can't see cost' — they show totals. HONESTY: FinOps already sells per-unit attribution, but for cloud/infra spend, after-the-fact, not the agent execution path. Our differentiation = the intersection. SatGate pre-launch = timing validation, not absent demand.</a:t>
             </a:r>
           </a:p>
         </p:txBody>
@@ -4847,7 +4847,7 @@
           <a:p>
             <a:pPr algn="l"/>
             <a:r>
-              <a:rPr sz="2700" b="1" i="0">
+              <a:rPr sz="2500" b="1" i="0">
                 <a:solidFill>
                   <a:srgbClr val="E8ECF1"/>
                 </a:solidFill>
@@ -4867,7 +4867,7 @@
         <p:spPr>
           <a:xfrm>
             <a:off x="868680" y="2148840"/>
-            <a:ext cx="10424160" cy="4023360"/>
+            <a:ext cx="5257800" cy="4023360"/>
           </a:xfrm>
           <a:prstGeom prst="rect">
             <a:avLst/>
@@ -4882,81 +4882,830 @@
           <a:p>
             <a:pPr algn="l">
               <a:spcAft>
-                <a:spcPts val="800"/>
+                <a:spcPts val="900"/>
               </a:spcAft>
             </a:pPr>
             <a:r>
-              <a:rPr sz="1700" b="1" i="0">
+              <a:rPr sz="1500" b="1" i="0">
                 <a:solidFill>
                   <a:srgbClr val="E8ECF1"/>
                 </a:solidFill>
                 <a:latin typeface="Calibri"/>
               </a:rPr>
-              <a:t>▸  Showing the total is table stakes — logging, observability &amp; billing all do it. The gap is attributing the agent's full cost per feature / team / customer, audit-grade.</a:t>
+              <a:t>▸  Showing the total is table stakes — logging, observability &amp; billing all do it.</a:t>
             </a:r>
           </a:p>
           <a:p>
             <a:pPr algn="l">
               <a:spcAft>
-                <a:spcPts val="800"/>
+                <a:spcPts val="900"/>
               </a:spcAft>
             </a:pPr>
             <a:r>
-              <a:rPr sz="1700" b="0" i="0">
-                <a:solidFill>
-                  <a:srgbClr val="E8ECF1"/>
-                </a:solidFill>
-                <a:latin typeface="Calibri"/>
-              </a:rPr>
-              <a:t>▸  Observability (Langfuse · Helicone): track &amp; show totals, no control, weak per-customer attribution.</a:t>
+              <a:rPr sz="1500" b="1" i="0">
+                <a:solidFill>
+                  <a:srgbClr val="35C9C9"/>
+                </a:solidFill>
+                <a:latin typeface="Calibri"/>
+              </a:rPr>
+              <a:t>▸  The gap = attributing the agent's full cost per feature / team / customer, audit-grade, before execution.</a:t>
             </a:r>
           </a:p>
           <a:p>
             <a:pPr algn="l">
               <a:spcAft>
-                <a:spcPts val="800"/>
+                <a:spcPts val="900"/>
               </a:spcAft>
             </a:pPr>
             <a:r>
-              <a:rPr sz="1700" b="0" i="0">
+              <a:rPr sz="1500" b="0" i="0">
                 <a:solidFill>
                   <a:srgbClr val="E8ECF1"/>
                 </a:solidFill>
                 <a:latin typeface="Calibri"/>
               </a:rPr>
-              <a:t>▸  FinOps (CloudZero · Vantage): DO per-unit attribution — but for cloud spend, after-the-fact, off the agent path, no pre-execution control.</a:t>
+              <a:t>▸  FinOps (CloudZero · Vantage) does per-unit attribution — but for cloud spend, after-the-fact, off the agent path.</a:t>
             </a:r>
           </a:p>
           <a:p>
             <a:pPr algn="l">
               <a:spcAft>
-                <a:spcPts val="800"/>
+                <a:spcPts val="900"/>
               </a:spcAft>
             </a:pPr>
             <a:r>
-              <a:rPr sz="1700" b="0" i="0">
+              <a:rPr sz="1500" b="1" i="0">
                 <a:solidFill>
                   <a:srgbClr val="E8ECF1"/>
                 </a:solidFill>
                 <a:latin typeface="Calibri"/>
               </a:rPr>
-              <a:t>▸  Direct: SatGate ('Economic Firewall') — near-identical, but pre-launch (speed game). Status quo: grep logs, scripts, hard caps.</a:t>
-            </a:r>
-          </a:p>
-          <a:p>
-            <a:pPr algn="l">
-              <a:spcAft>
-                <a:spcPts val="800"/>
-              </a:spcAft>
-            </a:pPr>
-            <a:r>
-              <a:rPr sz="1700" b="1" i="0">
+              <a:t>▸  Our square — pre-execution × audit-grade attribution. Nobody occupies it.</a:t>
+            </a:r>
+          </a:p>
+        </p:txBody>
+      </p:sp>
+      <p:sp>
+        <p:nvSpPr>
+          <p:cNvPr id="7" name="Rectangle 6"/>
+          <p:cNvSpPr/>
+          <p:nvPr/>
+        </p:nvSpPr>
+        <p:spPr>
+          <a:xfrm>
+            <a:off x="8915400" y="2331720"/>
+            <a:ext cx="2011680" cy="1600200"/>
+          </a:xfrm>
+          <a:prstGeom prst="rect">
+            <a:avLst/>
+          </a:prstGeom>
+          <a:solidFill>
+            <a:srgbClr val="14303A"/>
+          </a:solidFill>
+          <a:ln>
+            <a:noFill/>
+          </a:ln>
+          <a:effectLst/>
+        </p:spPr>
+        <p:style>
+          <a:lnRef idx="1">
+            <a:schemeClr val="accent1"/>
+          </a:lnRef>
+          <a:fillRef idx="3">
+            <a:schemeClr val="accent1"/>
+          </a:fillRef>
+          <a:effectRef idx="2">
+            <a:schemeClr val="accent1"/>
+          </a:effectRef>
+          <a:fontRef idx="minor">
+            <a:schemeClr val="lt1"/>
+          </a:fontRef>
+        </p:style>
+        <p:txBody>
+          <a:bodyPr rtlCol="0" anchor="ctr"/>
+          <a:lstStyle/>
+          <a:p>
+            <a:pPr algn="ctr"/>
+          </a:p>
+        </p:txBody>
+      </p:sp>
+      <p:cxnSp>
+        <p:nvCxnSpPr>
+          <p:cNvPr id="8" name="Connector 7"/>
+          <p:cNvCxnSpPr/>
+          <p:nvPr/>
+        </p:nvCxnSpPr>
+        <p:spPr>
+          <a:xfrm>
+            <a:off x="6903720" y="3931920"/>
+            <a:ext cx="4023360" cy="0"/>
+          </a:xfrm>
+          <a:prstGeom prst="bentConnector3">
+            <a:avLst/>
+          </a:prstGeom>
+          <a:ln w="15875">
+            <a:solidFill>
+              <a:srgbClr val="9AA7B4"/>
+            </a:solidFill>
+          </a:ln>
+          <a:effectLst/>
+        </p:spPr>
+        <p:style>
+          <a:lnRef idx="2">
+            <a:schemeClr val="accent1"/>
+          </a:lnRef>
+          <a:fillRef idx="0">
+            <a:schemeClr val="accent1"/>
+          </a:fillRef>
+          <a:effectRef idx="1">
+            <a:schemeClr val="accent1"/>
+          </a:effectRef>
+          <a:fontRef idx="minor">
+            <a:schemeClr val="tx1"/>
+          </a:fontRef>
+        </p:style>
+      </p:cxnSp>
+      <p:cxnSp>
+        <p:nvCxnSpPr>
+          <p:cNvPr id="9" name="Connector 8"/>
+          <p:cNvCxnSpPr/>
+          <p:nvPr/>
+        </p:nvCxnSpPr>
+        <p:spPr>
+          <a:xfrm>
+            <a:off x="8915400" y="2331720"/>
+            <a:ext cx="0" cy="3200400"/>
+          </a:xfrm>
+          <a:prstGeom prst="bentConnector3">
+            <a:avLst/>
+          </a:prstGeom>
+          <a:ln w="15875">
+            <a:solidFill>
+              <a:srgbClr val="9AA7B4"/>
+            </a:solidFill>
+          </a:ln>
+          <a:effectLst/>
+        </p:spPr>
+        <p:style>
+          <a:lnRef idx="2">
+            <a:schemeClr val="accent1"/>
+          </a:lnRef>
+          <a:fillRef idx="0">
+            <a:schemeClr val="accent1"/>
+          </a:fillRef>
+          <a:effectRef idx="1">
+            <a:schemeClr val="accent1"/>
+          </a:effectRef>
+          <a:fontRef idx="minor">
+            <a:schemeClr val="tx1"/>
+          </a:fontRef>
+        </p:style>
+      </p:cxnSp>
+      <p:sp>
+        <p:nvSpPr>
+          <p:cNvPr id="10" name="TextBox 9"/>
+          <p:cNvSpPr txBox="1"/>
+          <p:nvPr/>
+        </p:nvSpPr>
+        <p:spPr>
+          <a:xfrm>
+            <a:off x="6400800" y="3767328"/>
+            <a:ext cx="1280160" cy="320040"/>
+          </a:xfrm>
+          <a:prstGeom prst="rect">
+            <a:avLst/>
+          </a:prstGeom>
+          <a:noFill/>
+        </p:spPr>
+        <p:txBody>
+          <a:bodyPr wrap="square" lIns="0" rIns="0" tIns="0" bIns="0">
+            <a:spAutoFit/>
+          </a:bodyPr>
+          <a:lstStyle/>
+          <a:p>
+            <a:pPr algn="l"/>
+            <a:r>
+              <a:rPr sz="900" b="0" i="0">
+                <a:solidFill>
+                  <a:srgbClr val="9AA7B4"/>
+                </a:solidFill>
+                <a:latin typeface="Calibri"/>
+              </a:rPr>
+              <a:t>After-the-fact</a:t>
+            </a:r>
+          </a:p>
+        </p:txBody>
+      </p:sp>
+      <p:sp>
+        <p:nvSpPr>
+          <p:cNvPr id="11" name="TextBox 10"/>
+          <p:cNvSpPr txBox="1"/>
+          <p:nvPr/>
+        </p:nvSpPr>
+        <p:spPr>
+          <a:xfrm>
+            <a:off x="10012680" y="3767328"/>
+            <a:ext cx="1097280" cy="320040"/>
+          </a:xfrm>
+          <a:prstGeom prst="rect">
+            <a:avLst/>
+          </a:prstGeom>
+          <a:noFill/>
+        </p:spPr>
+        <p:txBody>
+          <a:bodyPr wrap="square" lIns="0" rIns="0" tIns="0" bIns="0">
+            <a:spAutoFit/>
+          </a:bodyPr>
+          <a:lstStyle/>
+          <a:p>
+            <a:pPr algn="r"/>
+            <a:r>
+              <a:rPr sz="900" b="0" i="0">
+                <a:solidFill>
+                  <a:srgbClr val="9AA7B4"/>
+                </a:solidFill>
+                <a:latin typeface="Calibri"/>
+              </a:rPr>
+              <a:t>Pre-execution</a:t>
+            </a:r>
+          </a:p>
+        </p:txBody>
+      </p:sp>
+      <p:sp>
+        <p:nvSpPr>
+          <p:cNvPr id="12" name="TextBox 11"/>
+          <p:cNvSpPr txBox="1"/>
+          <p:nvPr/>
+        </p:nvSpPr>
+        <p:spPr>
+          <a:xfrm>
+            <a:off x="7498080" y="2020824"/>
+            <a:ext cx="2834640" cy="274320"/>
+          </a:xfrm>
+          <a:prstGeom prst="rect">
+            <a:avLst/>
+          </a:prstGeom>
+          <a:noFill/>
+        </p:spPr>
+        <p:txBody>
+          <a:bodyPr wrap="square" lIns="0" rIns="0" tIns="0" bIns="0">
+            <a:spAutoFit/>
+          </a:bodyPr>
+          <a:lstStyle/>
+          <a:p>
+            <a:pPr algn="ctr"/>
+            <a:r>
+              <a:rPr sz="900" b="1" i="0">
                 <a:solidFill>
                   <a:srgbClr val="35C9C9"/>
                 </a:solidFill>
                 <a:latin typeface="Calibri"/>
               </a:rPr>
-              <a:t>▸  Our square = pre-execution control × audit-grade attribution of the agent's full cost. Nobody occupies it.</a:t>
+              <a:t>Audit-grade attribution</a:t>
+            </a:r>
+          </a:p>
+        </p:txBody>
+      </p:sp>
+      <p:sp>
+        <p:nvSpPr>
+          <p:cNvPr id="13" name="TextBox 12"/>
+          <p:cNvSpPr txBox="1"/>
+          <p:nvPr/>
+        </p:nvSpPr>
+        <p:spPr>
+          <a:xfrm>
+            <a:off x="7635240" y="5559552"/>
+            <a:ext cx="2560320" cy="274320"/>
+          </a:xfrm>
+          <a:prstGeom prst="rect">
+            <a:avLst/>
+          </a:prstGeom>
+          <a:noFill/>
+        </p:spPr>
+        <p:txBody>
+          <a:bodyPr wrap="square" lIns="0" rIns="0" tIns="0" bIns="0">
+            <a:spAutoFit/>
+          </a:bodyPr>
+          <a:lstStyle/>
+          <a:p>
+            <a:pPr algn="ctr"/>
+            <a:r>
+              <a:rPr sz="900" b="0" i="0">
+                <a:solidFill>
+                  <a:srgbClr val="9AA7B4"/>
+                </a:solidFill>
+                <a:latin typeface="Calibri"/>
+              </a:rPr>
+              <a:t>Total visibility only</a:t>
+            </a:r>
+          </a:p>
+        </p:txBody>
+      </p:sp>
+      <p:sp>
+        <p:nvSpPr>
+          <p:cNvPr id="14" name="Oval 13"/>
+          <p:cNvSpPr/>
+          <p:nvPr/>
+        </p:nvSpPr>
+        <p:spPr>
+          <a:xfrm>
+            <a:off x="7563916" y="4764024"/>
+            <a:ext cx="128016" cy="128016"/>
+          </a:xfrm>
+          <a:prstGeom prst="ellipse">
+            <a:avLst/>
+          </a:prstGeom>
+          <a:solidFill>
+            <a:srgbClr val="9AA7B4"/>
+          </a:solidFill>
+          <a:ln>
+            <a:noFill/>
+          </a:ln>
+          <a:effectLst/>
+        </p:spPr>
+        <p:style>
+          <a:lnRef idx="1">
+            <a:schemeClr val="accent1"/>
+          </a:lnRef>
+          <a:fillRef idx="3">
+            <a:schemeClr val="accent1"/>
+          </a:fillRef>
+          <a:effectRef idx="2">
+            <a:schemeClr val="accent1"/>
+          </a:effectRef>
+          <a:fontRef idx="minor">
+            <a:schemeClr val="lt1"/>
+          </a:fontRef>
+        </p:style>
+        <p:txBody>
+          <a:bodyPr rtlCol="0" anchor="ctr"/>
+          <a:lstStyle/>
+          <a:p>
+            <a:pPr algn="ctr"/>
+          </a:p>
+        </p:txBody>
+      </p:sp>
+      <p:sp>
+        <p:nvSpPr>
+          <p:cNvPr id="15" name="TextBox 14"/>
+          <p:cNvSpPr txBox="1"/>
+          <p:nvPr/>
+        </p:nvSpPr>
+        <p:spPr>
+          <a:xfrm>
+            <a:off x="7755940" y="4681728"/>
+            <a:ext cx="1920240" cy="310896"/>
+          </a:xfrm>
+          <a:prstGeom prst="rect">
+            <a:avLst/>
+          </a:prstGeom>
+          <a:noFill/>
+        </p:spPr>
+        <p:txBody>
+          <a:bodyPr wrap="square" lIns="0" rIns="0" tIns="0" bIns="0">
+            <a:spAutoFit/>
+          </a:bodyPr>
+          <a:lstStyle/>
+          <a:p>
+            <a:pPr algn="l"/>
+            <a:r>
+              <a:rPr sz="900" b="0" i="0">
+                <a:solidFill>
+                  <a:srgbClr val="E8ECF1"/>
+                </a:solidFill>
+                <a:latin typeface="Calibri"/>
+              </a:rPr>
+              <a:t>Langfuse · Helicone</a:t>
+            </a:r>
+          </a:p>
+        </p:txBody>
+      </p:sp>
+      <p:sp>
+        <p:nvSpPr>
+          <p:cNvPr id="16" name="Oval 15"/>
+          <p:cNvSpPr/>
+          <p:nvPr/>
+        </p:nvSpPr>
+        <p:spPr>
+          <a:xfrm>
+            <a:off x="7242048" y="5276088"/>
+            <a:ext cx="128016" cy="128016"/>
+          </a:xfrm>
+          <a:prstGeom prst="ellipse">
+            <a:avLst/>
+          </a:prstGeom>
+          <a:solidFill>
+            <a:srgbClr val="9AA7B4"/>
+          </a:solidFill>
+          <a:ln>
+            <a:noFill/>
+          </a:ln>
+          <a:effectLst/>
+        </p:spPr>
+        <p:style>
+          <a:lnRef idx="1">
+            <a:schemeClr val="accent1"/>
+          </a:lnRef>
+          <a:fillRef idx="3">
+            <a:schemeClr val="accent1"/>
+          </a:fillRef>
+          <a:effectRef idx="2">
+            <a:schemeClr val="accent1"/>
+          </a:effectRef>
+          <a:fontRef idx="minor">
+            <a:schemeClr val="lt1"/>
+          </a:fontRef>
+        </p:style>
+        <p:txBody>
+          <a:bodyPr rtlCol="0" anchor="ctr"/>
+          <a:lstStyle/>
+          <a:p>
+            <a:pPr algn="ctr"/>
+          </a:p>
+        </p:txBody>
+      </p:sp>
+      <p:sp>
+        <p:nvSpPr>
+          <p:cNvPr id="17" name="TextBox 16"/>
+          <p:cNvSpPr txBox="1"/>
+          <p:nvPr/>
+        </p:nvSpPr>
+        <p:spPr>
+          <a:xfrm>
+            <a:off x="7434072" y="5193792"/>
+            <a:ext cx="1920240" cy="310896"/>
+          </a:xfrm>
+          <a:prstGeom prst="rect">
+            <a:avLst/>
+          </a:prstGeom>
+          <a:noFill/>
+        </p:spPr>
+        <p:txBody>
+          <a:bodyPr wrap="square" lIns="0" rIns="0" tIns="0" bIns="0">
+            <a:spAutoFit/>
+          </a:bodyPr>
+          <a:lstStyle/>
+          <a:p>
+            <a:pPr algn="l"/>
+            <a:r>
+              <a:rPr sz="900" b="0" i="0">
+                <a:solidFill>
+                  <a:srgbClr val="E8ECF1"/>
+                </a:solidFill>
+                <a:latin typeface="Calibri"/>
+              </a:rPr>
+              <a:t>Logs · scripts</a:t>
+            </a:r>
+          </a:p>
+        </p:txBody>
+      </p:sp>
+      <p:sp>
+        <p:nvSpPr>
+          <p:cNvPr id="18" name="Oval 17"/>
+          <p:cNvSpPr/>
+          <p:nvPr/>
+        </p:nvSpPr>
+        <p:spPr>
+          <a:xfrm>
+            <a:off x="7805318" y="3099816"/>
+            <a:ext cx="128016" cy="128016"/>
+          </a:xfrm>
+          <a:prstGeom prst="ellipse">
+            <a:avLst/>
+          </a:prstGeom>
+          <a:solidFill>
+            <a:srgbClr val="9AA7B4"/>
+          </a:solidFill>
+          <a:ln>
+            <a:noFill/>
+          </a:ln>
+          <a:effectLst/>
+        </p:spPr>
+        <p:style>
+          <a:lnRef idx="1">
+            <a:schemeClr val="accent1"/>
+          </a:lnRef>
+          <a:fillRef idx="3">
+            <a:schemeClr val="accent1"/>
+          </a:fillRef>
+          <a:effectRef idx="2">
+            <a:schemeClr val="accent1"/>
+          </a:effectRef>
+          <a:fontRef idx="minor">
+            <a:schemeClr val="lt1"/>
+          </a:fontRef>
+        </p:style>
+        <p:txBody>
+          <a:bodyPr rtlCol="0" anchor="ctr"/>
+          <a:lstStyle/>
+          <a:p>
+            <a:pPr algn="ctr"/>
+          </a:p>
+        </p:txBody>
+      </p:sp>
+      <p:sp>
+        <p:nvSpPr>
+          <p:cNvPr id="19" name="TextBox 18"/>
+          <p:cNvSpPr txBox="1"/>
+          <p:nvPr/>
+        </p:nvSpPr>
+        <p:spPr>
+          <a:xfrm>
+            <a:off x="7997342" y="3017520"/>
+            <a:ext cx="1920240" cy="310896"/>
+          </a:xfrm>
+          <a:prstGeom prst="rect">
+            <a:avLst/>
+          </a:prstGeom>
+          <a:noFill/>
+        </p:spPr>
+        <p:txBody>
+          <a:bodyPr wrap="square" lIns="0" rIns="0" tIns="0" bIns="0">
+            <a:spAutoFit/>
+          </a:bodyPr>
+          <a:lstStyle/>
+          <a:p>
+            <a:pPr algn="l"/>
+            <a:r>
+              <a:rPr sz="900" b="0" i="0">
+                <a:solidFill>
+                  <a:srgbClr val="E8ECF1"/>
+                </a:solidFill>
+                <a:latin typeface="Calibri"/>
+              </a:rPr>
+              <a:t>CloudZero · Vantage*</a:t>
+            </a:r>
+          </a:p>
+        </p:txBody>
+      </p:sp>
+      <p:sp>
+        <p:nvSpPr>
+          <p:cNvPr id="20" name="Oval 19"/>
+          <p:cNvSpPr/>
+          <p:nvPr/>
+        </p:nvSpPr>
+        <p:spPr>
+          <a:xfrm>
+            <a:off x="9736531" y="4956048"/>
+            <a:ext cx="128016" cy="128016"/>
+          </a:xfrm>
+          <a:prstGeom prst="ellipse">
+            <a:avLst/>
+          </a:prstGeom>
+          <a:solidFill>
+            <a:srgbClr val="9AA7B4"/>
+          </a:solidFill>
+          <a:ln>
+            <a:noFill/>
+          </a:ln>
+          <a:effectLst/>
+        </p:spPr>
+        <p:style>
+          <a:lnRef idx="1">
+            <a:schemeClr val="accent1"/>
+          </a:lnRef>
+          <a:fillRef idx="3">
+            <a:schemeClr val="accent1"/>
+          </a:fillRef>
+          <a:effectRef idx="2">
+            <a:schemeClr val="accent1"/>
+          </a:effectRef>
+          <a:fontRef idx="minor">
+            <a:schemeClr val="lt1"/>
+          </a:fontRef>
+        </p:style>
+        <p:txBody>
+          <a:bodyPr rtlCol="0" anchor="ctr"/>
+          <a:lstStyle/>
+          <a:p>
+            <a:pPr algn="ctr"/>
+          </a:p>
+        </p:txBody>
+      </p:sp>
+      <p:sp>
+        <p:nvSpPr>
+          <p:cNvPr id="21" name="TextBox 20"/>
+          <p:cNvSpPr txBox="1"/>
+          <p:nvPr/>
+        </p:nvSpPr>
+        <p:spPr>
+          <a:xfrm>
+            <a:off x="7770571" y="4873752"/>
+            <a:ext cx="1920240" cy="310896"/>
+          </a:xfrm>
+          <a:prstGeom prst="rect">
+            <a:avLst/>
+          </a:prstGeom>
+          <a:noFill/>
+        </p:spPr>
+        <p:txBody>
+          <a:bodyPr wrap="square" lIns="0" rIns="0" tIns="0" bIns="0">
+            <a:spAutoFit/>
+          </a:bodyPr>
+          <a:lstStyle/>
+          <a:p>
+            <a:pPr algn="r"/>
+            <a:r>
+              <a:rPr sz="900" b="0" i="0">
+                <a:solidFill>
+                  <a:srgbClr val="E8ECF1"/>
+                </a:solidFill>
+                <a:latin typeface="Calibri"/>
+              </a:rPr>
+              <a:t>LiteLLM · Portkey</a:t>
+            </a:r>
+          </a:p>
+        </p:txBody>
+      </p:sp>
+      <p:sp>
+        <p:nvSpPr>
+          <p:cNvPr id="22" name="Oval 21"/>
+          <p:cNvSpPr/>
+          <p:nvPr/>
+        </p:nvSpPr>
+        <p:spPr>
+          <a:xfrm>
+            <a:off x="9816998" y="2907792"/>
+            <a:ext cx="128016" cy="128016"/>
+          </a:xfrm>
+          <a:prstGeom prst="ellipse">
+            <a:avLst/>
+          </a:prstGeom>
+          <a:solidFill>
+            <a:srgbClr val="F2C14E"/>
+          </a:solidFill>
+          <a:ln>
+            <a:noFill/>
+          </a:ln>
+          <a:effectLst/>
+        </p:spPr>
+        <p:style>
+          <a:lnRef idx="1">
+            <a:schemeClr val="accent1"/>
+          </a:lnRef>
+          <a:fillRef idx="3">
+            <a:schemeClr val="accent1"/>
+          </a:fillRef>
+          <a:effectRef idx="2">
+            <a:schemeClr val="accent1"/>
+          </a:effectRef>
+          <a:fontRef idx="minor">
+            <a:schemeClr val="lt1"/>
+          </a:fontRef>
+        </p:style>
+        <p:txBody>
+          <a:bodyPr rtlCol="0" anchor="ctr"/>
+          <a:lstStyle/>
+          <a:p>
+            <a:pPr algn="ctr"/>
+          </a:p>
+        </p:txBody>
+      </p:sp>
+      <p:sp>
+        <p:nvSpPr>
+          <p:cNvPr id="23" name="TextBox 22"/>
+          <p:cNvSpPr txBox="1"/>
+          <p:nvPr/>
+        </p:nvSpPr>
+        <p:spPr>
+          <a:xfrm>
+            <a:off x="7851038" y="2825496"/>
+            <a:ext cx="1920240" cy="310896"/>
+          </a:xfrm>
+          <a:prstGeom prst="rect">
+            <a:avLst/>
+          </a:prstGeom>
+          <a:noFill/>
+        </p:spPr>
+        <p:txBody>
+          <a:bodyPr wrap="square" lIns="0" rIns="0" tIns="0" bIns="0">
+            <a:spAutoFit/>
+          </a:bodyPr>
+          <a:lstStyle/>
+          <a:p>
+            <a:pPr algn="r"/>
+            <a:r>
+              <a:rPr sz="900" b="0" i="0">
+                <a:solidFill>
+                  <a:srgbClr val="F2C14E"/>
+                </a:solidFill>
+                <a:latin typeface="Calibri"/>
+              </a:rPr>
+              <a:t>SatGate (pre-launch)</a:t>
+            </a:r>
+          </a:p>
+        </p:txBody>
+      </p:sp>
+      <p:sp>
+        <p:nvSpPr>
+          <p:cNvPr id="24" name="Oval 23"/>
+          <p:cNvSpPr/>
+          <p:nvPr/>
+        </p:nvSpPr>
+        <p:spPr>
+          <a:xfrm>
+            <a:off x="10352836" y="2496312"/>
+            <a:ext cx="182880" cy="182880"/>
+          </a:xfrm>
+          <a:prstGeom prst="ellipse">
+            <a:avLst/>
+          </a:prstGeom>
+          <a:solidFill>
+            <a:srgbClr val="FF6B35"/>
+          </a:solidFill>
+          <a:ln>
+            <a:noFill/>
+          </a:ln>
+          <a:effectLst/>
+        </p:spPr>
+        <p:style>
+          <a:lnRef idx="1">
+            <a:schemeClr val="accent1"/>
+          </a:lnRef>
+          <a:fillRef idx="3">
+            <a:schemeClr val="accent1"/>
+          </a:fillRef>
+          <a:effectRef idx="2">
+            <a:schemeClr val="accent1"/>
+          </a:effectRef>
+          <a:fontRef idx="minor">
+            <a:schemeClr val="lt1"/>
+          </a:fontRef>
+        </p:style>
+        <p:txBody>
+          <a:bodyPr rtlCol="0" anchor="ctr"/>
+          <a:lstStyle/>
+          <a:p>
+            <a:pPr algn="ctr"/>
+          </a:p>
+        </p:txBody>
+      </p:sp>
+      <p:sp>
+        <p:nvSpPr>
+          <p:cNvPr id="25" name="TextBox 24"/>
+          <p:cNvSpPr txBox="1"/>
+          <p:nvPr/>
+        </p:nvSpPr>
+        <p:spPr>
+          <a:xfrm>
+            <a:off x="8414308" y="2441448"/>
+            <a:ext cx="1920240" cy="310896"/>
+          </a:xfrm>
+          <a:prstGeom prst="rect">
+            <a:avLst/>
+          </a:prstGeom>
+          <a:noFill/>
+        </p:spPr>
+        <p:txBody>
+          <a:bodyPr wrap="square" lIns="0" rIns="0" tIns="0" bIns="0">
+            <a:spAutoFit/>
+          </a:bodyPr>
+          <a:lstStyle/>
+          <a:p>
+            <a:pPr algn="r"/>
+            <a:r>
+              <a:rPr sz="1000" b="1" i="0">
+                <a:solidFill>
+                  <a:srgbClr val="FF6B35"/>
+                </a:solidFill>
+                <a:latin typeface="Calibri"/>
+              </a:rPr>
+              <a:t>Kyber</a:t>
+            </a:r>
+          </a:p>
+        </p:txBody>
+      </p:sp>
+      <p:sp>
+        <p:nvSpPr>
+          <p:cNvPr id="26" name="TextBox 25"/>
+          <p:cNvSpPr txBox="1"/>
+          <p:nvPr/>
+        </p:nvSpPr>
+        <p:spPr>
+          <a:xfrm>
+            <a:off x="6355080" y="6199632"/>
+            <a:ext cx="5120640" cy="320040"/>
+          </a:xfrm>
+          <a:prstGeom prst="rect">
+            <a:avLst/>
+          </a:prstGeom>
+          <a:noFill/>
+        </p:spPr>
+        <p:txBody>
+          <a:bodyPr wrap="square" lIns="0" rIns="0" tIns="0" bIns="0">
+            <a:spAutoFit/>
+          </a:bodyPr>
+          <a:lstStyle/>
+          <a:p>
+            <a:pPr algn="ctr"/>
+            <a:r>
+              <a:rPr sz="900" b="0" i="0">
+                <a:solidFill>
+                  <a:srgbClr val="9AA7B4"/>
+                </a:solidFill>
+                <a:latin typeface="Calibri"/>
+              </a:rPr>
+              <a:t>*FinOps attributes cloud spend — off the agent path, after-the-fact</a:t>
             </a:r>
           </a:p>
         </p:txBody>
@@ -6493,7 +7242,7 @@
           <a:p>
             <a:pPr algn="l"/>
             <a:r>
-              <a:rPr sz="2700" b="1" i="0">
+              <a:rPr sz="2500" b="1" i="0">
                 <a:solidFill>
                   <a:srgbClr val="E8ECF1"/>
                 </a:solidFill>
@@ -6513,7 +7262,7 @@
         <p:spPr>
           <a:xfrm>
             <a:off x="868680" y="2148840"/>
-            <a:ext cx="10424160" cy="4023360"/>
+            <a:ext cx="5257800" cy="4023360"/>
           </a:xfrm>
           <a:prstGeom prst="rect">
             <a:avLst/>
@@ -6528,97 +7277,727 @@
           <a:p>
             <a:pPr algn="l">
               <a:spcAft>
-                <a:spcPts val="800"/>
+                <a:spcPts val="900"/>
               </a:spcAft>
             </a:pPr>
             <a:r>
-              <a:rPr sz="1700" b="1" i="0">
-                <a:solidFill>
-                  <a:srgbClr val="E8ECF1"/>
-                </a:solidFill>
-                <a:latin typeface="Calibri"/>
-              </a:rPr>
-              <a:t>▸  Revenue only (no cost/net income): Yr1 ~$0.24M → Yr2 ~$1.35M → Yr3 ~$4.8M ⚠ (strong-execution case).</a:t>
+              <a:rPr sz="1500" b="0" i="0">
+                <a:solidFill>
+                  <a:srgbClr val="9AA7B4"/>
+                </a:solidFill>
+                <a:latin typeface="Calibri"/>
+              </a:rPr>
+              <a:t>▸  Revenue only (no cost/net income). Engine = new logos + agent expansion.</a:t>
             </a:r>
           </a:p>
           <a:p>
             <a:pPr algn="l">
               <a:spcAft>
-                <a:spcPts val="800"/>
+                <a:spcPts val="900"/>
               </a:spcAft>
             </a:pPr>
             <a:r>
-              <a:rPr sz="1700" b="0" i="0">
-                <a:solidFill>
-                  <a:srgbClr val="9AA7B4"/>
-                </a:solidFill>
-                <a:latin typeface="Calibri"/>
-              </a:rPr>
-              <a:t>▸  Grounded in customer count @ $30K ACV: ~8 → ~45 → ~160 paying customers. Engine = new logos + agent expansion (target NRR ~110%, top-quartile).</a:t>
+              <a:rPr sz="1500" b="1" i="0">
+                <a:solidFill>
+                  <a:srgbClr val="35C9C9"/>
+                </a:solidFill>
+                <a:latin typeface="Calibri"/>
+              </a:rPr>
+              <a:t>▸  Vision: in an age where autonomous software spends money, a world where every dollar is explainable.</a:t>
             </a:r>
           </a:p>
           <a:p>
             <a:pPr algn="l">
               <a:spcAft>
-                <a:spcPts val="800"/>
+                <a:spcPts val="900"/>
               </a:spcAft>
             </a:pPr>
             <a:r>
-              <a:rPr sz="1700" b="1" i="0">
-                <a:solidFill>
-                  <a:srgbClr val="35C9C9"/>
-                </a:solidFill>
-                <a:latin typeface="Calibri"/>
-              </a:rPr>
-              <a:t>▸  Vision: in an age where autonomous software spends money, a world where every dollar is explainable.</a:t>
+              <a:rPr sz="1500" b="1" i="0">
+                <a:solidFill>
+                  <a:srgbClr val="FF6B35"/>
+                </a:solidFill>
+                <a:latin typeface="Calibri"/>
+              </a:rPr>
+              <a:t>▸  Our ask isn't a check — it's connections:</a:t>
             </a:r>
           </a:p>
           <a:p>
             <a:pPr algn="l">
               <a:spcAft>
-                <a:spcPts val="800"/>
+                <a:spcPts val="900"/>
               </a:spcAft>
             </a:pPr>
             <a:r>
-              <a:rPr sz="1700" b="0" i="0">
+              <a:rPr sz="1500" b="0" i="0">
+                <a:solidFill>
+                  <a:srgbClr val="35C9C9"/>
+                </a:solidFill>
+                <a:latin typeface="Calibri"/>
+              </a:rPr>
+              <a:t>▸  (a) AI / infra advisors  ·  (b) mid-market design partners  ·  (c) warm intros to CTOs like Sarah running agents in production.</a:t>
+            </a:r>
+          </a:p>
+        </p:txBody>
+      </p:sp>
+      <p:cxnSp>
+        <p:nvCxnSpPr>
+          <p:cNvPr id="7" name="Connector 6"/>
+          <p:cNvCxnSpPr/>
+          <p:nvPr/>
+        </p:nvCxnSpPr>
+        <p:spPr>
+          <a:xfrm>
+            <a:off x="6903720" y="5532120"/>
+            <a:ext cx="4297680" cy="0"/>
+          </a:xfrm>
+          <a:prstGeom prst="bentConnector3">
+            <a:avLst/>
+          </a:prstGeom>
+          <a:ln w="12700">
+            <a:solidFill>
+              <a:srgbClr val="9AA7B4"/>
+            </a:solidFill>
+          </a:ln>
+          <a:effectLst/>
+        </p:spPr>
+        <p:style>
+          <a:lnRef idx="2">
+            <a:schemeClr val="accent1"/>
+          </a:lnRef>
+          <a:fillRef idx="0">
+            <a:schemeClr val="accent1"/>
+          </a:fillRef>
+          <a:effectRef idx="1">
+            <a:schemeClr val="accent1"/>
+          </a:effectRef>
+          <a:fontRef idx="minor">
+            <a:schemeClr val="tx1"/>
+          </a:fontRef>
+        </p:style>
+      </p:cxnSp>
+      <p:cxnSp>
+        <p:nvCxnSpPr>
+          <p:cNvPr id="8" name="Connector 7"/>
+          <p:cNvCxnSpPr/>
+          <p:nvPr/>
+        </p:nvCxnSpPr>
+        <p:spPr>
+          <a:xfrm>
+            <a:off x="6903720" y="2514600"/>
+            <a:ext cx="0" cy="3017520"/>
+          </a:xfrm>
+          <a:prstGeom prst="bentConnector3">
+            <a:avLst/>
+          </a:prstGeom>
+          <a:ln w="12700">
+            <a:solidFill>
+              <a:srgbClr val="9AA7B4"/>
+            </a:solidFill>
+          </a:ln>
+          <a:effectLst/>
+        </p:spPr>
+        <p:style>
+          <a:lnRef idx="2">
+            <a:schemeClr val="accent1"/>
+          </a:lnRef>
+          <a:fillRef idx="0">
+            <a:schemeClr val="accent1"/>
+          </a:fillRef>
+          <a:effectRef idx="1">
+            <a:schemeClr val="accent1"/>
+          </a:effectRef>
+          <a:fontRef idx="minor">
+            <a:schemeClr val="tx1"/>
+          </a:fontRef>
+        </p:style>
+      </p:cxnSp>
+      <p:sp>
+        <p:nvSpPr>
+          <p:cNvPr id="9" name="Freeform 8"/>
+          <p:cNvSpPr/>
+          <p:nvPr/>
+        </p:nvSpPr>
+        <p:spPr>
+          <a:xfrm>
+            <a:off x="6903720" y="2514600"/>
+            <a:ext cx="4297680" cy="3017520"/>
+          </a:xfrm>
+          <a:custGeom>
+            <a:avLst/>
+            <a:gdLst/>
+            <a:ahLst/>
+            <a:cxnLst/>
+            <a:rect l="l" t="t" r="r" b="b"/>
+            <a:pathLst>
+              <a:path w="4297680" h="3017520">
+                <a:moveTo>
+                  <a:pt x="0" y="3017520"/>
+                </a:moveTo>
+                <a:lnTo>
+                  <a:pt x="0" y="3017520"/>
+                </a:lnTo>
+                <a:lnTo>
+                  <a:pt x="1432560" y="2866644"/>
+                </a:lnTo>
+                <a:lnTo>
+                  <a:pt x="2865120" y="2168842"/>
+                </a:lnTo>
+                <a:lnTo>
+                  <a:pt x="4297680" y="0"/>
+                </a:lnTo>
+                <a:lnTo>
+                  <a:pt x="4297680" y="3017520"/>
+                </a:lnTo>
+                <a:close/>
+              </a:path>
+            </a:pathLst>
+          </a:custGeom>
+          <a:solidFill>
+            <a:srgbClr val="123A40"/>
+          </a:solidFill>
+          <a:ln w="31750">
+            <a:solidFill>
+              <a:srgbClr val="35C9C9"/>
+            </a:solidFill>
+          </a:ln>
+          <a:effectLst/>
+        </p:spPr>
+        <p:style>
+          <a:lnRef idx="1">
+            <a:schemeClr val="accent1"/>
+          </a:lnRef>
+          <a:fillRef idx="3">
+            <a:schemeClr val="accent1"/>
+          </a:fillRef>
+          <a:effectRef idx="2">
+            <a:schemeClr val="accent1"/>
+          </a:effectRef>
+          <a:fontRef idx="minor">
+            <a:schemeClr val="lt1"/>
+          </a:fontRef>
+        </p:style>
+        <p:txBody>
+          <a:bodyPr rtlCol="0" anchor="ctr"/>
+          <a:lstStyle/>
+          <a:p>
+            <a:pPr algn="ctr"/>
+          </a:p>
+        </p:txBody>
+      </p:sp>
+      <p:sp>
+        <p:nvSpPr>
+          <p:cNvPr id="10" name="TextBox 9"/>
+          <p:cNvSpPr txBox="1"/>
+          <p:nvPr/>
+        </p:nvSpPr>
+        <p:spPr>
+          <a:xfrm>
+            <a:off x="6355080" y="5586984"/>
+            <a:ext cx="1097280" cy="274320"/>
+          </a:xfrm>
+          <a:prstGeom prst="rect">
+            <a:avLst/>
+          </a:prstGeom>
+          <a:noFill/>
+        </p:spPr>
+        <p:txBody>
+          <a:bodyPr wrap="square" lIns="0" rIns="0" tIns="0" bIns="0">
+            <a:spAutoFit/>
+          </a:bodyPr>
+          <a:lstStyle/>
+          <a:p>
+            <a:pPr algn="ctr"/>
+            <a:r>
+              <a:rPr sz="1100" b="0" i="0">
+                <a:solidFill>
+                  <a:srgbClr val="9AA7B4"/>
+                </a:solidFill>
+                <a:latin typeface="Calibri"/>
+              </a:rPr>
+              <a:t>Yr0</a:t>
+            </a:r>
+          </a:p>
+        </p:txBody>
+      </p:sp>
+      <p:sp>
+        <p:nvSpPr>
+          <p:cNvPr id="11" name="Oval 10"/>
+          <p:cNvSpPr/>
+          <p:nvPr/>
+        </p:nvSpPr>
+        <p:spPr>
+          <a:xfrm>
+            <a:off x="8263128" y="5308092"/>
+            <a:ext cx="146304" cy="146304"/>
+          </a:xfrm>
+          <a:prstGeom prst="ellipse">
+            <a:avLst/>
+          </a:prstGeom>
+          <a:solidFill>
+            <a:srgbClr val="FF6B35"/>
+          </a:solidFill>
+          <a:ln>
+            <a:noFill/>
+          </a:ln>
+          <a:effectLst/>
+        </p:spPr>
+        <p:style>
+          <a:lnRef idx="1">
+            <a:schemeClr val="accent1"/>
+          </a:lnRef>
+          <a:fillRef idx="3">
+            <a:schemeClr val="accent1"/>
+          </a:fillRef>
+          <a:effectRef idx="2">
+            <a:schemeClr val="accent1"/>
+          </a:effectRef>
+          <a:fontRef idx="minor">
+            <a:schemeClr val="lt1"/>
+          </a:fontRef>
+        </p:style>
+        <p:txBody>
+          <a:bodyPr rtlCol="0" anchor="ctr"/>
+          <a:lstStyle/>
+          <a:p>
+            <a:pPr algn="ctr"/>
+          </a:p>
+        </p:txBody>
+      </p:sp>
+      <p:sp>
+        <p:nvSpPr>
+          <p:cNvPr id="12" name="TextBox 11"/>
+          <p:cNvSpPr txBox="1"/>
+          <p:nvPr/>
+        </p:nvSpPr>
+        <p:spPr>
+          <a:xfrm>
+            <a:off x="7559040" y="4960620"/>
+            <a:ext cx="1554480" cy="320040"/>
+          </a:xfrm>
+          <a:prstGeom prst="rect">
+            <a:avLst/>
+          </a:prstGeom>
+          <a:noFill/>
+        </p:spPr>
+        <p:txBody>
+          <a:bodyPr wrap="square" lIns="0" rIns="0" tIns="0" bIns="0">
+            <a:spAutoFit/>
+          </a:bodyPr>
+          <a:lstStyle/>
+          <a:p>
+            <a:pPr algn="ctr"/>
+            <a:r>
+              <a:rPr sz="1300" b="1" i="0">
                 <a:solidFill>
                   <a:srgbClr val="E8ECF1"/>
                 </a:solidFill>
                 <a:latin typeface="Calibri"/>
               </a:rPr>
-              <a:t>▸  Hourglass: in 10 years every agent explains its own cost. Today, starting with mid-market CTOs like Sarah.</a:t>
-            </a:r>
-          </a:p>
-          <a:p>
-            <a:pPr algn="l">
-              <a:spcAft>
-                <a:spcPts val="800"/>
-              </a:spcAft>
-            </a:pPr>
-            <a:r>
-              <a:rPr sz="1700" b="1" i="0">
-                <a:solidFill>
-                  <a:srgbClr val="FF6B35"/>
-                </a:solidFill>
-                <a:latin typeface="Calibri"/>
-              </a:rPr>
-              <a:t>▸  Our ask isn't a check — it's connections:</a:t>
-            </a:r>
-          </a:p>
-          <a:p>
-            <a:pPr algn="l">
-              <a:spcAft>
-                <a:spcPts val="800"/>
-              </a:spcAft>
-            </a:pPr>
-            <a:r>
-              <a:rPr sz="1700" b="0" i="0">
+              <a:t>$0.24M</a:t>
+            </a:r>
+          </a:p>
+        </p:txBody>
+      </p:sp>
+      <p:sp>
+        <p:nvSpPr>
+          <p:cNvPr id="13" name="TextBox 12"/>
+          <p:cNvSpPr txBox="1"/>
+          <p:nvPr/>
+        </p:nvSpPr>
+        <p:spPr>
+          <a:xfrm>
+            <a:off x="7787640" y="5586984"/>
+            <a:ext cx="1097280" cy="274320"/>
+          </a:xfrm>
+          <a:prstGeom prst="rect">
+            <a:avLst/>
+          </a:prstGeom>
+          <a:noFill/>
+        </p:spPr>
+        <p:txBody>
+          <a:bodyPr wrap="square" lIns="0" rIns="0" tIns="0" bIns="0">
+            <a:spAutoFit/>
+          </a:bodyPr>
+          <a:lstStyle/>
+          <a:p>
+            <a:pPr algn="ctr"/>
+            <a:r>
+              <a:rPr sz="1100" b="0" i="0">
+                <a:solidFill>
+                  <a:srgbClr val="9AA7B4"/>
+                </a:solidFill>
+                <a:latin typeface="Calibri"/>
+              </a:rPr>
+              <a:t>Yr1</a:t>
+            </a:r>
+          </a:p>
+        </p:txBody>
+      </p:sp>
+      <p:sp>
+        <p:nvSpPr>
+          <p:cNvPr id="14" name="TextBox 13"/>
+          <p:cNvSpPr txBox="1"/>
+          <p:nvPr/>
+        </p:nvSpPr>
+        <p:spPr>
+          <a:xfrm>
+            <a:off x="7696200" y="5861304"/>
+            <a:ext cx="1280160" cy="274320"/>
+          </a:xfrm>
+          <a:prstGeom prst="rect">
+            <a:avLst/>
+          </a:prstGeom>
+          <a:noFill/>
+        </p:spPr>
+        <p:txBody>
+          <a:bodyPr wrap="square" lIns="0" rIns="0" tIns="0" bIns="0">
+            <a:spAutoFit/>
+          </a:bodyPr>
+          <a:lstStyle/>
+          <a:p>
+            <a:pPr algn="ctr"/>
+            <a:r>
+              <a:rPr sz="1000" b="0" i="0">
                 <a:solidFill>
                   <a:srgbClr val="35C9C9"/>
                 </a:solidFill>
                 <a:latin typeface="Calibri"/>
               </a:rPr>
-              <a:t>▸  (a) AI / infra experts &amp; advisors to pressure-test the wedge  ·  (b) mid-market teams to onboard as design partners  ·  (c) warm intros to CTOs like Sarah running agents in production.</a:t>
+              <a:t>8 cust.</a:t>
+            </a:r>
+          </a:p>
+        </p:txBody>
+      </p:sp>
+      <p:sp>
+        <p:nvSpPr>
+          <p:cNvPr id="15" name="Oval 14"/>
+          <p:cNvSpPr/>
+          <p:nvPr/>
+        </p:nvSpPr>
+        <p:spPr>
+          <a:xfrm>
+            <a:off x="9695688" y="4610290"/>
+            <a:ext cx="146304" cy="146304"/>
+          </a:xfrm>
+          <a:prstGeom prst="ellipse">
+            <a:avLst/>
+          </a:prstGeom>
+          <a:solidFill>
+            <a:srgbClr val="FF6B35"/>
+          </a:solidFill>
+          <a:ln>
+            <a:noFill/>
+          </a:ln>
+          <a:effectLst/>
+        </p:spPr>
+        <p:style>
+          <a:lnRef idx="1">
+            <a:schemeClr val="accent1"/>
+          </a:lnRef>
+          <a:fillRef idx="3">
+            <a:schemeClr val="accent1"/>
+          </a:fillRef>
+          <a:effectRef idx="2">
+            <a:schemeClr val="accent1"/>
+          </a:effectRef>
+          <a:fontRef idx="minor">
+            <a:schemeClr val="lt1"/>
+          </a:fontRef>
+        </p:style>
+        <p:txBody>
+          <a:bodyPr rtlCol="0" anchor="ctr"/>
+          <a:lstStyle/>
+          <a:p>
+            <a:pPr algn="ctr"/>
+          </a:p>
+        </p:txBody>
+      </p:sp>
+      <p:sp>
+        <p:nvSpPr>
+          <p:cNvPr id="16" name="TextBox 15"/>
+          <p:cNvSpPr txBox="1"/>
+          <p:nvPr/>
+        </p:nvSpPr>
+        <p:spPr>
+          <a:xfrm>
+            <a:off x="8991600" y="4262818"/>
+            <a:ext cx="1554480" cy="320040"/>
+          </a:xfrm>
+          <a:prstGeom prst="rect">
+            <a:avLst/>
+          </a:prstGeom>
+          <a:noFill/>
+        </p:spPr>
+        <p:txBody>
+          <a:bodyPr wrap="square" lIns="0" rIns="0" tIns="0" bIns="0">
+            <a:spAutoFit/>
+          </a:bodyPr>
+          <a:lstStyle/>
+          <a:p>
+            <a:pPr algn="ctr"/>
+            <a:r>
+              <a:rPr sz="1300" b="1" i="0">
+                <a:solidFill>
+                  <a:srgbClr val="E8ECF1"/>
+                </a:solidFill>
+                <a:latin typeface="Calibri"/>
+              </a:rPr>
+              <a:t>$1.35M</a:t>
+            </a:r>
+          </a:p>
+        </p:txBody>
+      </p:sp>
+      <p:sp>
+        <p:nvSpPr>
+          <p:cNvPr id="17" name="TextBox 16"/>
+          <p:cNvSpPr txBox="1"/>
+          <p:nvPr/>
+        </p:nvSpPr>
+        <p:spPr>
+          <a:xfrm>
+            <a:off x="9220200" y="5586984"/>
+            <a:ext cx="1097280" cy="274320"/>
+          </a:xfrm>
+          <a:prstGeom prst="rect">
+            <a:avLst/>
+          </a:prstGeom>
+          <a:noFill/>
+        </p:spPr>
+        <p:txBody>
+          <a:bodyPr wrap="square" lIns="0" rIns="0" tIns="0" bIns="0">
+            <a:spAutoFit/>
+          </a:bodyPr>
+          <a:lstStyle/>
+          <a:p>
+            <a:pPr algn="ctr"/>
+            <a:r>
+              <a:rPr sz="1100" b="0" i="0">
+                <a:solidFill>
+                  <a:srgbClr val="9AA7B4"/>
+                </a:solidFill>
+                <a:latin typeface="Calibri"/>
+              </a:rPr>
+              <a:t>Yr2</a:t>
+            </a:r>
+          </a:p>
+        </p:txBody>
+      </p:sp>
+      <p:sp>
+        <p:nvSpPr>
+          <p:cNvPr id="18" name="TextBox 17"/>
+          <p:cNvSpPr txBox="1"/>
+          <p:nvPr/>
+        </p:nvSpPr>
+        <p:spPr>
+          <a:xfrm>
+            <a:off x="9128760" y="5861304"/>
+            <a:ext cx="1280160" cy="274320"/>
+          </a:xfrm>
+          <a:prstGeom prst="rect">
+            <a:avLst/>
+          </a:prstGeom>
+          <a:noFill/>
+        </p:spPr>
+        <p:txBody>
+          <a:bodyPr wrap="square" lIns="0" rIns="0" tIns="0" bIns="0">
+            <a:spAutoFit/>
+          </a:bodyPr>
+          <a:lstStyle/>
+          <a:p>
+            <a:pPr algn="ctr"/>
+            <a:r>
+              <a:rPr sz="1000" b="0" i="0">
+                <a:solidFill>
+                  <a:srgbClr val="35C9C9"/>
+                </a:solidFill>
+                <a:latin typeface="Calibri"/>
+              </a:rPr>
+              <a:t>45 cust.</a:t>
+            </a:r>
+          </a:p>
+        </p:txBody>
+      </p:sp>
+      <p:sp>
+        <p:nvSpPr>
+          <p:cNvPr id="19" name="Oval 18"/>
+          <p:cNvSpPr/>
+          <p:nvPr/>
+        </p:nvSpPr>
+        <p:spPr>
+          <a:xfrm>
+            <a:off x="11128248" y="2441448"/>
+            <a:ext cx="146304" cy="146304"/>
+          </a:xfrm>
+          <a:prstGeom prst="ellipse">
+            <a:avLst/>
+          </a:prstGeom>
+          <a:solidFill>
+            <a:srgbClr val="FF6B35"/>
+          </a:solidFill>
+          <a:ln>
+            <a:noFill/>
+          </a:ln>
+          <a:effectLst/>
+        </p:spPr>
+        <p:style>
+          <a:lnRef idx="1">
+            <a:schemeClr val="accent1"/>
+          </a:lnRef>
+          <a:fillRef idx="3">
+            <a:schemeClr val="accent1"/>
+          </a:fillRef>
+          <a:effectRef idx="2">
+            <a:schemeClr val="accent1"/>
+          </a:effectRef>
+          <a:fontRef idx="minor">
+            <a:schemeClr val="lt1"/>
+          </a:fontRef>
+        </p:style>
+        <p:txBody>
+          <a:bodyPr rtlCol="0" anchor="ctr"/>
+          <a:lstStyle/>
+          <a:p>
+            <a:pPr algn="ctr"/>
+          </a:p>
+        </p:txBody>
+      </p:sp>
+      <p:sp>
+        <p:nvSpPr>
+          <p:cNvPr id="20" name="TextBox 19"/>
+          <p:cNvSpPr txBox="1"/>
+          <p:nvPr/>
+        </p:nvSpPr>
+        <p:spPr>
+          <a:xfrm>
+            <a:off x="10424160" y="2093976"/>
+            <a:ext cx="1554480" cy="320040"/>
+          </a:xfrm>
+          <a:prstGeom prst="rect">
+            <a:avLst/>
+          </a:prstGeom>
+          <a:noFill/>
+        </p:spPr>
+        <p:txBody>
+          <a:bodyPr wrap="square" lIns="0" rIns="0" tIns="0" bIns="0">
+            <a:spAutoFit/>
+          </a:bodyPr>
+          <a:lstStyle/>
+          <a:p>
+            <a:pPr algn="ctr"/>
+            <a:r>
+              <a:rPr sz="1300" b="1" i="0">
+                <a:solidFill>
+                  <a:srgbClr val="E8ECF1"/>
+                </a:solidFill>
+                <a:latin typeface="Calibri"/>
+              </a:rPr>
+              <a:t>$4.8M</a:t>
+            </a:r>
+          </a:p>
+        </p:txBody>
+      </p:sp>
+      <p:sp>
+        <p:nvSpPr>
+          <p:cNvPr id="21" name="TextBox 20"/>
+          <p:cNvSpPr txBox="1"/>
+          <p:nvPr/>
+        </p:nvSpPr>
+        <p:spPr>
+          <a:xfrm>
+            <a:off x="10652760" y="5586984"/>
+            <a:ext cx="1097280" cy="274320"/>
+          </a:xfrm>
+          <a:prstGeom prst="rect">
+            <a:avLst/>
+          </a:prstGeom>
+          <a:noFill/>
+        </p:spPr>
+        <p:txBody>
+          <a:bodyPr wrap="square" lIns="0" rIns="0" tIns="0" bIns="0">
+            <a:spAutoFit/>
+          </a:bodyPr>
+          <a:lstStyle/>
+          <a:p>
+            <a:pPr algn="ctr"/>
+            <a:r>
+              <a:rPr sz="1100" b="0" i="0">
+                <a:solidFill>
+                  <a:srgbClr val="9AA7B4"/>
+                </a:solidFill>
+                <a:latin typeface="Calibri"/>
+              </a:rPr>
+              <a:t>Yr3</a:t>
+            </a:r>
+          </a:p>
+        </p:txBody>
+      </p:sp>
+      <p:sp>
+        <p:nvSpPr>
+          <p:cNvPr id="22" name="TextBox 21"/>
+          <p:cNvSpPr txBox="1"/>
+          <p:nvPr/>
+        </p:nvSpPr>
+        <p:spPr>
+          <a:xfrm>
+            <a:off x="10561320" y="5861304"/>
+            <a:ext cx="1280160" cy="274320"/>
+          </a:xfrm>
+          <a:prstGeom prst="rect">
+            <a:avLst/>
+          </a:prstGeom>
+          <a:noFill/>
+        </p:spPr>
+        <p:txBody>
+          <a:bodyPr wrap="square" lIns="0" rIns="0" tIns="0" bIns="0">
+            <a:spAutoFit/>
+          </a:bodyPr>
+          <a:lstStyle/>
+          <a:p>
+            <a:pPr algn="ctr"/>
+            <a:r>
+              <a:rPr sz="1000" b="0" i="0">
+                <a:solidFill>
+                  <a:srgbClr val="35C9C9"/>
+                </a:solidFill>
+                <a:latin typeface="Calibri"/>
+              </a:rPr>
+              <a:t>160 cust.</a:t>
+            </a:r>
+          </a:p>
+        </p:txBody>
+      </p:sp>
+      <p:sp>
+        <p:nvSpPr>
+          <p:cNvPr id="23" name="TextBox 22"/>
+          <p:cNvSpPr txBox="1"/>
+          <p:nvPr/>
+        </p:nvSpPr>
+        <p:spPr>
+          <a:xfrm>
+            <a:off x="6355080" y="6355080"/>
+            <a:ext cx="5120640" cy="365760"/>
+          </a:xfrm>
+          <a:prstGeom prst="rect">
+            <a:avLst/>
+          </a:prstGeom>
+          <a:noFill/>
+        </p:spPr>
+        <p:txBody>
+          <a:bodyPr wrap="square" lIns="0" rIns="0" tIns="0" bIns="0">
+            <a:spAutoFit/>
+          </a:bodyPr>
+          <a:lstStyle/>
+          <a:p>
+            <a:pPr algn="ctr"/>
+            <a:r>
+              <a:rPr sz="1000" b="0" i="0">
+                <a:solidFill>
+                  <a:srgbClr val="F2C14E"/>
+                </a:solidFill>
+                <a:latin typeface="Calibri"/>
+              </a:rPr>
+              <a:t>ARR @ $30K ACV  ·  ⚠ strong-execution case (target NRR ~110%)</a:t>
             </a:r>
           </a:p>
         </p:txBody>
@@ -7308,7 +8687,7 @@
           <a:p>
             <a:pPr algn="l"/>
             <a:r>
-              <a:rPr sz="2700" b="1" i="0">
+              <a:rPr sz="2500" b="1" i="0">
                 <a:solidFill>
                   <a:srgbClr val="E8ECF1"/>
                 </a:solidFill>
@@ -7328,7 +8707,7 @@
         <p:spPr>
           <a:xfrm>
             <a:off x="868680" y="2148840"/>
-            <a:ext cx="10424160" cy="4023360"/>
+            <a:ext cx="5257800" cy="4023360"/>
           </a:xfrm>
           <a:prstGeom prst="rect">
             <a:avLst/>
@@ -7343,11 +8722,11 @@
           <a:p>
             <a:pPr algn="l">
               <a:spcAft>
-                <a:spcPts val="800"/>
+                <a:spcPts val="900"/>
               </a:spcAft>
             </a:pPr>
             <a:r>
-              <a:rPr sz="1700" b="1" i="0">
+              <a:rPr sz="1500" b="1" i="0">
                 <a:solidFill>
                   <a:srgbClr val="E8ECF1"/>
                 </a:solidFill>
@@ -7359,33 +8738,647 @@
           <a:p>
             <a:pPr algn="l">
               <a:spcAft>
-                <a:spcPts val="800"/>
+                <a:spcPts val="900"/>
               </a:spcAft>
             </a:pPr>
             <a:r>
-              <a:rPr sz="1700" b="0" i="0">
+              <a:rPr sz="1500" b="0" i="0">
                 <a:solidFill>
                   <a:srgbClr val="E8ECF1"/>
                 </a:solidFill>
                 <a:latin typeface="Calibri"/>
               </a:rPr>
-              <a:t>▸  Observability = monthly, after-the-fact. Static keys &amp; caps = a blunt knife. They see only up to the LLM call — search, crawling, third-party APIs off-screen.</a:t>
+              <a:t>▸  Observability = after-the-fact. Static keys &amp; caps = a blunt knife.</a:t>
             </a:r>
           </a:p>
           <a:p>
             <a:pPr algn="l">
               <a:spcAft>
-                <a:spcPts val="800"/>
+                <a:spcPts val="900"/>
               </a:spcAft>
             </a:pPr>
             <a:r>
-              <a:rPr sz="1700" b="1" i="0">
+              <a:rPr sz="1500" b="1" i="0">
                 <a:solidFill>
                   <a:srgbClr val="35C9C9"/>
                 </a:solidFill>
                 <a:latin typeface="Calibri"/>
               </a:rPr>
-              <a:t>▸  — so Sarah could see how much, but never attribute why or to whom.</a:t>
+              <a:t>▸  Tools see only up to the LLM call — search, crawling, third-party APIs off-screen. So Sarah saw how much, but never to whom.</a:t>
+            </a:r>
+          </a:p>
+        </p:txBody>
+      </p:sp>
+      <p:sp>
+        <p:nvSpPr>
+          <p:cNvPr id="7" name="TextBox 6"/>
+          <p:cNvSpPr txBox="1"/>
+          <p:nvPr/>
+        </p:nvSpPr>
+        <p:spPr>
+          <a:xfrm>
+            <a:off x="6400800" y="2148840"/>
+            <a:ext cx="4937760" cy="914400"/>
+          </a:xfrm>
+          <a:prstGeom prst="rect">
+            <a:avLst/>
+          </a:prstGeom>
+          <a:noFill/>
+        </p:spPr>
+        <p:txBody>
+          <a:bodyPr wrap="square" lIns="0" rIns="0" tIns="0" bIns="0">
+            <a:spAutoFit/>
+          </a:bodyPr>
+          <a:lstStyle/>
+          <a:p>
+            <a:pPr algn="l"/>
+            <a:r>
+              <a:rPr sz="6000" b="1" i="0">
+                <a:solidFill>
+                  <a:srgbClr val="35C9C9"/>
+                </a:solidFill>
+                <a:latin typeface="Calibri"/>
+              </a:rPr>
+              <a:t>41%</a:t>
+            </a:r>
+          </a:p>
+        </p:txBody>
+      </p:sp>
+      <p:sp>
+        <p:nvSpPr>
+          <p:cNvPr id="8" name="TextBox 7"/>
+          <p:cNvSpPr txBox="1"/>
+          <p:nvPr/>
+        </p:nvSpPr>
+        <p:spPr>
+          <a:xfrm>
+            <a:off x="6446520" y="3063240"/>
+            <a:ext cx="4937760" cy="365760"/>
+          </a:xfrm>
+          <a:prstGeom prst="rect">
+            <a:avLst/>
+          </a:prstGeom>
+          <a:noFill/>
+        </p:spPr>
+        <p:txBody>
+          <a:bodyPr wrap="square" lIns="0" rIns="0" tIns="0" bIns="0">
+            <a:spAutoFit/>
+          </a:bodyPr>
+          <a:lstStyle/>
+          <a:p>
+            <a:pPr algn="l"/>
+            <a:r>
+              <a:rPr sz="1500" b="1" i="0">
+                <a:solidFill>
+                  <a:srgbClr val="E8ECF1"/>
+                </a:solidFill>
+                <a:latin typeface="Calibri"/>
+              </a:rPr>
+              <a:t>of COGS never touches a model.</a:t>
+            </a:r>
+          </a:p>
+        </p:txBody>
+      </p:sp>
+      <p:sp>
+        <p:nvSpPr>
+          <p:cNvPr id="9" name="TextBox 8"/>
+          <p:cNvSpPr txBox="1"/>
+          <p:nvPr/>
+        </p:nvSpPr>
+        <p:spPr>
+          <a:xfrm>
+            <a:off x="6446520" y="3401568"/>
+            <a:ext cx="4937760" cy="365760"/>
+          </a:xfrm>
+          <a:prstGeom prst="rect">
+            <a:avLst/>
+          </a:prstGeom>
+          <a:noFill/>
+        </p:spPr>
+        <p:txBody>
+          <a:bodyPr wrap="square" lIns="0" rIns="0" tIns="0" bIns="0">
+            <a:spAutoFit/>
+          </a:bodyPr>
+          <a:lstStyle/>
+          <a:p>
+            <a:pPr algn="l"/>
+            <a:r>
+              <a:rPr sz="1100" b="0" i="0">
+                <a:solidFill>
+                  <a:srgbClr val="9AA7B4"/>
+                </a:solidFill>
+                <a:latin typeface="Calibri"/>
+              </a:rPr>
+              <a:t>It is tool &amp; retrieval spend token dashboards don't see.</a:t>
+            </a:r>
+          </a:p>
+        </p:txBody>
+      </p:sp>
+      <p:sp>
+        <p:nvSpPr>
+          <p:cNvPr id="10" name="Rectangle 9"/>
+          <p:cNvSpPr/>
+          <p:nvPr/>
+        </p:nvSpPr>
+        <p:spPr>
+          <a:xfrm>
+            <a:off x="6446520" y="4069080"/>
+            <a:ext cx="2778404" cy="566928"/>
+          </a:xfrm>
+          <a:prstGeom prst="rect">
+            <a:avLst/>
+          </a:prstGeom>
+          <a:solidFill>
+            <a:srgbClr val="4A5560"/>
+          </a:solidFill>
+          <a:ln>
+            <a:noFill/>
+          </a:ln>
+          <a:effectLst/>
+        </p:spPr>
+        <p:style>
+          <a:lnRef idx="1">
+            <a:schemeClr val="accent1"/>
+          </a:lnRef>
+          <a:fillRef idx="3">
+            <a:schemeClr val="accent1"/>
+          </a:fillRef>
+          <a:effectRef idx="2">
+            <a:schemeClr val="accent1"/>
+          </a:effectRef>
+          <a:fontRef idx="minor">
+            <a:schemeClr val="lt1"/>
+          </a:fontRef>
+        </p:style>
+        <p:txBody>
+          <a:bodyPr rtlCol="0" anchor="ctr"/>
+          <a:lstStyle/>
+          <a:p>
+            <a:pPr algn="ctr"/>
+          </a:p>
+        </p:txBody>
+      </p:sp>
+      <p:sp>
+        <p:nvSpPr>
+          <p:cNvPr id="11" name="Rectangle 10"/>
+          <p:cNvSpPr/>
+          <p:nvPr/>
+        </p:nvSpPr>
+        <p:spPr>
+          <a:xfrm>
+            <a:off x="9224924" y="4069080"/>
+            <a:ext cx="1130198" cy="566928"/>
+          </a:xfrm>
+          <a:prstGeom prst="rect">
+            <a:avLst/>
+          </a:prstGeom>
+          <a:solidFill>
+            <a:srgbClr val="FF6B35"/>
+          </a:solidFill>
+          <a:ln>
+            <a:noFill/>
+          </a:ln>
+          <a:effectLst/>
+        </p:spPr>
+        <p:style>
+          <a:lnRef idx="1">
+            <a:schemeClr val="accent1"/>
+          </a:lnRef>
+          <a:fillRef idx="3">
+            <a:schemeClr val="accent1"/>
+          </a:fillRef>
+          <a:effectRef idx="2">
+            <a:schemeClr val="accent1"/>
+          </a:effectRef>
+          <a:fontRef idx="minor">
+            <a:schemeClr val="lt1"/>
+          </a:fontRef>
+        </p:style>
+        <p:txBody>
+          <a:bodyPr rtlCol="0" anchor="ctr"/>
+          <a:lstStyle/>
+          <a:p>
+            <a:pPr algn="ctr"/>
+          </a:p>
+        </p:txBody>
+      </p:sp>
+      <p:sp>
+        <p:nvSpPr>
+          <p:cNvPr id="12" name="Rectangle 11"/>
+          <p:cNvSpPr/>
+          <p:nvPr/>
+        </p:nvSpPr>
+        <p:spPr>
+          <a:xfrm>
+            <a:off x="10355122" y="4069080"/>
+            <a:ext cx="800557" cy="566928"/>
+          </a:xfrm>
+          <a:prstGeom prst="rect">
+            <a:avLst/>
+          </a:prstGeom>
+          <a:solidFill>
+            <a:srgbClr val="35C9C9"/>
+          </a:solidFill>
+          <a:ln>
+            <a:noFill/>
+          </a:ln>
+          <a:effectLst/>
+        </p:spPr>
+        <p:style>
+          <a:lnRef idx="1">
+            <a:schemeClr val="accent1"/>
+          </a:lnRef>
+          <a:fillRef idx="3">
+            <a:schemeClr val="accent1"/>
+          </a:fillRef>
+          <a:effectRef idx="2">
+            <a:schemeClr val="accent1"/>
+          </a:effectRef>
+          <a:fontRef idx="minor">
+            <a:schemeClr val="lt1"/>
+          </a:fontRef>
+        </p:style>
+        <p:txBody>
+          <a:bodyPr rtlCol="0" anchor="ctr"/>
+          <a:lstStyle/>
+          <a:p>
+            <a:pPr algn="ctr"/>
+          </a:p>
+        </p:txBody>
+      </p:sp>
+      <p:sp>
+        <p:nvSpPr>
+          <p:cNvPr id="13" name="Oval 12"/>
+          <p:cNvSpPr/>
+          <p:nvPr/>
+        </p:nvSpPr>
+        <p:spPr>
+          <a:xfrm>
+            <a:off x="6473952" y="4937760"/>
+            <a:ext cx="128016" cy="128016"/>
+          </a:xfrm>
+          <a:prstGeom prst="ellipse">
+            <a:avLst/>
+          </a:prstGeom>
+          <a:solidFill>
+            <a:srgbClr val="4A5560"/>
+          </a:solidFill>
+          <a:ln>
+            <a:noFill/>
+          </a:ln>
+          <a:effectLst/>
+        </p:spPr>
+        <p:style>
+          <a:lnRef idx="1">
+            <a:schemeClr val="accent1"/>
+          </a:lnRef>
+          <a:fillRef idx="3">
+            <a:schemeClr val="accent1"/>
+          </a:fillRef>
+          <a:effectRef idx="2">
+            <a:schemeClr val="accent1"/>
+          </a:effectRef>
+          <a:fontRef idx="minor">
+            <a:schemeClr val="lt1"/>
+          </a:fontRef>
+        </p:style>
+        <p:txBody>
+          <a:bodyPr rtlCol="0" anchor="ctr"/>
+          <a:lstStyle/>
+          <a:p>
+            <a:pPr algn="ctr"/>
+          </a:p>
+        </p:txBody>
+      </p:sp>
+      <p:sp>
+        <p:nvSpPr>
+          <p:cNvPr id="14" name="TextBox 13"/>
+          <p:cNvSpPr txBox="1"/>
+          <p:nvPr/>
+        </p:nvSpPr>
+        <p:spPr>
+          <a:xfrm>
+            <a:off x="6766560" y="4892040"/>
+            <a:ext cx="2103120" cy="320040"/>
+          </a:xfrm>
+          <a:prstGeom prst="rect">
+            <a:avLst/>
+          </a:prstGeom>
+          <a:noFill/>
+        </p:spPr>
+        <p:txBody>
+          <a:bodyPr wrap="square" lIns="0" rIns="0" tIns="0" bIns="0">
+            <a:spAutoFit/>
+          </a:bodyPr>
+          <a:lstStyle/>
+          <a:p>
+            <a:pPr algn="l"/>
+            <a:r>
+              <a:rPr sz="1200" b="1" i="0">
+                <a:solidFill>
+                  <a:srgbClr val="E8ECF1"/>
+                </a:solidFill>
+                <a:latin typeface="Calibri"/>
+              </a:rPr>
+              <a:t>LLM API</a:t>
+            </a:r>
+          </a:p>
+        </p:txBody>
+      </p:sp>
+      <p:sp>
+        <p:nvSpPr>
+          <p:cNvPr id="15" name="TextBox 14"/>
+          <p:cNvSpPr txBox="1"/>
+          <p:nvPr/>
+        </p:nvSpPr>
+        <p:spPr>
+          <a:xfrm>
+            <a:off x="8778240" y="4892040"/>
+            <a:ext cx="2377440" cy="320040"/>
+          </a:xfrm>
+          <a:prstGeom prst="rect">
+            <a:avLst/>
+          </a:prstGeom>
+          <a:noFill/>
+        </p:spPr>
+        <p:txBody>
+          <a:bodyPr wrap="square" lIns="0" rIns="0" tIns="0" bIns="0">
+            <a:spAutoFit/>
+          </a:bodyPr>
+          <a:lstStyle/>
+          <a:p>
+            <a:pPr algn="l"/>
+            <a:r>
+              <a:rPr sz="1200" b="0" i="0">
+                <a:solidFill>
+                  <a:srgbClr val="9AA7B4"/>
+                </a:solidFill>
+                <a:latin typeface="Calibri"/>
+              </a:rPr>
+              <a:t>59% · $68.8K</a:t>
+            </a:r>
+          </a:p>
+        </p:txBody>
+      </p:sp>
+      <p:sp>
+        <p:nvSpPr>
+          <p:cNvPr id="16" name="Oval 15"/>
+          <p:cNvSpPr/>
+          <p:nvPr/>
+        </p:nvSpPr>
+        <p:spPr>
+          <a:xfrm>
+            <a:off x="6473952" y="5321808"/>
+            <a:ext cx="128016" cy="128016"/>
+          </a:xfrm>
+          <a:prstGeom prst="ellipse">
+            <a:avLst/>
+          </a:prstGeom>
+          <a:solidFill>
+            <a:srgbClr val="FF6B35"/>
+          </a:solidFill>
+          <a:ln>
+            <a:noFill/>
+          </a:ln>
+          <a:effectLst/>
+        </p:spPr>
+        <p:style>
+          <a:lnRef idx="1">
+            <a:schemeClr val="accent1"/>
+          </a:lnRef>
+          <a:fillRef idx="3">
+            <a:schemeClr val="accent1"/>
+          </a:fillRef>
+          <a:effectRef idx="2">
+            <a:schemeClr val="accent1"/>
+          </a:effectRef>
+          <a:fontRef idx="minor">
+            <a:schemeClr val="lt1"/>
+          </a:fontRef>
+        </p:style>
+        <p:txBody>
+          <a:bodyPr rtlCol="0" anchor="ctr"/>
+          <a:lstStyle/>
+          <a:p>
+            <a:pPr algn="ctr"/>
+          </a:p>
+        </p:txBody>
+      </p:sp>
+      <p:sp>
+        <p:nvSpPr>
+          <p:cNvPr id="17" name="TextBox 16"/>
+          <p:cNvSpPr txBox="1"/>
+          <p:nvPr/>
+        </p:nvSpPr>
+        <p:spPr>
+          <a:xfrm>
+            <a:off x="6766560" y="5276088"/>
+            <a:ext cx="2103120" cy="320040"/>
+          </a:xfrm>
+          <a:prstGeom prst="rect">
+            <a:avLst/>
+          </a:prstGeom>
+          <a:noFill/>
+        </p:spPr>
+        <p:txBody>
+          <a:bodyPr wrap="square" lIns="0" rIns="0" tIns="0" bIns="0">
+            <a:spAutoFit/>
+          </a:bodyPr>
+          <a:lstStyle/>
+          <a:p>
+            <a:pPr algn="l"/>
+            <a:r>
+              <a:rPr sz="1200" b="1" i="0">
+                <a:solidFill>
+                  <a:srgbClr val="E8ECF1"/>
+                </a:solidFill>
+                <a:latin typeface="Calibri"/>
+              </a:rPr>
+              <a:t>Search Tool</a:t>
+            </a:r>
+          </a:p>
+        </p:txBody>
+      </p:sp>
+      <p:sp>
+        <p:nvSpPr>
+          <p:cNvPr id="18" name="TextBox 17"/>
+          <p:cNvSpPr txBox="1"/>
+          <p:nvPr/>
+        </p:nvSpPr>
+        <p:spPr>
+          <a:xfrm>
+            <a:off x="8778240" y="5276088"/>
+            <a:ext cx="2377440" cy="320040"/>
+          </a:xfrm>
+          <a:prstGeom prst="rect">
+            <a:avLst/>
+          </a:prstGeom>
+          <a:noFill/>
+        </p:spPr>
+        <p:txBody>
+          <a:bodyPr wrap="square" lIns="0" rIns="0" tIns="0" bIns="0">
+            <a:spAutoFit/>
+          </a:bodyPr>
+          <a:lstStyle/>
+          <a:p>
+            <a:pPr algn="l"/>
+            <a:r>
+              <a:rPr sz="1200" b="0" i="0">
+                <a:solidFill>
+                  <a:srgbClr val="9AA7B4"/>
+                </a:solidFill>
+                <a:latin typeface="Calibri"/>
+              </a:rPr>
+              <a:t>24% · $27.9K</a:t>
+            </a:r>
+          </a:p>
+        </p:txBody>
+      </p:sp>
+      <p:sp>
+        <p:nvSpPr>
+          <p:cNvPr id="19" name="Oval 18"/>
+          <p:cNvSpPr/>
+          <p:nvPr/>
+        </p:nvSpPr>
+        <p:spPr>
+          <a:xfrm>
+            <a:off x="6473952" y="5705856"/>
+            <a:ext cx="128016" cy="128016"/>
+          </a:xfrm>
+          <a:prstGeom prst="ellipse">
+            <a:avLst/>
+          </a:prstGeom>
+          <a:solidFill>
+            <a:srgbClr val="35C9C9"/>
+          </a:solidFill>
+          <a:ln>
+            <a:noFill/>
+          </a:ln>
+          <a:effectLst/>
+        </p:spPr>
+        <p:style>
+          <a:lnRef idx="1">
+            <a:schemeClr val="accent1"/>
+          </a:lnRef>
+          <a:fillRef idx="3">
+            <a:schemeClr val="accent1"/>
+          </a:fillRef>
+          <a:effectRef idx="2">
+            <a:schemeClr val="accent1"/>
+          </a:effectRef>
+          <a:fontRef idx="minor">
+            <a:schemeClr val="lt1"/>
+          </a:fontRef>
+        </p:style>
+        <p:txBody>
+          <a:bodyPr rtlCol="0" anchor="ctr"/>
+          <a:lstStyle/>
+          <a:p>
+            <a:pPr algn="ctr"/>
+          </a:p>
+        </p:txBody>
+      </p:sp>
+      <p:sp>
+        <p:nvSpPr>
+          <p:cNvPr id="20" name="TextBox 19"/>
+          <p:cNvSpPr txBox="1"/>
+          <p:nvPr/>
+        </p:nvSpPr>
+        <p:spPr>
+          <a:xfrm>
+            <a:off x="6766560" y="5660136"/>
+            <a:ext cx="2103120" cy="320040"/>
+          </a:xfrm>
+          <a:prstGeom prst="rect">
+            <a:avLst/>
+          </a:prstGeom>
+          <a:noFill/>
+        </p:spPr>
+        <p:txBody>
+          <a:bodyPr wrap="square" lIns="0" rIns="0" tIns="0" bIns="0">
+            <a:spAutoFit/>
+          </a:bodyPr>
+          <a:lstStyle/>
+          <a:p>
+            <a:pPr algn="l"/>
+            <a:r>
+              <a:rPr sz="1200" b="1" i="0">
+                <a:solidFill>
+                  <a:srgbClr val="E8ECF1"/>
+                </a:solidFill>
+                <a:latin typeface="Calibri"/>
+              </a:rPr>
+              <a:t>External DB</a:t>
+            </a:r>
+          </a:p>
+        </p:txBody>
+      </p:sp>
+      <p:sp>
+        <p:nvSpPr>
+          <p:cNvPr id="21" name="TextBox 20"/>
+          <p:cNvSpPr txBox="1"/>
+          <p:nvPr/>
+        </p:nvSpPr>
+        <p:spPr>
+          <a:xfrm>
+            <a:off x="8778240" y="5660136"/>
+            <a:ext cx="2377440" cy="320040"/>
+          </a:xfrm>
+          <a:prstGeom prst="rect">
+            <a:avLst/>
+          </a:prstGeom>
+          <a:noFill/>
+        </p:spPr>
+        <p:txBody>
+          <a:bodyPr wrap="square" lIns="0" rIns="0" tIns="0" bIns="0">
+            <a:spAutoFit/>
+          </a:bodyPr>
+          <a:lstStyle/>
+          <a:p>
+            <a:pPr algn="l"/>
+            <a:r>
+              <a:rPr sz="1200" b="0" i="0">
+                <a:solidFill>
+                  <a:srgbClr val="9AA7B4"/>
+                </a:solidFill>
+                <a:latin typeface="Calibri"/>
+              </a:rPr>
+              <a:t>17% · $20.0K</a:t>
+            </a:r>
+          </a:p>
+        </p:txBody>
+      </p:sp>
+      <p:sp>
+        <p:nvSpPr>
+          <p:cNvPr id="22" name="TextBox 21"/>
+          <p:cNvSpPr txBox="1"/>
+          <p:nvPr/>
+        </p:nvSpPr>
+        <p:spPr>
+          <a:xfrm>
+            <a:off x="6446520" y="6172200"/>
+            <a:ext cx="4937760" cy="365760"/>
+          </a:xfrm>
+          <a:prstGeom prst="rect">
+            <a:avLst/>
+          </a:prstGeom>
+          <a:noFill/>
+        </p:spPr>
+        <p:txBody>
+          <a:bodyPr wrap="square" lIns="0" rIns="0" tIns="0" bIns="0">
+            <a:spAutoFit/>
+          </a:bodyPr>
+          <a:lstStyle/>
+          <a:p>
+            <a:pPr algn="l"/>
+            <a:r>
+              <a:rPr sz="1000" b="0" i="0">
+                <a:solidFill>
+                  <a:srgbClr val="35C9C9"/>
+                </a:solidFill>
+                <a:latin typeface="Calibri"/>
+              </a:rPr>
+              <a:t>Search + DB = $47.8K nobody attributes to the agent that spent it.</a:t>
             </a:r>
           </a:p>
         </p:txBody>
@@ -8613,7 +10606,7 @@
           <a:p>
             <a:pPr algn="l"/>
             <a:r>
-              <a:rPr sz="2700" b="1" i="0">
+              <a:rPr sz="2500" b="1" i="0">
                 <a:solidFill>
                   <a:srgbClr val="E8ECF1"/>
                 </a:solidFill>
@@ -8633,7 +10626,7 @@
         <p:spPr>
           <a:xfrm>
             <a:off x="868680" y="2148840"/>
-            <a:ext cx="10424160" cy="4023360"/>
+            <a:ext cx="5257800" cy="4023360"/>
           </a:xfrm>
           <a:prstGeom prst="rect">
             <a:avLst/>
@@ -8648,65 +10641,411 @@
           <a:p>
             <a:pPr algn="l">
               <a:spcAft>
-                <a:spcPts val="800"/>
+                <a:spcPts val="900"/>
               </a:spcAft>
             </a:pPr>
             <a:r>
-              <a:rPr sz="1700" b="0" i="0">
+              <a:rPr sz="1500" b="0" i="0">
                 <a:solidFill>
                   <a:srgbClr val="E8ECF1"/>
                 </a:solidFill>
                 <a:latin typeface="Calibri"/>
               </a:rPr>
-              <a:t>▸  TAM ≈ $0.5B–1.8B (2026) → $3B–8B (2030). Lens A (governed AI spend × ~1–2% take-rate) = main; Lens B (AI FinOps + LLM cost-opt + LLMOps, $0.7B–1.1B) = cross-check. CAGR ~20%.</a:t>
+              <a:t>▸  Lens A (governed AI spend × ~1–2% take-rate) = main; Lens B (AI FinOps + LLMOps) = cross-check. CAGR ~20%.</a:t>
             </a:r>
           </a:p>
           <a:p>
             <a:pPr algn="l">
               <a:spcAft>
-                <a:spcPts val="800"/>
+                <a:spcPts val="900"/>
               </a:spcAft>
             </a:pPr>
             <a:r>
-              <a:rPr sz="1700" b="0" i="0">
+              <a:rPr sz="1500" b="0" i="0">
                 <a:solidFill>
                   <a:srgbClr val="E8ECF1"/>
                 </a:solidFill>
                 <a:latin typeface="Calibri"/>
               </a:rPr>
-              <a:t>▸  SAM ≈ $0.3B–0.6B — ~10–20K ICP-fit companies × ACV $30K (median of competitor mid-market ACVs).</a:t>
+              <a:t>▸  ACV $30K = median of competitor mid-market ACVs.</a:t>
             </a:r>
           </a:p>
           <a:p>
             <a:pPr algn="l">
               <a:spcAft>
-                <a:spcPts val="800"/>
+                <a:spcPts val="900"/>
               </a:spcAft>
             </a:pPr>
             <a:r>
-              <a:rPr sz="1700" b="1" i="0">
+              <a:rPr sz="1500" b="1" i="0">
                 <a:solidFill>
                   <a:srgbClr val="35C9C9"/>
                 </a:solidFill>
                 <a:latin typeface="Calibri"/>
               </a:rPr>
-              <a:t>▸  SOM (3 yr) ≈ $1.5M–4.5M ARR — 50–150 US paid, seeded by Korea wedge + US network.</a:t>
+              <a:t>▸  SOM engine: 50–150 US paid, seeded by the Korea wedge + US network.</a:t>
             </a:r>
           </a:p>
           <a:p>
             <a:pPr algn="l">
               <a:spcAft>
-                <a:spcPts val="800"/>
+                <a:spcPts val="900"/>
               </a:spcAft>
             </a:pPr>
             <a:r>
-              <a:rPr sz="1700" b="0" i="0">
+              <a:rPr sz="1500" b="0" i="0">
                 <a:solidFill>
                   <a:srgbClr val="F2C14E"/>
                 </a:solidFill>
                 <a:latin typeface="Calibri"/>
               </a:rPr>
-              <a:t>▸  ⚠  SAM population (10–20K) still a hypothesis — refined by interview screening pass-rate.</a:t>
+              <a:t>▸  ⚠  SAM population (10–20K firms) = hypothesis, refined by interview screening pass-rate.</a:t>
+            </a:r>
+          </a:p>
+        </p:txBody>
+      </p:sp>
+      <p:sp>
+        <p:nvSpPr>
+          <p:cNvPr id="7" name="Oval 6"/>
+          <p:cNvSpPr/>
+          <p:nvPr/>
+        </p:nvSpPr>
+        <p:spPr>
+          <a:xfrm>
+            <a:off x="6675120" y="2103120"/>
+            <a:ext cx="4114800" cy="4114800"/>
+          </a:xfrm>
+          <a:prstGeom prst="ellipse">
+            <a:avLst/>
+          </a:prstGeom>
+          <a:solidFill>
+            <a:srgbClr val="12202B"/>
+          </a:solidFill>
+          <a:ln w="15875">
+            <a:solidFill>
+              <a:srgbClr val="35C9C9"/>
+            </a:solidFill>
+          </a:ln>
+          <a:effectLst/>
+        </p:spPr>
+        <p:style>
+          <a:lnRef idx="1">
+            <a:schemeClr val="accent1"/>
+          </a:lnRef>
+          <a:fillRef idx="3">
+            <a:schemeClr val="accent1"/>
+          </a:fillRef>
+          <a:effectRef idx="2">
+            <a:schemeClr val="accent1"/>
+          </a:effectRef>
+          <a:fontRef idx="minor">
+            <a:schemeClr val="lt1"/>
+          </a:fontRef>
+        </p:style>
+        <p:txBody>
+          <a:bodyPr rtlCol="0" anchor="ctr"/>
+          <a:lstStyle/>
+          <a:p>
+            <a:pPr algn="ctr"/>
+          </a:p>
+        </p:txBody>
+      </p:sp>
+      <p:sp>
+        <p:nvSpPr>
+          <p:cNvPr id="8" name="Oval 7"/>
+          <p:cNvSpPr/>
+          <p:nvPr/>
+        </p:nvSpPr>
+        <p:spPr>
+          <a:xfrm>
+            <a:off x="7383780" y="2811780"/>
+            <a:ext cx="2697480" cy="2697480"/>
+          </a:xfrm>
+          <a:prstGeom prst="ellipse">
+            <a:avLst/>
+          </a:prstGeom>
+          <a:solidFill>
+            <a:srgbClr val="17323C"/>
+          </a:solidFill>
+          <a:ln w="12700">
+            <a:solidFill>
+              <a:srgbClr val="35C9C9"/>
+            </a:solidFill>
+          </a:ln>
+          <a:effectLst/>
+        </p:spPr>
+        <p:style>
+          <a:lnRef idx="1">
+            <a:schemeClr val="accent1"/>
+          </a:lnRef>
+          <a:fillRef idx="3">
+            <a:schemeClr val="accent1"/>
+          </a:fillRef>
+          <a:effectRef idx="2">
+            <a:schemeClr val="accent1"/>
+          </a:effectRef>
+          <a:fontRef idx="minor">
+            <a:schemeClr val="lt1"/>
+          </a:fontRef>
+        </p:style>
+        <p:txBody>
+          <a:bodyPr rtlCol="0" anchor="ctr"/>
+          <a:lstStyle/>
+          <a:p>
+            <a:pPr algn="ctr"/>
+          </a:p>
+        </p:txBody>
+      </p:sp>
+      <p:sp>
+        <p:nvSpPr>
+          <p:cNvPr id="9" name="Oval 8"/>
+          <p:cNvSpPr/>
+          <p:nvPr/>
+        </p:nvSpPr>
+        <p:spPr>
+          <a:xfrm>
+            <a:off x="8115300" y="3543300"/>
+            <a:ext cx="1234440" cy="1234440"/>
+          </a:xfrm>
+          <a:prstGeom prst="ellipse">
+            <a:avLst/>
+          </a:prstGeom>
+          <a:solidFill>
+            <a:srgbClr val="FF6B35"/>
+          </a:solidFill>
+          <a:ln>
+            <a:noFill/>
+          </a:ln>
+          <a:effectLst/>
+        </p:spPr>
+        <p:style>
+          <a:lnRef idx="1">
+            <a:schemeClr val="accent1"/>
+          </a:lnRef>
+          <a:fillRef idx="3">
+            <a:schemeClr val="accent1"/>
+          </a:fillRef>
+          <a:effectRef idx="2">
+            <a:schemeClr val="accent1"/>
+          </a:effectRef>
+          <a:fontRef idx="minor">
+            <a:schemeClr val="lt1"/>
+          </a:fontRef>
+        </p:style>
+        <p:txBody>
+          <a:bodyPr rtlCol="0" anchor="ctr"/>
+          <a:lstStyle/>
+          <a:p>
+            <a:pPr algn="ctr"/>
+          </a:p>
+        </p:txBody>
+      </p:sp>
+      <p:sp>
+        <p:nvSpPr>
+          <p:cNvPr id="10" name="TextBox 9"/>
+          <p:cNvSpPr txBox="1"/>
+          <p:nvPr/>
+        </p:nvSpPr>
+        <p:spPr>
+          <a:xfrm>
+            <a:off x="7269480" y="2331720"/>
+            <a:ext cx="2926080" cy="457200"/>
+          </a:xfrm>
+          <a:prstGeom prst="rect">
+            <a:avLst/>
+          </a:prstGeom>
+          <a:noFill/>
+        </p:spPr>
+        <p:txBody>
+          <a:bodyPr wrap="square" lIns="0" rIns="0" tIns="0" bIns="0">
+            <a:spAutoFit/>
+          </a:bodyPr>
+          <a:lstStyle/>
+          <a:p>
+            <a:pPr algn="ctr"/>
+            <a:r>
+              <a:rPr sz="1500" b="1" i="0">
+                <a:solidFill>
+                  <a:srgbClr val="35C9C9"/>
+                </a:solidFill>
+                <a:latin typeface="Calibri"/>
+              </a:rPr>
+              <a:t>TAM</a:t>
+            </a:r>
+          </a:p>
+        </p:txBody>
+      </p:sp>
+      <p:sp>
+        <p:nvSpPr>
+          <p:cNvPr id="11" name="TextBox 10"/>
+          <p:cNvSpPr txBox="1"/>
+          <p:nvPr/>
+        </p:nvSpPr>
+        <p:spPr>
+          <a:xfrm>
+            <a:off x="7269480" y="2651760"/>
+            <a:ext cx="2926080" cy="365760"/>
+          </a:xfrm>
+          <a:prstGeom prst="rect">
+            <a:avLst/>
+          </a:prstGeom>
+          <a:noFill/>
+        </p:spPr>
+        <p:txBody>
+          <a:bodyPr wrap="square" lIns="0" rIns="0" tIns="0" bIns="0">
+            <a:spAutoFit/>
+          </a:bodyPr>
+          <a:lstStyle/>
+          <a:p>
+            <a:pPr algn="ctr"/>
+            <a:r>
+              <a:rPr sz="1200" b="0" i="0">
+                <a:solidFill>
+                  <a:srgbClr val="E8ECF1"/>
+                </a:solidFill>
+                <a:latin typeface="Calibri"/>
+              </a:rPr>
+              <a:t>$0.5–1.8B  (2026)</a:t>
+            </a:r>
+          </a:p>
+        </p:txBody>
+      </p:sp>
+      <p:sp>
+        <p:nvSpPr>
+          <p:cNvPr id="12" name="TextBox 11"/>
+          <p:cNvSpPr txBox="1"/>
+          <p:nvPr/>
+        </p:nvSpPr>
+        <p:spPr>
+          <a:xfrm>
+            <a:off x="7360920" y="3246120"/>
+            <a:ext cx="2743200" cy="365760"/>
+          </a:xfrm>
+          <a:prstGeom prst="rect">
+            <a:avLst/>
+          </a:prstGeom>
+          <a:noFill/>
+        </p:spPr>
+        <p:txBody>
+          <a:bodyPr wrap="square" lIns="0" rIns="0" tIns="0" bIns="0">
+            <a:spAutoFit/>
+          </a:bodyPr>
+          <a:lstStyle/>
+          <a:p>
+            <a:pPr algn="ctr"/>
+            <a:r>
+              <a:rPr sz="1300" b="1" i="0">
+                <a:solidFill>
+                  <a:srgbClr val="E8ECF1"/>
+                </a:solidFill>
+                <a:latin typeface="Calibri"/>
+              </a:rPr>
+              <a:t>SAM  $0.3–0.6B</a:t>
+            </a:r>
+          </a:p>
+        </p:txBody>
+      </p:sp>
+      <p:sp>
+        <p:nvSpPr>
+          <p:cNvPr id="13" name="TextBox 12"/>
+          <p:cNvSpPr txBox="1"/>
+          <p:nvPr/>
+        </p:nvSpPr>
+        <p:spPr>
+          <a:xfrm>
+            <a:off x="7955280" y="3913632"/>
+            <a:ext cx="1554480" cy="548640"/>
+          </a:xfrm>
+          <a:prstGeom prst="rect">
+            <a:avLst/>
+          </a:prstGeom>
+          <a:noFill/>
+        </p:spPr>
+        <p:txBody>
+          <a:bodyPr wrap="square" lIns="0" rIns="0" tIns="0" bIns="0">
+            <a:spAutoFit/>
+          </a:bodyPr>
+          <a:lstStyle/>
+          <a:p>
+            <a:pPr algn="ctr"/>
+            <a:r>
+              <a:rPr sz="1300" b="1" i="0">
+                <a:solidFill>
+                  <a:srgbClr val="0E141B"/>
+                </a:solidFill>
+                <a:latin typeface="Calibri"/>
+              </a:rPr>
+              <a:t>SOM</a:t>
+            </a:r>
+          </a:p>
+        </p:txBody>
+      </p:sp>
+      <p:sp>
+        <p:nvSpPr>
+          <p:cNvPr id="14" name="TextBox 13"/>
+          <p:cNvSpPr txBox="1"/>
+          <p:nvPr/>
+        </p:nvSpPr>
+        <p:spPr>
+          <a:xfrm>
+            <a:off x="7818120" y="4224528"/>
+            <a:ext cx="1828800" cy="365760"/>
+          </a:xfrm>
+          <a:prstGeom prst="rect">
+            <a:avLst/>
+          </a:prstGeom>
+          <a:noFill/>
+        </p:spPr>
+        <p:txBody>
+          <a:bodyPr wrap="square" lIns="0" rIns="0" tIns="0" bIns="0">
+            <a:spAutoFit/>
+          </a:bodyPr>
+          <a:lstStyle/>
+          <a:p>
+            <a:pPr algn="ctr"/>
+            <a:r>
+              <a:rPr sz="1000" b="1" i="0">
+                <a:solidFill>
+                  <a:srgbClr val="0E141B"/>
+                </a:solidFill>
+                <a:latin typeface="Calibri"/>
+              </a:rPr>
+              <a:t>$1.5–4.5M ARR</a:t>
+            </a:r>
+          </a:p>
+        </p:txBody>
+      </p:sp>
+      <p:sp>
+        <p:nvSpPr>
+          <p:cNvPr id="15" name="TextBox 14"/>
+          <p:cNvSpPr txBox="1"/>
+          <p:nvPr/>
+        </p:nvSpPr>
+        <p:spPr>
+          <a:xfrm>
+            <a:off x="6355080" y="6172200"/>
+            <a:ext cx="5120640" cy="365760"/>
+          </a:xfrm>
+          <a:prstGeom prst="rect">
+            <a:avLst/>
+          </a:prstGeom>
+          <a:noFill/>
+        </p:spPr>
+        <p:txBody>
+          <a:bodyPr wrap="square" lIns="0" rIns="0" tIns="0" bIns="0">
+            <a:spAutoFit/>
+          </a:bodyPr>
+          <a:lstStyle/>
+          <a:p>
+            <a:pPr algn="ctr"/>
+            <a:r>
+              <a:rPr sz="1000" b="0" i="0">
+                <a:solidFill>
+                  <a:srgbClr val="9AA7B4"/>
+                </a:solidFill>
+                <a:latin typeface="Calibri"/>
+              </a:rPr>
+              <a:t>3-yr, not to scale  ·  main lens = governed AI spend × ~1–2% take-rate</a:t>
             </a:r>
           </a:p>
         </p:txBody>

--- a/deliverables/Pitch_Deck_VersionB_Hero-Hybrid_EN.pptx
+++ b/deliverables/Pitch_Deck_VersionB_Hero-Hybrid_EN.pptx
@@ -21,6 +21,7 @@
     <p:sldId id="269" r:id="rId21"/>
     <p:sldId id="270" r:id="rId22"/>
     <p:sldId id="271" r:id="rId23"/>
+    <p:sldId id="272" r:id="rId24"/>
   </p:sldIdLst>
   <p:sldSz cx="12191695" cy="6858000" type="screen4x3"/>
   <p:notesSz cx="6858000" cy="9144000"/>
@@ -587,7 +588,7 @@
           <a:lstStyle/>
           <a:p>
             <a:r>
-              <a:t>Timeline: entry (free credit-countdown wedge) → differentiation (unit economics + unit-price catalog) → moat (simulation accuracy + benchmark).</a:t>
+              <a:t>Feature matrix. Row 1 (LLM tracking) = table stakes — everyone has it, shows honesty. Rows 2-5 = our wedge. Key: runaway loop detection = NOBODY. Don’t claim we’re the only ones attributing cost — FinOps does per-unit for cloud. Our intersection = rows 3+4+2 together. Source: Competitor-Analysis/기능-비교-매트릭스.md</a:t>
             </a:r>
           </a:p>
         </p:txBody>
@@ -657,7 +658,7 @@
           <a:lstStyle/>
           <a:p>
             <a:r>
-              <a:t>'Flat or usage?' → 'Subscription-led, but the usage axis is agent count, not spend.' ACV $30K = median of competitor mid-market ACVs (deep research 7/28). Detail: Solution/가격-재무-딥리서치-2026-07.md.</a:t>
+              <a:t>Timeline: entry (free credit-countdown wedge) → differentiation (unit economics + unit-price catalog) → moat (simulation accuracy + benchmark).</a:t>
             </a:r>
           </a:p>
         </p:txBody>
@@ -727,7 +728,7 @@
           <a:lstStyle/>
           <a:p>
             <a:r>
-              <a:t>Trust Ladder steps 1→2→3 ARE the GTM expansion path. Based on the stakeholder-map action plan.</a:t>
+              <a:t>KEY DEFINITION for Q&amp;A: 'monitored agent' = a named, registered agent pipeline (not an API request, not an invocation). If judge asks 'what counts as one agent?' → 'Same as a Datadog host: each distinct AI workflow you deploy gets one Kyber agent registration.' This avoids the 'does traffic spike my bill?' objection. ACV $30K = median of competitor mid-market ACVs (deep research 7/28). Detail: Solution/가격-재무-딥리서치-2026-07.md.</a:t>
             </a:r>
           </a:p>
         </p:txBody>
@@ -797,7 +798,7 @@
           <a:lstStyle/>
           <a:p>
             <a:r>
-              <a:t>Don't hide the 0 formal interviews — frame as 'building pricing on data.' Fill with real interview/design-partner counts before 8/6.</a:t>
+              <a:t>Trust Ladder steps 1→2→3 ARE the GTM expansion path. Beachhead = reachable AI-native scaleups (evidence + product coherence); non-AI-native mid-market (logistics-first) is the expansion where 'build it yourself' dies. Based on the stakeholder-map action plan.</a:t>
             </a:r>
           </a:p>
         </p:txBody>
@@ -867,7 +868,7 @@
           <a:lstStyle/>
           <a:p>
             <a:r>
-              <a:t>Keep it short. One line on 'why us' to be filled by the team. Resolve the Team-slide role inconsistency before the pitch.</a:t>
+              <a:t>Don't hide the 0 formal interviews — frame as 'building pricing on data.' Fill with real interview/design-partner counts before 8/6.</a:t>
             </a:r>
           </a:p>
         </p:txBody>
@@ -937,6 +938,76 @@
           <a:lstStyle/>
           <a:p>
             <a:r>
+              <a:t>Keep it short. One line on 'why us' to be filled by the team. Resolve the Team-slide role inconsistency before the pitch.</a:t>
+            </a:r>
+          </a:p>
+        </p:txBody>
+      </p:sp>
+      <p:sp>
+        <p:nvSpPr>
+          <p:cNvPr id="4" name="Slide Number Placeholder 3"/>
+          <p:cNvSpPr>
+            <a:spLocks noGrp="1"/>
+          </p:cNvSpPr>
+          <p:nvPr>
+            <p:ph type="sldNum" idx="5" sz="quarter"/>
+          </p:nvPr>
+        </p:nvSpPr>
+        <p:spPr/>
+      </p:sp>
+    </p:spTree>
+  </p:cSld>
+  <p:clrMapOvr>
+    <a:masterClrMapping/>
+  </p:clrMapOvr>
+</p:notes>
+</file>
+
+<file path=ppt/notesSlides/notesSlide16.xml><?xml version="1.0" encoding="utf-8"?>
+<p:notes xmlns:a="http://schemas.openxmlformats.org/drawingml/2006/main" xmlns:p="http://schemas.openxmlformats.org/presentationml/2006/main" xmlns:r="http://schemas.openxmlformats.org/officeDocument/2006/relationships">
+  <p:cSld>
+    <p:spTree>
+      <p:nvGrpSpPr>
+        <p:cNvPr id="1" name=""/>
+        <p:cNvGrpSpPr/>
+        <p:nvPr/>
+      </p:nvGrpSpPr>
+      <p:grpSpPr>
+        <a:xfrm>
+          <a:off x="0" y="0"/>
+          <a:ext cx="0" cy="0"/>
+          <a:chOff x="0" y="0"/>
+          <a:chExt cx="0" cy="0"/>
+        </a:xfrm>
+      </p:grpSpPr>
+      <p:sp>
+        <p:nvSpPr>
+          <p:cNvPr id="2" name="Slide Image Placeholder 1"/>
+          <p:cNvSpPr>
+            <a:spLocks noGrp="1"/>
+          </p:cNvSpPr>
+          <p:nvPr>
+            <p:ph type="sldImg" idx="2"/>
+          </p:nvPr>
+        </p:nvSpPr>
+        <p:spPr/>
+      </p:sp>
+      <p:sp>
+        <p:nvSpPr>
+          <p:cNvPr id="3" name="Notes Placeholder 2"/>
+          <p:cNvSpPr>
+            <a:spLocks noGrp="1"/>
+          </p:cNvSpPr>
+          <p:nvPr>
+            <p:ph type="body" idx="3" sz="quarter"/>
+          </p:nvPr>
+        </p:nvSpPr>
+        <p:spPr/>
+        <p:txBody>
+          <a:bodyPr/>
+          <a:lstStyle/>
+          <a:p>
+            <a:r>
               <a:t>Finance goal = a 2nd meeting. THE ASK IS INTRODUCTIONS, NOT CAPITAL. Curve credible but AGGRESSIVE; NRR 110% = top-quartile target; ACV $30K = competitor-median validated. Version B recovers the Sarah persona (her world grows). Don't name a funding amount unless a judge asks.</a:t>
             </a:r>
           </a:p>
@@ -1357,7 +1428,7 @@
           <a:lstStyle/>
           <a:p>
             <a:r>
-              <a:t>This slide pre-empts two rebuttals ('just buy tokens' / 'build it yourself'). Label the 'can't build' load-bearing claim as a ⚠ falsifiable bet, and pre-empt the Liner counter — 'estimable ≠ audit-grade attribution'. B2B/per-customer rationale added 7/29.</a:t>
+              <a:t>A-LED BLEND (CEO decision 8/3): sell to reachable AI-native scaleups now; ride the non-AI-native wave as expansion. Pre-empts 'just buy tokens' ($50K+ spend) &amp; 'build it yourself' — AI-native answer = buy-vs-build ROI + cross-vendor + audit-grade + peer-benchmark data they can't replicate; and the rebuttal structurally dies as we expand to non-AI-native (no AI-eng DNA). Source: ICP/ICP.md.</a:t>
             </a:r>
           </a:p>
         </p:txBody>
@@ -1427,7 +1498,7 @@
           <a:lstStyle/>
           <a:p>
             <a:r>
-              <a:t>Never present the old LAM $80K as market size. Take-rate anchor CORRECTED to ~1-2% (deep research 7/28). We don't price on take-rate (per-agent) — it's a market-sizing sanity check only. Source: Market/TAM-SAM-SOM.md.</a:t>
+              <a:t>A-LED BLEND: near-term SOM = reachable AI-native scaleups (evidence + product coherence); the SLOPE = the far larger non-AI-native wave whose adoption curve is just starting → 3–4x by 2030 (they can't build it → ours to take). Never present the old LAM $80K as market size. We don't price on take-rate — sizing sanity check only. Source: Market/TAM-SAM-SOM.md.</a:t>
             </a:r>
           </a:p>
         </p:txBody>
@@ -5809,7 +5880,7 @@
                 </a:solidFill>
                 <a:latin typeface="Calibri"/>
               </a:rPr>
-              <a:t>MOAT</a:t>
+              <a:t>WHY KYBER · FEATURE COMPARISON</a:t>
             </a:r>
           </a:p>
         </p:txBody>
@@ -5858,7 +5929,7 @@
         <p:spPr>
           <a:xfrm>
             <a:off x="868680" y="1051560"/>
-            <a:ext cx="10607040" cy="1280160"/>
+            <a:ext cx="10607040" cy="731520"/>
           </a:xfrm>
           <a:prstGeom prst="rect">
             <a:avLst/>
@@ -5873,27 +5944,115 @@
           <a:p>
             <a:pPr algn="l"/>
             <a:r>
-              <a:rPr sz="2700" b="1" i="0">
+              <a:rPr sz="2400" b="1" i="0">
                 <a:solidFill>
                   <a:srgbClr val="E8ECF1"/>
                 </a:solidFill>
                 <a:latin typeface="Calibri"/>
               </a:rPr>
-              <a:t>What gets copied is features. What can't be caught up is data.</a:t>
-            </a:r>
-          </a:p>
-        </p:txBody>
-      </p:sp>
-      <p:sp>
-        <p:nvSpPr>
-          <p:cNvPr id="6" name="TextBox 5"/>
+              <a:t>Every competitor stops short on at least one axis. We don’t.</a:t>
+            </a:r>
+          </a:p>
+        </p:txBody>
+      </p:sp>
+      <p:sp>
+        <p:nvSpPr>
+          <p:cNvPr id="6" name="Rectangle 5"/>
+          <p:cNvSpPr/>
+          <p:nvPr/>
+        </p:nvSpPr>
+        <p:spPr>
+          <a:xfrm>
+            <a:off x="594360" y="1920240"/>
+            <a:ext cx="2560320" cy="530352"/>
+          </a:xfrm>
+          <a:prstGeom prst="rect">
+            <a:avLst/>
+          </a:prstGeom>
+          <a:solidFill>
+            <a:srgbClr val="16202B"/>
+          </a:solidFill>
+          <a:ln>
+            <a:noFill/>
+          </a:ln>
+          <a:effectLst/>
+        </p:spPr>
+        <p:style>
+          <a:lnRef idx="1">
+            <a:schemeClr val="accent1"/>
+          </a:lnRef>
+          <a:fillRef idx="3">
+            <a:schemeClr val="accent1"/>
+          </a:fillRef>
+          <a:effectRef idx="2">
+            <a:schemeClr val="accent1"/>
+          </a:effectRef>
+          <a:fontRef idx="minor">
+            <a:schemeClr val="lt1"/>
+          </a:fontRef>
+        </p:style>
+        <p:txBody>
+          <a:bodyPr rtlCol="0" anchor="ctr"/>
+          <a:lstStyle/>
+          <a:p>
+            <a:pPr algn="ctr"/>
+          </a:p>
+        </p:txBody>
+      </p:sp>
+      <p:sp>
+        <p:nvSpPr>
+          <p:cNvPr id="7" name="Rectangle 6"/>
+          <p:cNvSpPr/>
+          <p:nvPr/>
+        </p:nvSpPr>
+        <p:spPr>
+          <a:xfrm>
+            <a:off x="3154680" y="1920240"/>
+            <a:ext cx="1691640" cy="530352"/>
+          </a:xfrm>
+          <a:prstGeom prst="rect">
+            <a:avLst/>
+          </a:prstGeom>
+          <a:solidFill>
+            <a:srgbClr val="16202B"/>
+          </a:solidFill>
+          <a:ln>
+            <a:noFill/>
+          </a:ln>
+          <a:effectLst/>
+        </p:spPr>
+        <p:style>
+          <a:lnRef idx="1">
+            <a:schemeClr val="accent1"/>
+          </a:lnRef>
+          <a:fillRef idx="3">
+            <a:schemeClr val="accent1"/>
+          </a:fillRef>
+          <a:effectRef idx="2">
+            <a:schemeClr val="accent1"/>
+          </a:effectRef>
+          <a:fontRef idx="minor">
+            <a:schemeClr val="lt1"/>
+          </a:fontRef>
+        </p:style>
+        <p:txBody>
+          <a:bodyPr rtlCol="0" anchor="ctr"/>
+          <a:lstStyle/>
+          <a:p>
+            <a:pPr algn="ctr"/>
+          </a:p>
+        </p:txBody>
+      </p:sp>
+      <p:sp>
+        <p:nvSpPr>
+          <p:cNvPr id="8" name="TextBox 7"/>
           <p:cNvSpPr txBox="1"/>
           <p:nvPr/>
         </p:nvSpPr>
         <p:spPr>
           <a:xfrm>
-            <a:off x="868680" y="2148840"/>
-            <a:ext cx="10424160" cy="4023360"/>
+            <a:off x="3200400" y="1920240"/>
+            <a:ext cx="1600200" cy="530352"/>
           </a:xfrm>
           <a:prstGeom prst="rect">
             <a:avLst/>
@@ -5901,88 +6060,2741 @@
           <a:noFill/>
         </p:spPr>
         <p:txBody>
-          <a:bodyPr wrap="square">
+          <a:bodyPr wrap="square" anchor="ctr" lIns="0" rIns="0" tIns="0" bIns="0">
             <a:spAutoFit/>
           </a:bodyPr>
           <a:lstStyle/>
           <a:p>
-            <a:pPr algn="l">
-              <a:spcAft>
-                <a:spcPts val="800"/>
-              </a:spcAft>
-            </a:pPr>
-            <a:r>
-              <a:rPr sz="1700" b="0" i="0">
+            <a:pPr algn="ctr"/>
+            <a:r>
+              <a:rPr sz="1000" b="0" i="0">
                 <a:solidFill>
                   <a:srgbClr val="9AA7B4"/>
                 </a:solidFill>
                 <a:latin typeface="Calibri"/>
               </a:rPr>
-              <a:t>▸  Caching, routing, hard-limits = replicable in 6 months. Not a moat.</a:t>
-            </a:r>
-          </a:p>
-          <a:p>
-            <a:pPr algn="l">
-              <a:spcAft>
-                <a:spcPts val="800"/>
-              </a:spcAft>
-            </a:pPr>
-            <a:r>
-              <a:rPr sz="1700" b="1" i="0">
+              <a:t>Langfuse</a:t>
+            </a:r>
+          </a:p>
+        </p:txBody>
+      </p:sp>
+      <p:sp>
+        <p:nvSpPr>
+          <p:cNvPr id="9" name="Rectangle 8"/>
+          <p:cNvSpPr/>
+          <p:nvPr/>
+        </p:nvSpPr>
+        <p:spPr>
+          <a:xfrm>
+            <a:off x="4846320" y="1920240"/>
+            <a:ext cx="1691640" cy="530352"/>
+          </a:xfrm>
+          <a:prstGeom prst="rect">
+            <a:avLst/>
+          </a:prstGeom>
+          <a:solidFill>
+            <a:srgbClr val="16202B"/>
+          </a:solidFill>
+          <a:ln>
+            <a:noFill/>
+          </a:ln>
+          <a:effectLst/>
+        </p:spPr>
+        <p:style>
+          <a:lnRef idx="1">
+            <a:schemeClr val="accent1"/>
+          </a:lnRef>
+          <a:fillRef idx="3">
+            <a:schemeClr val="accent1"/>
+          </a:fillRef>
+          <a:effectRef idx="2">
+            <a:schemeClr val="accent1"/>
+          </a:effectRef>
+          <a:fontRef idx="minor">
+            <a:schemeClr val="lt1"/>
+          </a:fontRef>
+        </p:style>
+        <p:txBody>
+          <a:bodyPr rtlCol="0" anchor="ctr"/>
+          <a:lstStyle/>
+          <a:p>
+            <a:pPr algn="ctr"/>
+          </a:p>
+        </p:txBody>
+      </p:sp>
+      <p:sp>
+        <p:nvSpPr>
+          <p:cNvPr id="10" name="TextBox 9"/>
+          <p:cNvSpPr txBox="1"/>
+          <p:nvPr/>
+        </p:nvSpPr>
+        <p:spPr>
+          <a:xfrm>
+            <a:off x="4892040" y="1920240"/>
+            <a:ext cx="1600200" cy="530352"/>
+          </a:xfrm>
+          <a:prstGeom prst="rect">
+            <a:avLst/>
+          </a:prstGeom>
+          <a:noFill/>
+        </p:spPr>
+        <p:txBody>
+          <a:bodyPr wrap="square" anchor="ctr" lIns="0" rIns="0" tIns="0" bIns="0">
+            <a:spAutoFit/>
+          </a:bodyPr>
+          <a:lstStyle/>
+          <a:p>
+            <a:pPr algn="ctr"/>
+            <a:r>
+              <a:rPr sz="1000" b="0" i="0">
+                <a:solidFill>
+                  <a:srgbClr val="9AA7B4"/>
+                </a:solidFill>
+                <a:latin typeface="Calibri"/>
+              </a:rPr>
+              <a:t>CloudZero</a:t>
+            </a:r>
+          </a:p>
+        </p:txBody>
+      </p:sp>
+      <p:sp>
+        <p:nvSpPr>
+          <p:cNvPr id="11" name="Rectangle 10"/>
+          <p:cNvSpPr/>
+          <p:nvPr/>
+        </p:nvSpPr>
+        <p:spPr>
+          <a:xfrm>
+            <a:off x="6537960" y="1920240"/>
+            <a:ext cx="1691640" cy="530352"/>
+          </a:xfrm>
+          <a:prstGeom prst="rect">
+            <a:avLst/>
+          </a:prstGeom>
+          <a:solidFill>
+            <a:srgbClr val="16202B"/>
+          </a:solidFill>
+          <a:ln>
+            <a:noFill/>
+          </a:ln>
+          <a:effectLst/>
+        </p:spPr>
+        <p:style>
+          <a:lnRef idx="1">
+            <a:schemeClr val="accent1"/>
+          </a:lnRef>
+          <a:fillRef idx="3">
+            <a:schemeClr val="accent1"/>
+          </a:fillRef>
+          <a:effectRef idx="2">
+            <a:schemeClr val="accent1"/>
+          </a:effectRef>
+          <a:fontRef idx="minor">
+            <a:schemeClr val="lt1"/>
+          </a:fontRef>
+        </p:style>
+        <p:txBody>
+          <a:bodyPr rtlCol="0" anchor="ctr"/>
+          <a:lstStyle/>
+          <a:p>
+            <a:pPr algn="ctr"/>
+          </a:p>
+        </p:txBody>
+      </p:sp>
+      <p:sp>
+        <p:nvSpPr>
+          <p:cNvPr id="12" name="TextBox 11"/>
+          <p:cNvSpPr txBox="1"/>
+          <p:nvPr/>
+        </p:nvSpPr>
+        <p:spPr>
+          <a:xfrm>
+            <a:off x="6583680" y="1920240"/>
+            <a:ext cx="1600200" cy="530352"/>
+          </a:xfrm>
+          <a:prstGeom prst="rect">
+            <a:avLst/>
+          </a:prstGeom>
+          <a:noFill/>
+        </p:spPr>
+        <p:txBody>
+          <a:bodyPr wrap="square" anchor="ctr" lIns="0" rIns="0" tIns="0" bIns="0">
+            <a:spAutoFit/>
+          </a:bodyPr>
+          <a:lstStyle/>
+          <a:p>
+            <a:pPr algn="ctr"/>
+            <a:r>
+              <a:rPr sz="1000" b="0" i="0">
+                <a:solidFill>
+                  <a:srgbClr val="9AA7B4"/>
+                </a:solidFill>
+                <a:latin typeface="Calibri"/>
+              </a:rPr>
+              <a:t>LiteLLM</a:t>
+            </a:r>
+          </a:p>
+        </p:txBody>
+      </p:sp>
+      <p:sp>
+        <p:nvSpPr>
+          <p:cNvPr id="13" name="Rectangle 12"/>
+          <p:cNvSpPr/>
+          <p:nvPr/>
+        </p:nvSpPr>
+        <p:spPr>
+          <a:xfrm>
+            <a:off x="8229600" y="1920240"/>
+            <a:ext cx="1691640" cy="530352"/>
+          </a:xfrm>
+          <a:prstGeom prst="rect">
+            <a:avLst/>
+          </a:prstGeom>
+          <a:solidFill>
+            <a:srgbClr val="16202B"/>
+          </a:solidFill>
+          <a:ln>
+            <a:noFill/>
+          </a:ln>
+          <a:effectLst/>
+        </p:spPr>
+        <p:style>
+          <a:lnRef idx="1">
+            <a:schemeClr val="accent1"/>
+          </a:lnRef>
+          <a:fillRef idx="3">
+            <a:schemeClr val="accent1"/>
+          </a:fillRef>
+          <a:effectRef idx="2">
+            <a:schemeClr val="accent1"/>
+          </a:effectRef>
+          <a:fontRef idx="minor">
+            <a:schemeClr val="lt1"/>
+          </a:fontRef>
+        </p:style>
+        <p:txBody>
+          <a:bodyPr rtlCol="0" anchor="ctr"/>
+          <a:lstStyle/>
+          <a:p>
+            <a:pPr algn="ctr"/>
+          </a:p>
+        </p:txBody>
+      </p:sp>
+      <p:sp>
+        <p:nvSpPr>
+          <p:cNvPr id="14" name="TextBox 13"/>
+          <p:cNvSpPr txBox="1"/>
+          <p:nvPr/>
+        </p:nvSpPr>
+        <p:spPr>
+          <a:xfrm>
+            <a:off x="8275320" y="1920240"/>
+            <a:ext cx="1600200" cy="530352"/>
+          </a:xfrm>
+          <a:prstGeom prst="rect">
+            <a:avLst/>
+          </a:prstGeom>
+          <a:noFill/>
+        </p:spPr>
+        <p:txBody>
+          <a:bodyPr wrap="square" anchor="ctr" lIns="0" rIns="0" tIns="0" bIns="0">
+            <a:spAutoFit/>
+          </a:bodyPr>
+          <a:lstStyle/>
+          <a:p>
+            <a:pPr algn="ctr"/>
+            <a:r>
+              <a:rPr sz="1000" b="0" i="0">
+                <a:solidFill>
+                  <a:srgbClr val="9AA7B4"/>
+                </a:solidFill>
+                <a:latin typeface="Calibri"/>
+              </a:rPr>
+              <a:t>SatGate ❂</a:t>
+            </a:r>
+          </a:p>
+        </p:txBody>
+      </p:sp>
+      <p:sp>
+        <p:nvSpPr>
+          <p:cNvPr id="15" name="Rectangle 14"/>
+          <p:cNvSpPr/>
+          <p:nvPr/>
+        </p:nvSpPr>
+        <p:spPr>
+          <a:xfrm>
+            <a:off x="9921240" y="1920240"/>
+            <a:ext cx="1691640" cy="530352"/>
+          </a:xfrm>
+          <a:prstGeom prst="rect">
+            <a:avLst/>
+          </a:prstGeom>
+          <a:solidFill>
+            <a:srgbClr val="35C9C9"/>
+          </a:solidFill>
+          <a:ln>
+            <a:noFill/>
+          </a:ln>
+          <a:effectLst/>
+        </p:spPr>
+        <p:style>
+          <a:lnRef idx="1">
+            <a:schemeClr val="accent1"/>
+          </a:lnRef>
+          <a:fillRef idx="3">
+            <a:schemeClr val="accent1"/>
+          </a:fillRef>
+          <a:effectRef idx="2">
+            <a:schemeClr val="accent1"/>
+          </a:effectRef>
+          <a:fontRef idx="minor">
+            <a:schemeClr val="lt1"/>
+          </a:fontRef>
+        </p:style>
+        <p:txBody>
+          <a:bodyPr rtlCol="0" anchor="ctr"/>
+          <a:lstStyle/>
+          <a:p>
+            <a:pPr algn="ctr"/>
+          </a:p>
+        </p:txBody>
+      </p:sp>
+      <p:sp>
+        <p:nvSpPr>
+          <p:cNvPr id="16" name="TextBox 15"/>
+          <p:cNvSpPr txBox="1"/>
+          <p:nvPr/>
+        </p:nvSpPr>
+        <p:spPr>
+          <a:xfrm>
+            <a:off x="9966960" y="1920240"/>
+            <a:ext cx="1600200" cy="530352"/>
+          </a:xfrm>
+          <a:prstGeom prst="rect">
+            <a:avLst/>
+          </a:prstGeom>
+          <a:noFill/>
+        </p:spPr>
+        <p:txBody>
+          <a:bodyPr wrap="square" anchor="ctr" lIns="0" rIns="0" tIns="0" bIns="0">
+            <a:spAutoFit/>
+          </a:bodyPr>
+          <a:lstStyle/>
+          <a:p>
+            <a:pPr algn="ctr"/>
+            <a:r>
+              <a:rPr sz="1000" b="1" i="0">
+                <a:solidFill>
+                  <a:srgbClr val="0E141B"/>
+                </a:solidFill>
+                <a:latin typeface="Calibri"/>
+              </a:rPr>
+              <a:t>Kyber</a:t>
+            </a:r>
+          </a:p>
+        </p:txBody>
+      </p:sp>
+      <p:sp>
+        <p:nvSpPr>
+          <p:cNvPr id="17" name="Rectangle 16"/>
+          <p:cNvSpPr/>
+          <p:nvPr/>
+        </p:nvSpPr>
+        <p:spPr>
+          <a:xfrm>
+            <a:off x="594360" y="2450592"/>
+            <a:ext cx="2560320" cy="530352"/>
+          </a:xfrm>
+          <a:prstGeom prst="rect">
+            <a:avLst/>
+          </a:prstGeom>
+          <a:solidFill>
+            <a:srgbClr val="121B26"/>
+          </a:solidFill>
+          <a:ln>
+            <a:noFill/>
+          </a:ln>
+          <a:effectLst/>
+        </p:spPr>
+        <p:style>
+          <a:lnRef idx="1">
+            <a:schemeClr val="accent1"/>
+          </a:lnRef>
+          <a:fillRef idx="3">
+            <a:schemeClr val="accent1"/>
+          </a:fillRef>
+          <a:effectRef idx="2">
+            <a:schemeClr val="accent1"/>
+          </a:effectRef>
+          <a:fontRef idx="minor">
+            <a:schemeClr val="lt1"/>
+          </a:fontRef>
+        </p:style>
+        <p:txBody>
+          <a:bodyPr rtlCol="0" anchor="ctr"/>
+          <a:lstStyle/>
+          <a:p>
+            <a:pPr algn="ctr"/>
+          </a:p>
+        </p:txBody>
+      </p:sp>
+      <p:sp>
+        <p:nvSpPr>
+          <p:cNvPr id="18" name="TextBox 17"/>
+          <p:cNvSpPr txBox="1"/>
+          <p:nvPr/>
+        </p:nvSpPr>
+        <p:spPr>
+          <a:xfrm>
+            <a:off x="740664" y="2450592"/>
+            <a:ext cx="2377440" cy="530352"/>
+          </a:xfrm>
+          <a:prstGeom prst="rect">
+            <a:avLst/>
+          </a:prstGeom>
+          <a:noFill/>
+        </p:spPr>
+        <p:txBody>
+          <a:bodyPr wrap="square" anchor="ctr" lIns="0" rIns="0" tIns="0" bIns="0">
+            <a:spAutoFit/>
+          </a:bodyPr>
+          <a:lstStyle/>
+          <a:p>
+            <a:pPr algn="l"/>
+            <a:r>
+              <a:rPr sz="1300" b="0" i="0">
                 <a:solidFill>
                   <a:srgbClr val="E8ECF1"/>
                 </a:solidFill>
                 <a:latin typeface="Calibri"/>
               </a:rPr>
-              <a:t>▸  Moat = things that get stronger as customer data accumulates:</a:t>
-            </a:r>
-          </a:p>
-          <a:p>
-            <a:pPr lvl="1" algn="l">
-              <a:spcAft>
-                <a:spcPts val="800"/>
-              </a:spcAft>
-            </a:pPr>
-            <a:r>
-              <a:rPr sz="1700" b="0" i="0">
+              <a:t>LLM cost tracking</a:t>
+            </a:r>
+          </a:p>
+        </p:txBody>
+      </p:sp>
+      <p:sp>
+        <p:nvSpPr>
+          <p:cNvPr id="19" name="Rectangle 18"/>
+          <p:cNvSpPr/>
+          <p:nvPr/>
+        </p:nvSpPr>
+        <p:spPr>
+          <a:xfrm>
+            <a:off x="3154680" y="2450592"/>
+            <a:ext cx="1691640" cy="530352"/>
+          </a:xfrm>
+          <a:prstGeom prst="rect">
+            <a:avLst/>
+          </a:prstGeom>
+          <a:solidFill>
+            <a:srgbClr val="121B26"/>
+          </a:solidFill>
+          <a:ln>
+            <a:noFill/>
+          </a:ln>
+          <a:effectLst/>
+        </p:spPr>
+        <p:style>
+          <a:lnRef idx="1">
+            <a:schemeClr val="accent1"/>
+          </a:lnRef>
+          <a:fillRef idx="3">
+            <a:schemeClr val="accent1"/>
+          </a:fillRef>
+          <a:effectRef idx="2">
+            <a:schemeClr val="accent1"/>
+          </a:effectRef>
+          <a:fontRef idx="minor">
+            <a:schemeClr val="lt1"/>
+          </a:fontRef>
+        </p:style>
+        <p:txBody>
+          <a:bodyPr rtlCol="0" anchor="ctr"/>
+          <a:lstStyle/>
+          <a:p>
+            <a:pPr algn="ctr"/>
+          </a:p>
+        </p:txBody>
+      </p:sp>
+      <p:sp>
+        <p:nvSpPr>
+          <p:cNvPr id="20" name="TextBox 19"/>
+          <p:cNvSpPr txBox="1"/>
+          <p:nvPr/>
+        </p:nvSpPr>
+        <p:spPr>
+          <a:xfrm>
+            <a:off x="3154680" y="2450592"/>
+            <a:ext cx="1691640" cy="530352"/>
+          </a:xfrm>
+          <a:prstGeom prst="rect">
+            <a:avLst/>
+          </a:prstGeom>
+          <a:noFill/>
+        </p:spPr>
+        <p:txBody>
+          <a:bodyPr wrap="square" anchor="ctr" lIns="0" rIns="0" tIns="0" bIns="0">
+            <a:spAutoFit/>
+          </a:bodyPr>
+          <a:lstStyle/>
+          <a:p>
+            <a:pPr algn="ctr"/>
+            <a:r>
+              <a:rPr sz="2200" b="1" i="0">
+                <a:solidFill>
+                  <a:srgbClr val="35C9C9"/>
+                </a:solidFill>
+                <a:latin typeface="Calibri"/>
+              </a:rPr>
+              <a:t>✓</a:t>
+            </a:r>
+          </a:p>
+        </p:txBody>
+      </p:sp>
+      <p:sp>
+        <p:nvSpPr>
+          <p:cNvPr id="21" name="Rectangle 20"/>
+          <p:cNvSpPr/>
+          <p:nvPr/>
+        </p:nvSpPr>
+        <p:spPr>
+          <a:xfrm>
+            <a:off x="4846320" y="2450592"/>
+            <a:ext cx="1691640" cy="530352"/>
+          </a:xfrm>
+          <a:prstGeom prst="rect">
+            <a:avLst/>
+          </a:prstGeom>
+          <a:solidFill>
+            <a:srgbClr val="121B26"/>
+          </a:solidFill>
+          <a:ln>
+            <a:noFill/>
+          </a:ln>
+          <a:effectLst/>
+        </p:spPr>
+        <p:style>
+          <a:lnRef idx="1">
+            <a:schemeClr val="accent1"/>
+          </a:lnRef>
+          <a:fillRef idx="3">
+            <a:schemeClr val="accent1"/>
+          </a:fillRef>
+          <a:effectRef idx="2">
+            <a:schemeClr val="accent1"/>
+          </a:effectRef>
+          <a:fontRef idx="minor">
+            <a:schemeClr val="lt1"/>
+          </a:fontRef>
+        </p:style>
+        <p:txBody>
+          <a:bodyPr rtlCol="0" anchor="ctr"/>
+          <a:lstStyle/>
+          <a:p>
+            <a:pPr algn="ctr"/>
+          </a:p>
+        </p:txBody>
+      </p:sp>
+      <p:sp>
+        <p:nvSpPr>
+          <p:cNvPr id="22" name="TextBox 21"/>
+          <p:cNvSpPr txBox="1"/>
+          <p:nvPr/>
+        </p:nvSpPr>
+        <p:spPr>
+          <a:xfrm>
+            <a:off x="4846320" y="2450592"/>
+            <a:ext cx="1691640" cy="530352"/>
+          </a:xfrm>
+          <a:prstGeom prst="rect">
+            <a:avLst/>
+          </a:prstGeom>
+          <a:noFill/>
+        </p:spPr>
+        <p:txBody>
+          <a:bodyPr wrap="square" anchor="ctr" lIns="0" rIns="0" tIns="0" bIns="0">
+            <a:spAutoFit/>
+          </a:bodyPr>
+          <a:lstStyle/>
+          <a:p>
+            <a:pPr algn="ctr"/>
+            <a:r>
+              <a:rPr sz="2200" b="1" i="0">
+                <a:solidFill>
+                  <a:srgbClr val="35C9C9"/>
+                </a:solidFill>
+                <a:latin typeface="Calibri"/>
+              </a:rPr>
+              <a:t>✓</a:t>
+            </a:r>
+          </a:p>
+        </p:txBody>
+      </p:sp>
+      <p:sp>
+        <p:nvSpPr>
+          <p:cNvPr id="23" name="Rectangle 22"/>
+          <p:cNvSpPr/>
+          <p:nvPr/>
+        </p:nvSpPr>
+        <p:spPr>
+          <a:xfrm>
+            <a:off x="6537960" y="2450592"/>
+            <a:ext cx="1691640" cy="530352"/>
+          </a:xfrm>
+          <a:prstGeom prst="rect">
+            <a:avLst/>
+          </a:prstGeom>
+          <a:solidFill>
+            <a:srgbClr val="121B26"/>
+          </a:solidFill>
+          <a:ln>
+            <a:noFill/>
+          </a:ln>
+          <a:effectLst/>
+        </p:spPr>
+        <p:style>
+          <a:lnRef idx="1">
+            <a:schemeClr val="accent1"/>
+          </a:lnRef>
+          <a:fillRef idx="3">
+            <a:schemeClr val="accent1"/>
+          </a:fillRef>
+          <a:effectRef idx="2">
+            <a:schemeClr val="accent1"/>
+          </a:effectRef>
+          <a:fontRef idx="minor">
+            <a:schemeClr val="lt1"/>
+          </a:fontRef>
+        </p:style>
+        <p:txBody>
+          <a:bodyPr rtlCol="0" anchor="ctr"/>
+          <a:lstStyle/>
+          <a:p>
+            <a:pPr algn="ctr"/>
+          </a:p>
+        </p:txBody>
+      </p:sp>
+      <p:sp>
+        <p:nvSpPr>
+          <p:cNvPr id="24" name="TextBox 23"/>
+          <p:cNvSpPr txBox="1"/>
+          <p:nvPr/>
+        </p:nvSpPr>
+        <p:spPr>
+          <a:xfrm>
+            <a:off x="6537960" y="2450592"/>
+            <a:ext cx="1691640" cy="530352"/>
+          </a:xfrm>
+          <a:prstGeom prst="rect">
+            <a:avLst/>
+          </a:prstGeom>
+          <a:noFill/>
+        </p:spPr>
+        <p:txBody>
+          <a:bodyPr wrap="square" anchor="ctr" lIns="0" rIns="0" tIns="0" bIns="0">
+            <a:spAutoFit/>
+          </a:bodyPr>
+          <a:lstStyle/>
+          <a:p>
+            <a:pPr algn="ctr"/>
+            <a:r>
+              <a:rPr sz="2200" b="1" i="0">
+                <a:solidFill>
+                  <a:srgbClr val="35C9C9"/>
+                </a:solidFill>
+                <a:latin typeface="Calibri"/>
+              </a:rPr>
+              <a:t>✓</a:t>
+            </a:r>
+          </a:p>
+        </p:txBody>
+      </p:sp>
+      <p:sp>
+        <p:nvSpPr>
+          <p:cNvPr id="25" name="Rectangle 24"/>
+          <p:cNvSpPr/>
+          <p:nvPr/>
+        </p:nvSpPr>
+        <p:spPr>
+          <a:xfrm>
+            <a:off x="8229600" y="2450592"/>
+            <a:ext cx="1691640" cy="530352"/>
+          </a:xfrm>
+          <a:prstGeom prst="rect">
+            <a:avLst/>
+          </a:prstGeom>
+          <a:solidFill>
+            <a:srgbClr val="121B26"/>
+          </a:solidFill>
+          <a:ln>
+            <a:noFill/>
+          </a:ln>
+          <a:effectLst/>
+        </p:spPr>
+        <p:style>
+          <a:lnRef idx="1">
+            <a:schemeClr val="accent1"/>
+          </a:lnRef>
+          <a:fillRef idx="3">
+            <a:schemeClr val="accent1"/>
+          </a:fillRef>
+          <a:effectRef idx="2">
+            <a:schemeClr val="accent1"/>
+          </a:effectRef>
+          <a:fontRef idx="minor">
+            <a:schemeClr val="lt1"/>
+          </a:fontRef>
+        </p:style>
+        <p:txBody>
+          <a:bodyPr rtlCol="0" anchor="ctr"/>
+          <a:lstStyle/>
+          <a:p>
+            <a:pPr algn="ctr"/>
+          </a:p>
+        </p:txBody>
+      </p:sp>
+      <p:sp>
+        <p:nvSpPr>
+          <p:cNvPr id="26" name="TextBox 25"/>
+          <p:cNvSpPr txBox="1"/>
+          <p:nvPr/>
+        </p:nvSpPr>
+        <p:spPr>
+          <a:xfrm>
+            <a:off x="8229600" y="2450592"/>
+            <a:ext cx="1691640" cy="530352"/>
+          </a:xfrm>
+          <a:prstGeom prst="rect">
+            <a:avLst/>
+          </a:prstGeom>
+          <a:noFill/>
+        </p:spPr>
+        <p:txBody>
+          <a:bodyPr wrap="square" anchor="ctr" lIns="0" rIns="0" tIns="0" bIns="0">
+            <a:spAutoFit/>
+          </a:bodyPr>
+          <a:lstStyle/>
+          <a:p>
+            <a:pPr algn="ctr"/>
+            <a:r>
+              <a:rPr sz="1800" b="0" i="0">
+                <a:solidFill>
+                  <a:srgbClr val="F2C14E"/>
+                </a:solidFill>
+                <a:latin typeface="Calibri"/>
+              </a:rPr>
+              <a:t>~</a:t>
+            </a:r>
+          </a:p>
+        </p:txBody>
+      </p:sp>
+      <p:sp>
+        <p:nvSpPr>
+          <p:cNvPr id="27" name="Rectangle 26"/>
+          <p:cNvSpPr/>
+          <p:nvPr/>
+        </p:nvSpPr>
+        <p:spPr>
+          <a:xfrm>
+            <a:off x="9921240" y="2450592"/>
+            <a:ext cx="1691640" cy="530352"/>
+          </a:xfrm>
+          <a:prstGeom prst="rect">
+            <a:avLst/>
+          </a:prstGeom>
+          <a:solidFill>
+            <a:srgbClr val="0C272E"/>
+          </a:solidFill>
+          <a:ln>
+            <a:noFill/>
+          </a:ln>
+          <a:effectLst/>
+        </p:spPr>
+        <p:style>
+          <a:lnRef idx="1">
+            <a:schemeClr val="accent1"/>
+          </a:lnRef>
+          <a:fillRef idx="3">
+            <a:schemeClr val="accent1"/>
+          </a:fillRef>
+          <a:effectRef idx="2">
+            <a:schemeClr val="accent1"/>
+          </a:effectRef>
+          <a:fontRef idx="minor">
+            <a:schemeClr val="lt1"/>
+          </a:fontRef>
+        </p:style>
+        <p:txBody>
+          <a:bodyPr rtlCol="0" anchor="ctr"/>
+          <a:lstStyle/>
+          <a:p>
+            <a:pPr algn="ctr"/>
+          </a:p>
+        </p:txBody>
+      </p:sp>
+      <p:sp>
+        <p:nvSpPr>
+          <p:cNvPr id="28" name="TextBox 27"/>
+          <p:cNvSpPr txBox="1"/>
+          <p:nvPr/>
+        </p:nvSpPr>
+        <p:spPr>
+          <a:xfrm>
+            <a:off x="9921240" y="2450592"/>
+            <a:ext cx="1691640" cy="530352"/>
+          </a:xfrm>
+          <a:prstGeom prst="rect">
+            <a:avLst/>
+          </a:prstGeom>
+          <a:noFill/>
+        </p:spPr>
+        <p:txBody>
+          <a:bodyPr wrap="square" anchor="ctr" lIns="0" rIns="0" tIns="0" bIns="0">
+            <a:spAutoFit/>
+          </a:bodyPr>
+          <a:lstStyle/>
+          <a:p>
+            <a:pPr algn="ctr"/>
+            <a:r>
+              <a:rPr sz="2200" b="1" i="0">
+                <a:solidFill>
+                  <a:srgbClr val="FF6B35"/>
+                </a:solidFill>
+                <a:latin typeface="Calibri"/>
+              </a:rPr>
+              <a:t>✓</a:t>
+            </a:r>
+          </a:p>
+        </p:txBody>
+      </p:sp>
+      <p:sp>
+        <p:nvSpPr>
+          <p:cNvPr id="29" name="Rectangle 28"/>
+          <p:cNvSpPr/>
+          <p:nvPr/>
+        </p:nvSpPr>
+        <p:spPr>
+          <a:xfrm>
+            <a:off x="594360" y="2980944"/>
+            <a:ext cx="2560320" cy="530352"/>
+          </a:xfrm>
+          <a:prstGeom prst="rect">
+            <a:avLst/>
+          </a:prstGeom>
+          <a:solidFill>
+            <a:srgbClr val="16212E"/>
+          </a:solidFill>
+          <a:ln>
+            <a:noFill/>
+          </a:ln>
+          <a:effectLst/>
+        </p:spPr>
+        <p:style>
+          <a:lnRef idx="1">
+            <a:schemeClr val="accent1"/>
+          </a:lnRef>
+          <a:fillRef idx="3">
+            <a:schemeClr val="accent1"/>
+          </a:fillRef>
+          <a:effectRef idx="2">
+            <a:schemeClr val="accent1"/>
+          </a:effectRef>
+          <a:fontRef idx="minor">
+            <a:schemeClr val="lt1"/>
+          </a:fontRef>
+        </p:style>
+        <p:txBody>
+          <a:bodyPr rtlCol="0" anchor="ctr"/>
+          <a:lstStyle/>
+          <a:p>
+            <a:pPr algn="ctr"/>
+          </a:p>
+        </p:txBody>
+      </p:sp>
+      <p:sp>
+        <p:nvSpPr>
+          <p:cNvPr id="30" name="TextBox 29"/>
+          <p:cNvSpPr txBox="1"/>
+          <p:nvPr/>
+        </p:nvSpPr>
+        <p:spPr>
+          <a:xfrm>
+            <a:off x="740664" y="2980944"/>
+            <a:ext cx="2377440" cy="530352"/>
+          </a:xfrm>
+          <a:prstGeom prst="rect">
+            <a:avLst/>
+          </a:prstGeom>
+          <a:noFill/>
+        </p:spPr>
+        <p:txBody>
+          <a:bodyPr wrap="square" anchor="ctr" lIns="0" rIns="0" tIns="0" bIns="0">
+            <a:spAutoFit/>
+          </a:bodyPr>
+          <a:lstStyle/>
+          <a:p>
+            <a:pPr algn="l"/>
+            <a:r>
+              <a:rPr sz="1300" b="0" i="0">
                 <a:solidFill>
                   <a:srgbClr val="E8ECF1"/>
                 </a:solidFill>
                 <a:latin typeface="Calibri"/>
               </a:rPr>
-              <a:t>     –  1. Unit-economics accuracy gap — more traffic → sharper runaway detection &amp; cost simulation. Followers start from zero data.</a:t>
-            </a:r>
-          </a:p>
-          <a:p>
-            <a:pPr lvl="1" algn="l">
-              <a:spcAft>
-                <a:spcPts val="800"/>
-              </a:spcAft>
-            </a:pPr>
-            <a:r>
-              <a:rPr sz="1700" b="0" i="0">
+              <a:t>Pre-execution blocking</a:t>
+            </a:r>
+          </a:p>
+        </p:txBody>
+      </p:sp>
+      <p:sp>
+        <p:nvSpPr>
+          <p:cNvPr id="31" name="Rectangle 30"/>
+          <p:cNvSpPr/>
+          <p:nvPr/>
+        </p:nvSpPr>
+        <p:spPr>
+          <a:xfrm>
+            <a:off x="3154680" y="2980944"/>
+            <a:ext cx="1691640" cy="530352"/>
+          </a:xfrm>
+          <a:prstGeom prst="rect">
+            <a:avLst/>
+          </a:prstGeom>
+          <a:solidFill>
+            <a:srgbClr val="16212E"/>
+          </a:solidFill>
+          <a:ln>
+            <a:noFill/>
+          </a:ln>
+          <a:effectLst/>
+        </p:spPr>
+        <p:style>
+          <a:lnRef idx="1">
+            <a:schemeClr val="accent1"/>
+          </a:lnRef>
+          <a:fillRef idx="3">
+            <a:schemeClr val="accent1"/>
+          </a:fillRef>
+          <a:effectRef idx="2">
+            <a:schemeClr val="accent1"/>
+          </a:effectRef>
+          <a:fontRef idx="minor">
+            <a:schemeClr val="lt1"/>
+          </a:fontRef>
+        </p:style>
+        <p:txBody>
+          <a:bodyPr rtlCol="0" anchor="ctr"/>
+          <a:lstStyle/>
+          <a:p>
+            <a:pPr algn="ctr"/>
+          </a:p>
+        </p:txBody>
+      </p:sp>
+      <p:sp>
+        <p:nvSpPr>
+          <p:cNvPr id="32" name="TextBox 31"/>
+          <p:cNvSpPr txBox="1"/>
+          <p:nvPr/>
+        </p:nvSpPr>
+        <p:spPr>
+          <a:xfrm>
+            <a:off x="3154680" y="2980944"/>
+            <a:ext cx="1691640" cy="530352"/>
+          </a:xfrm>
+          <a:prstGeom prst="rect">
+            <a:avLst/>
+          </a:prstGeom>
+          <a:noFill/>
+        </p:spPr>
+        <p:txBody>
+          <a:bodyPr wrap="square" anchor="ctr" lIns="0" rIns="0" tIns="0" bIns="0">
+            <a:spAutoFit/>
+          </a:bodyPr>
+          <a:lstStyle/>
+          <a:p>
+            <a:pPr algn="ctr"/>
+            <a:r>
+              <a:rPr sz="1800" b="0" i="0">
+                <a:solidFill>
+                  <a:srgbClr val="9AA7B4"/>
+                </a:solidFill>
+                <a:latin typeface="Calibri"/>
+              </a:rPr>
+              <a:t>✗</a:t>
+            </a:r>
+          </a:p>
+        </p:txBody>
+      </p:sp>
+      <p:sp>
+        <p:nvSpPr>
+          <p:cNvPr id="33" name="Rectangle 32"/>
+          <p:cNvSpPr/>
+          <p:nvPr/>
+        </p:nvSpPr>
+        <p:spPr>
+          <a:xfrm>
+            <a:off x="4846320" y="2980944"/>
+            <a:ext cx="1691640" cy="530352"/>
+          </a:xfrm>
+          <a:prstGeom prst="rect">
+            <a:avLst/>
+          </a:prstGeom>
+          <a:solidFill>
+            <a:srgbClr val="16212E"/>
+          </a:solidFill>
+          <a:ln>
+            <a:noFill/>
+          </a:ln>
+          <a:effectLst/>
+        </p:spPr>
+        <p:style>
+          <a:lnRef idx="1">
+            <a:schemeClr val="accent1"/>
+          </a:lnRef>
+          <a:fillRef idx="3">
+            <a:schemeClr val="accent1"/>
+          </a:fillRef>
+          <a:effectRef idx="2">
+            <a:schemeClr val="accent1"/>
+          </a:effectRef>
+          <a:fontRef idx="minor">
+            <a:schemeClr val="lt1"/>
+          </a:fontRef>
+        </p:style>
+        <p:txBody>
+          <a:bodyPr rtlCol="0" anchor="ctr"/>
+          <a:lstStyle/>
+          <a:p>
+            <a:pPr algn="ctr"/>
+          </a:p>
+        </p:txBody>
+      </p:sp>
+      <p:sp>
+        <p:nvSpPr>
+          <p:cNvPr id="34" name="TextBox 33"/>
+          <p:cNvSpPr txBox="1"/>
+          <p:nvPr/>
+        </p:nvSpPr>
+        <p:spPr>
+          <a:xfrm>
+            <a:off x="4846320" y="2980944"/>
+            <a:ext cx="1691640" cy="530352"/>
+          </a:xfrm>
+          <a:prstGeom prst="rect">
+            <a:avLst/>
+          </a:prstGeom>
+          <a:noFill/>
+        </p:spPr>
+        <p:txBody>
+          <a:bodyPr wrap="square" anchor="ctr" lIns="0" rIns="0" tIns="0" bIns="0">
+            <a:spAutoFit/>
+          </a:bodyPr>
+          <a:lstStyle/>
+          <a:p>
+            <a:pPr algn="ctr"/>
+            <a:r>
+              <a:rPr sz="1800" b="0" i="0">
+                <a:solidFill>
+                  <a:srgbClr val="9AA7B4"/>
+                </a:solidFill>
+                <a:latin typeface="Calibri"/>
+              </a:rPr>
+              <a:t>✗</a:t>
+            </a:r>
+          </a:p>
+        </p:txBody>
+      </p:sp>
+      <p:sp>
+        <p:nvSpPr>
+          <p:cNvPr id="35" name="Rectangle 34"/>
+          <p:cNvSpPr/>
+          <p:nvPr/>
+        </p:nvSpPr>
+        <p:spPr>
+          <a:xfrm>
+            <a:off x="6537960" y="2980944"/>
+            <a:ext cx="1691640" cy="530352"/>
+          </a:xfrm>
+          <a:prstGeom prst="rect">
+            <a:avLst/>
+          </a:prstGeom>
+          <a:solidFill>
+            <a:srgbClr val="16212E"/>
+          </a:solidFill>
+          <a:ln>
+            <a:noFill/>
+          </a:ln>
+          <a:effectLst/>
+        </p:spPr>
+        <p:style>
+          <a:lnRef idx="1">
+            <a:schemeClr val="accent1"/>
+          </a:lnRef>
+          <a:fillRef idx="3">
+            <a:schemeClr val="accent1"/>
+          </a:fillRef>
+          <a:effectRef idx="2">
+            <a:schemeClr val="accent1"/>
+          </a:effectRef>
+          <a:fontRef idx="minor">
+            <a:schemeClr val="lt1"/>
+          </a:fontRef>
+        </p:style>
+        <p:txBody>
+          <a:bodyPr rtlCol="0" anchor="ctr"/>
+          <a:lstStyle/>
+          <a:p>
+            <a:pPr algn="ctr"/>
+          </a:p>
+        </p:txBody>
+      </p:sp>
+      <p:sp>
+        <p:nvSpPr>
+          <p:cNvPr id="36" name="TextBox 35"/>
+          <p:cNvSpPr txBox="1"/>
+          <p:nvPr/>
+        </p:nvSpPr>
+        <p:spPr>
+          <a:xfrm>
+            <a:off x="6537960" y="2980944"/>
+            <a:ext cx="1691640" cy="530352"/>
+          </a:xfrm>
+          <a:prstGeom prst="rect">
+            <a:avLst/>
+          </a:prstGeom>
+          <a:noFill/>
+        </p:spPr>
+        <p:txBody>
+          <a:bodyPr wrap="square" anchor="ctr" lIns="0" rIns="0" tIns="0" bIns="0">
+            <a:spAutoFit/>
+          </a:bodyPr>
+          <a:lstStyle/>
+          <a:p>
+            <a:pPr algn="ctr"/>
+            <a:r>
+              <a:rPr sz="2200" b="1" i="0">
+                <a:solidFill>
+                  <a:srgbClr val="35C9C9"/>
+                </a:solidFill>
+                <a:latin typeface="Calibri"/>
+              </a:rPr>
+              <a:t>✓</a:t>
+            </a:r>
+          </a:p>
+        </p:txBody>
+      </p:sp>
+      <p:sp>
+        <p:nvSpPr>
+          <p:cNvPr id="37" name="Rectangle 36"/>
+          <p:cNvSpPr/>
+          <p:nvPr/>
+        </p:nvSpPr>
+        <p:spPr>
+          <a:xfrm>
+            <a:off x="8229600" y="2980944"/>
+            <a:ext cx="1691640" cy="530352"/>
+          </a:xfrm>
+          <a:prstGeom prst="rect">
+            <a:avLst/>
+          </a:prstGeom>
+          <a:solidFill>
+            <a:srgbClr val="16212E"/>
+          </a:solidFill>
+          <a:ln>
+            <a:noFill/>
+          </a:ln>
+          <a:effectLst/>
+        </p:spPr>
+        <p:style>
+          <a:lnRef idx="1">
+            <a:schemeClr val="accent1"/>
+          </a:lnRef>
+          <a:fillRef idx="3">
+            <a:schemeClr val="accent1"/>
+          </a:fillRef>
+          <a:effectRef idx="2">
+            <a:schemeClr val="accent1"/>
+          </a:effectRef>
+          <a:fontRef idx="minor">
+            <a:schemeClr val="lt1"/>
+          </a:fontRef>
+        </p:style>
+        <p:txBody>
+          <a:bodyPr rtlCol="0" anchor="ctr"/>
+          <a:lstStyle/>
+          <a:p>
+            <a:pPr algn="ctr"/>
+          </a:p>
+        </p:txBody>
+      </p:sp>
+      <p:sp>
+        <p:nvSpPr>
+          <p:cNvPr id="38" name="TextBox 37"/>
+          <p:cNvSpPr txBox="1"/>
+          <p:nvPr/>
+        </p:nvSpPr>
+        <p:spPr>
+          <a:xfrm>
+            <a:off x="8229600" y="2980944"/>
+            <a:ext cx="1691640" cy="530352"/>
+          </a:xfrm>
+          <a:prstGeom prst="rect">
+            <a:avLst/>
+          </a:prstGeom>
+          <a:noFill/>
+        </p:spPr>
+        <p:txBody>
+          <a:bodyPr wrap="square" anchor="ctr" lIns="0" rIns="0" tIns="0" bIns="0">
+            <a:spAutoFit/>
+          </a:bodyPr>
+          <a:lstStyle/>
+          <a:p>
+            <a:pPr algn="ctr"/>
+            <a:r>
+              <a:rPr sz="1800" b="0" i="0">
+                <a:solidFill>
+                  <a:srgbClr val="F2C14E"/>
+                </a:solidFill>
+                <a:latin typeface="Calibri"/>
+              </a:rPr>
+              <a:t>~</a:t>
+            </a:r>
+          </a:p>
+        </p:txBody>
+      </p:sp>
+      <p:sp>
+        <p:nvSpPr>
+          <p:cNvPr id="39" name="Rectangle 38"/>
+          <p:cNvSpPr/>
+          <p:nvPr/>
+        </p:nvSpPr>
+        <p:spPr>
+          <a:xfrm>
+            <a:off x="9921240" y="2980944"/>
+            <a:ext cx="1691640" cy="530352"/>
+          </a:xfrm>
+          <a:prstGeom prst="rect">
+            <a:avLst/>
+          </a:prstGeom>
+          <a:solidFill>
+            <a:srgbClr val="0C272E"/>
+          </a:solidFill>
+          <a:ln>
+            <a:noFill/>
+          </a:ln>
+          <a:effectLst/>
+        </p:spPr>
+        <p:style>
+          <a:lnRef idx="1">
+            <a:schemeClr val="accent1"/>
+          </a:lnRef>
+          <a:fillRef idx="3">
+            <a:schemeClr val="accent1"/>
+          </a:fillRef>
+          <a:effectRef idx="2">
+            <a:schemeClr val="accent1"/>
+          </a:effectRef>
+          <a:fontRef idx="minor">
+            <a:schemeClr val="lt1"/>
+          </a:fontRef>
+        </p:style>
+        <p:txBody>
+          <a:bodyPr rtlCol="0" anchor="ctr"/>
+          <a:lstStyle/>
+          <a:p>
+            <a:pPr algn="ctr"/>
+          </a:p>
+        </p:txBody>
+      </p:sp>
+      <p:sp>
+        <p:nvSpPr>
+          <p:cNvPr id="40" name="TextBox 39"/>
+          <p:cNvSpPr txBox="1"/>
+          <p:nvPr/>
+        </p:nvSpPr>
+        <p:spPr>
+          <a:xfrm>
+            <a:off x="9921240" y="2980944"/>
+            <a:ext cx="1691640" cy="530352"/>
+          </a:xfrm>
+          <a:prstGeom prst="rect">
+            <a:avLst/>
+          </a:prstGeom>
+          <a:noFill/>
+        </p:spPr>
+        <p:txBody>
+          <a:bodyPr wrap="square" anchor="ctr" lIns="0" rIns="0" tIns="0" bIns="0">
+            <a:spAutoFit/>
+          </a:bodyPr>
+          <a:lstStyle/>
+          <a:p>
+            <a:pPr algn="ctr"/>
+            <a:r>
+              <a:rPr sz="2200" b="1" i="0">
+                <a:solidFill>
+                  <a:srgbClr val="FF6B35"/>
+                </a:solidFill>
+                <a:latin typeface="Calibri"/>
+              </a:rPr>
+              <a:t>✓</a:t>
+            </a:r>
+          </a:p>
+        </p:txBody>
+      </p:sp>
+      <p:sp>
+        <p:nvSpPr>
+          <p:cNvPr id="41" name="Rectangle 40"/>
+          <p:cNvSpPr/>
+          <p:nvPr/>
+        </p:nvSpPr>
+        <p:spPr>
+          <a:xfrm>
+            <a:off x="594360" y="3511296"/>
+            <a:ext cx="2560320" cy="530352"/>
+          </a:xfrm>
+          <a:prstGeom prst="rect">
+            <a:avLst/>
+          </a:prstGeom>
+          <a:solidFill>
+            <a:srgbClr val="121B26"/>
+          </a:solidFill>
+          <a:ln>
+            <a:noFill/>
+          </a:ln>
+          <a:effectLst/>
+        </p:spPr>
+        <p:style>
+          <a:lnRef idx="1">
+            <a:schemeClr val="accent1"/>
+          </a:lnRef>
+          <a:fillRef idx="3">
+            <a:schemeClr val="accent1"/>
+          </a:fillRef>
+          <a:effectRef idx="2">
+            <a:schemeClr val="accent1"/>
+          </a:effectRef>
+          <a:fontRef idx="minor">
+            <a:schemeClr val="lt1"/>
+          </a:fontRef>
+        </p:style>
+        <p:txBody>
+          <a:bodyPr rtlCol="0" anchor="ctr"/>
+          <a:lstStyle/>
+          <a:p>
+            <a:pPr algn="ctr"/>
+          </a:p>
+        </p:txBody>
+      </p:sp>
+      <p:sp>
+        <p:nvSpPr>
+          <p:cNvPr id="42" name="TextBox 41"/>
+          <p:cNvSpPr txBox="1"/>
+          <p:nvPr/>
+        </p:nvSpPr>
+        <p:spPr>
+          <a:xfrm>
+            <a:off x="740664" y="3511296"/>
+            <a:ext cx="2377440" cy="530352"/>
+          </a:xfrm>
+          <a:prstGeom prst="rect">
+            <a:avLst/>
+          </a:prstGeom>
+          <a:noFill/>
+        </p:spPr>
+        <p:txBody>
+          <a:bodyPr wrap="square" anchor="ctr" lIns="0" rIns="0" tIns="0" bIns="0">
+            <a:spAutoFit/>
+          </a:bodyPr>
+          <a:lstStyle/>
+          <a:p>
+            <a:pPr algn="l"/>
+            <a:r>
+              <a:rPr sz="1300" b="0" i="0">
                 <a:solidFill>
                   <a:srgbClr val="E8ECF1"/>
                 </a:solidFill>
                 <a:latin typeface="Calibri"/>
               </a:rPr>
-              <a:t>     –  2. Peer benchmark (lagging) — 'top 20% cost-per-request vs. your peer type.' Scales with customer count; structurally impossible for latecomers.</a:t>
-            </a:r>
-          </a:p>
-          <a:p>
-            <a:pPr algn="l">
-              <a:spcAft>
-                <a:spcPts val="800"/>
-              </a:spcAft>
-            </a:pPr>
-            <a:r>
-              <a:rPr sz="1700" b="1" i="0">
-                <a:solidFill>
-                  <a:srgbClr val="35C9C9"/>
-                </a:solidFill>
-                <a:latin typeface="Calibri"/>
-              </a:rPr>
-              <a:t>▸  Once this cost view is embedded in pricing &amp; board routines, switching cost spikes.</a:t>
+              <a:t>Non-LLM tool attribution</a:t>
+            </a:r>
+          </a:p>
+        </p:txBody>
+      </p:sp>
+      <p:sp>
+        <p:nvSpPr>
+          <p:cNvPr id="43" name="Rectangle 42"/>
+          <p:cNvSpPr/>
+          <p:nvPr/>
+        </p:nvSpPr>
+        <p:spPr>
+          <a:xfrm>
+            <a:off x="3154680" y="3511296"/>
+            <a:ext cx="1691640" cy="530352"/>
+          </a:xfrm>
+          <a:prstGeom prst="rect">
+            <a:avLst/>
+          </a:prstGeom>
+          <a:solidFill>
+            <a:srgbClr val="121B26"/>
+          </a:solidFill>
+          <a:ln>
+            <a:noFill/>
+          </a:ln>
+          <a:effectLst/>
+        </p:spPr>
+        <p:style>
+          <a:lnRef idx="1">
+            <a:schemeClr val="accent1"/>
+          </a:lnRef>
+          <a:fillRef idx="3">
+            <a:schemeClr val="accent1"/>
+          </a:fillRef>
+          <a:effectRef idx="2">
+            <a:schemeClr val="accent1"/>
+          </a:effectRef>
+          <a:fontRef idx="minor">
+            <a:schemeClr val="lt1"/>
+          </a:fontRef>
+        </p:style>
+        <p:txBody>
+          <a:bodyPr rtlCol="0" anchor="ctr"/>
+          <a:lstStyle/>
+          <a:p>
+            <a:pPr algn="ctr"/>
+          </a:p>
+        </p:txBody>
+      </p:sp>
+      <p:sp>
+        <p:nvSpPr>
+          <p:cNvPr id="44" name="TextBox 43"/>
+          <p:cNvSpPr txBox="1"/>
+          <p:nvPr/>
+        </p:nvSpPr>
+        <p:spPr>
+          <a:xfrm>
+            <a:off x="3154680" y="3511296"/>
+            <a:ext cx="1691640" cy="530352"/>
+          </a:xfrm>
+          <a:prstGeom prst="rect">
+            <a:avLst/>
+          </a:prstGeom>
+          <a:noFill/>
+        </p:spPr>
+        <p:txBody>
+          <a:bodyPr wrap="square" anchor="ctr" lIns="0" rIns="0" tIns="0" bIns="0">
+            <a:spAutoFit/>
+          </a:bodyPr>
+          <a:lstStyle/>
+          <a:p>
+            <a:pPr algn="ctr"/>
+            <a:r>
+              <a:rPr sz="1800" b="0" i="0">
+                <a:solidFill>
+                  <a:srgbClr val="F2C14E"/>
+                </a:solidFill>
+                <a:latin typeface="Calibri"/>
+              </a:rPr>
+              <a:t>~</a:t>
+            </a:r>
+          </a:p>
+        </p:txBody>
+      </p:sp>
+      <p:sp>
+        <p:nvSpPr>
+          <p:cNvPr id="45" name="Rectangle 44"/>
+          <p:cNvSpPr/>
+          <p:nvPr/>
+        </p:nvSpPr>
+        <p:spPr>
+          <a:xfrm>
+            <a:off x="4846320" y="3511296"/>
+            <a:ext cx="1691640" cy="530352"/>
+          </a:xfrm>
+          <a:prstGeom prst="rect">
+            <a:avLst/>
+          </a:prstGeom>
+          <a:solidFill>
+            <a:srgbClr val="121B26"/>
+          </a:solidFill>
+          <a:ln>
+            <a:noFill/>
+          </a:ln>
+          <a:effectLst/>
+        </p:spPr>
+        <p:style>
+          <a:lnRef idx="1">
+            <a:schemeClr val="accent1"/>
+          </a:lnRef>
+          <a:fillRef idx="3">
+            <a:schemeClr val="accent1"/>
+          </a:fillRef>
+          <a:effectRef idx="2">
+            <a:schemeClr val="accent1"/>
+          </a:effectRef>
+          <a:fontRef idx="minor">
+            <a:schemeClr val="lt1"/>
+          </a:fontRef>
+        </p:style>
+        <p:txBody>
+          <a:bodyPr rtlCol="0" anchor="ctr"/>
+          <a:lstStyle/>
+          <a:p>
+            <a:pPr algn="ctr"/>
+          </a:p>
+        </p:txBody>
+      </p:sp>
+      <p:sp>
+        <p:nvSpPr>
+          <p:cNvPr id="46" name="TextBox 45"/>
+          <p:cNvSpPr txBox="1"/>
+          <p:nvPr/>
+        </p:nvSpPr>
+        <p:spPr>
+          <a:xfrm>
+            <a:off x="4846320" y="3511296"/>
+            <a:ext cx="1691640" cy="530352"/>
+          </a:xfrm>
+          <a:prstGeom prst="rect">
+            <a:avLst/>
+          </a:prstGeom>
+          <a:noFill/>
+        </p:spPr>
+        <p:txBody>
+          <a:bodyPr wrap="square" anchor="ctr" lIns="0" rIns="0" tIns="0" bIns="0">
+            <a:spAutoFit/>
+          </a:bodyPr>
+          <a:lstStyle/>
+          <a:p>
+            <a:pPr algn="ctr"/>
+            <a:r>
+              <a:rPr sz="1800" b="0" i="0">
+                <a:solidFill>
+                  <a:srgbClr val="9AA7B4"/>
+                </a:solidFill>
+                <a:latin typeface="Calibri"/>
+              </a:rPr>
+              <a:t>✗</a:t>
+            </a:r>
+          </a:p>
+        </p:txBody>
+      </p:sp>
+      <p:sp>
+        <p:nvSpPr>
+          <p:cNvPr id="47" name="Rectangle 46"/>
+          <p:cNvSpPr/>
+          <p:nvPr/>
+        </p:nvSpPr>
+        <p:spPr>
+          <a:xfrm>
+            <a:off x="6537960" y="3511296"/>
+            <a:ext cx="1691640" cy="530352"/>
+          </a:xfrm>
+          <a:prstGeom prst="rect">
+            <a:avLst/>
+          </a:prstGeom>
+          <a:solidFill>
+            <a:srgbClr val="121B26"/>
+          </a:solidFill>
+          <a:ln>
+            <a:noFill/>
+          </a:ln>
+          <a:effectLst/>
+        </p:spPr>
+        <p:style>
+          <a:lnRef idx="1">
+            <a:schemeClr val="accent1"/>
+          </a:lnRef>
+          <a:fillRef idx="3">
+            <a:schemeClr val="accent1"/>
+          </a:fillRef>
+          <a:effectRef idx="2">
+            <a:schemeClr val="accent1"/>
+          </a:effectRef>
+          <a:fontRef idx="minor">
+            <a:schemeClr val="lt1"/>
+          </a:fontRef>
+        </p:style>
+        <p:txBody>
+          <a:bodyPr rtlCol="0" anchor="ctr"/>
+          <a:lstStyle/>
+          <a:p>
+            <a:pPr algn="ctr"/>
+          </a:p>
+        </p:txBody>
+      </p:sp>
+      <p:sp>
+        <p:nvSpPr>
+          <p:cNvPr id="48" name="TextBox 47"/>
+          <p:cNvSpPr txBox="1"/>
+          <p:nvPr/>
+        </p:nvSpPr>
+        <p:spPr>
+          <a:xfrm>
+            <a:off x="6537960" y="3511296"/>
+            <a:ext cx="1691640" cy="530352"/>
+          </a:xfrm>
+          <a:prstGeom prst="rect">
+            <a:avLst/>
+          </a:prstGeom>
+          <a:noFill/>
+        </p:spPr>
+        <p:txBody>
+          <a:bodyPr wrap="square" anchor="ctr" lIns="0" rIns="0" tIns="0" bIns="0">
+            <a:spAutoFit/>
+          </a:bodyPr>
+          <a:lstStyle/>
+          <a:p>
+            <a:pPr algn="ctr"/>
+            <a:r>
+              <a:rPr sz="1800" b="0" i="0">
+                <a:solidFill>
+                  <a:srgbClr val="9AA7B4"/>
+                </a:solidFill>
+                <a:latin typeface="Calibri"/>
+              </a:rPr>
+              <a:t>✗</a:t>
+            </a:r>
+          </a:p>
+        </p:txBody>
+      </p:sp>
+      <p:sp>
+        <p:nvSpPr>
+          <p:cNvPr id="49" name="Rectangle 48"/>
+          <p:cNvSpPr/>
+          <p:nvPr/>
+        </p:nvSpPr>
+        <p:spPr>
+          <a:xfrm>
+            <a:off x="8229600" y="3511296"/>
+            <a:ext cx="1691640" cy="530352"/>
+          </a:xfrm>
+          <a:prstGeom prst="rect">
+            <a:avLst/>
+          </a:prstGeom>
+          <a:solidFill>
+            <a:srgbClr val="121B26"/>
+          </a:solidFill>
+          <a:ln>
+            <a:noFill/>
+          </a:ln>
+          <a:effectLst/>
+        </p:spPr>
+        <p:style>
+          <a:lnRef idx="1">
+            <a:schemeClr val="accent1"/>
+          </a:lnRef>
+          <a:fillRef idx="3">
+            <a:schemeClr val="accent1"/>
+          </a:fillRef>
+          <a:effectRef idx="2">
+            <a:schemeClr val="accent1"/>
+          </a:effectRef>
+          <a:fontRef idx="minor">
+            <a:schemeClr val="lt1"/>
+          </a:fontRef>
+        </p:style>
+        <p:txBody>
+          <a:bodyPr rtlCol="0" anchor="ctr"/>
+          <a:lstStyle/>
+          <a:p>
+            <a:pPr algn="ctr"/>
+          </a:p>
+        </p:txBody>
+      </p:sp>
+      <p:sp>
+        <p:nvSpPr>
+          <p:cNvPr id="50" name="TextBox 49"/>
+          <p:cNvSpPr txBox="1"/>
+          <p:nvPr/>
+        </p:nvSpPr>
+        <p:spPr>
+          <a:xfrm>
+            <a:off x="8229600" y="3511296"/>
+            <a:ext cx="1691640" cy="530352"/>
+          </a:xfrm>
+          <a:prstGeom prst="rect">
+            <a:avLst/>
+          </a:prstGeom>
+          <a:noFill/>
+        </p:spPr>
+        <p:txBody>
+          <a:bodyPr wrap="square" anchor="ctr" lIns="0" rIns="0" tIns="0" bIns="0">
+            <a:spAutoFit/>
+          </a:bodyPr>
+          <a:lstStyle/>
+          <a:p>
+            <a:pPr algn="ctr"/>
+            <a:r>
+              <a:rPr sz="1800" b="0" i="0">
+                <a:solidFill>
+                  <a:srgbClr val="F2C14E"/>
+                </a:solidFill>
+                <a:latin typeface="Calibri"/>
+              </a:rPr>
+              <a:t>~</a:t>
+            </a:r>
+          </a:p>
+        </p:txBody>
+      </p:sp>
+      <p:sp>
+        <p:nvSpPr>
+          <p:cNvPr id="51" name="Rectangle 50"/>
+          <p:cNvSpPr/>
+          <p:nvPr/>
+        </p:nvSpPr>
+        <p:spPr>
+          <a:xfrm>
+            <a:off x="9921240" y="3511296"/>
+            <a:ext cx="1691640" cy="530352"/>
+          </a:xfrm>
+          <a:prstGeom prst="rect">
+            <a:avLst/>
+          </a:prstGeom>
+          <a:solidFill>
+            <a:srgbClr val="0C272E"/>
+          </a:solidFill>
+          <a:ln>
+            <a:noFill/>
+          </a:ln>
+          <a:effectLst/>
+        </p:spPr>
+        <p:style>
+          <a:lnRef idx="1">
+            <a:schemeClr val="accent1"/>
+          </a:lnRef>
+          <a:fillRef idx="3">
+            <a:schemeClr val="accent1"/>
+          </a:fillRef>
+          <a:effectRef idx="2">
+            <a:schemeClr val="accent1"/>
+          </a:effectRef>
+          <a:fontRef idx="minor">
+            <a:schemeClr val="lt1"/>
+          </a:fontRef>
+        </p:style>
+        <p:txBody>
+          <a:bodyPr rtlCol="0" anchor="ctr"/>
+          <a:lstStyle/>
+          <a:p>
+            <a:pPr algn="ctr"/>
+          </a:p>
+        </p:txBody>
+      </p:sp>
+      <p:sp>
+        <p:nvSpPr>
+          <p:cNvPr id="52" name="TextBox 51"/>
+          <p:cNvSpPr txBox="1"/>
+          <p:nvPr/>
+        </p:nvSpPr>
+        <p:spPr>
+          <a:xfrm>
+            <a:off x="9921240" y="3511296"/>
+            <a:ext cx="1691640" cy="530352"/>
+          </a:xfrm>
+          <a:prstGeom prst="rect">
+            <a:avLst/>
+          </a:prstGeom>
+          <a:noFill/>
+        </p:spPr>
+        <p:txBody>
+          <a:bodyPr wrap="square" anchor="ctr" lIns="0" rIns="0" tIns="0" bIns="0">
+            <a:spAutoFit/>
+          </a:bodyPr>
+          <a:lstStyle/>
+          <a:p>
+            <a:pPr algn="ctr"/>
+            <a:r>
+              <a:rPr sz="2200" b="1" i="0">
+                <a:solidFill>
+                  <a:srgbClr val="FF6B35"/>
+                </a:solidFill>
+                <a:latin typeface="Calibri"/>
+              </a:rPr>
+              <a:t>✓</a:t>
+            </a:r>
+          </a:p>
+        </p:txBody>
+      </p:sp>
+      <p:sp>
+        <p:nvSpPr>
+          <p:cNvPr id="53" name="Rectangle 52"/>
+          <p:cNvSpPr/>
+          <p:nvPr/>
+        </p:nvSpPr>
+        <p:spPr>
+          <a:xfrm>
+            <a:off x="594360" y="4041648"/>
+            <a:ext cx="2560320" cy="530352"/>
+          </a:xfrm>
+          <a:prstGeom prst="rect">
+            <a:avLst/>
+          </a:prstGeom>
+          <a:solidFill>
+            <a:srgbClr val="16212E"/>
+          </a:solidFill>
+          <a:ln>
+            <a:noFill/>
+          </a:ln>
+          <a:effectLst/>
+        </p:spPr>
+        <p:style>
+          <a:lnRef idx="1">
+            <a:schemeClr val="accent1"/>
+          </a:lnRef>
+          <a:fillRef idx="3">
+            <a:schemeClr val="accent1"/>
+          </a:fillRef>
+          <a:effectRef idx="2">
+            <a:schemeClr val="accent1"/>
+          </a:effectRef>
+          <a:fontRef idx="minor">
+            <a:schemeClr val="lt1"/>
+          </a:fontRef>
+        </p:style>
+        <p:txBody>
+          <a:bodyPr rtlCol="0" anchor="ctr"/>
+          <a:lstStyle/>
+          <a:p>
+            <a:pPr algn="ctr"/>
+          </a:p>
+        </p:txBody>
+      </p:sp>
+      <p:sp>
+        <p:nvSpPr>
+          <p:cNvPr id="54" name="TextBox 53"/>
+          <p:cNvSpPr txBox="1"/>
+          <p:nvPr/>
+        </p:nvSpPr>
+        <p:spPr>
+          <a:xfrm>
+            <a:off x="740664" y="4041648"/>
+            <a:ext cx="2377440" cy="530352"/>
+          </a:xfrm>
+          <a:prstGeom prst="rect">
+            <a:avLst/>
+          </a:prstGeom>
+          <a:noFill/>
+        </p:spPr>
+        <p:txBody>
+          <a:bodyPr wrap="square" anchor="ctr" lIns="0" rIns="0" tIns="0" bIns="0">
+            <a:spAutoFit/>
+          </a:bodyPr>
+          <a:lstStyle/>
+          <a:p>
+            <a:pPr algn="l"/>
+            <a:r>
+              <a:rPr sz="1300" b="0" i="0">
+                <a:solidFill>
+                  <a:srgbClr val="E8ECF1"/>
+                </a:solidFill>
+                <a:latin typeface="Calibri"/>
+              </a:rPr>
+              <a:t>Per-customer COGS</a:t>
+            </a:r>
+          </a:p>
+        </p:txBody>
+      </p:sp>
+      <p:sp>
+        <p:nvSpPr>
+          <p:cNvPr id="55" name="Rectangle 54"/>
+          <p:cNvSpPr/>
+          <p:nvPr/>
+        </p:nvSpPr>
+        <p:spPr>
+          <a:xfrm>
+            <a:off x="3154680" y="4041648"/>
+            <a:ext cx="1691640" cy="530352"/>
+          </a:xfrm>
+          <a:prstGeom prst="rect">
+            <a:avLst/>
+          </a:prstGeom>
+          <a:solidFill>
+            <a:srgbClr val="16212E"/>
+          </a:solidFill>
+          <a:ln>
+            <a:noFill/>
+          </a:ln>
+          <a:effectLst/>
+        </p:spPr>
+        <p:style>
+          <a:lnRef idx="1">
+            <a:schemeClr val="accent1"/>
+          </a:lnRef>
+          <a:fillRef idx="3">
+            <a:schemeClr val="accent1"/>
+          </a:fillRef>
+          <a:effectRef idx="2">
+            <a:schemeClr val="accent1"/>
+          </a:effectRef>
+          <a:fontRef idx="minor">
+            <a:schemeClr val="lt1"/>
+          </a:fontRef>
+        </p:style>
+        <p:txBody>
+          <a:bodyPr rtlCol="0" anchor="ctr"/>
+          <a:lstStyle/>
+          <a:p>
+            <a:pPr algn="ctr"/>
+          </a:p>
+        </p:txBody>
+      </p:sp>
+      <p:sp>
+        <p:nvSpPr>
+          <p:cNvPr id="56" name="TextBox 55"/>
+          <p:cNvSpPr txBox="1"/>
+          <p:nvPr/>
+        </p:nvSpPr>
+        <p:spPr>
+          <a:xfrm>
+            <a:off x="3154680" y="4041648"/>
+            <a:ext cx="1691640" cy="530352"/>
+          </a:xfrm>
+          <a:prstGeom prst="rect">
+            <a:avLst/>
+          </a:prstGeom>
+          <a:noFill/>
+        </p:spPr>
+        <p:txBody>
+          <a:bodyPr wrap="square" anchor="ctr" lIns="0" rIns="0" tIns="0" bIns="0">
+            <a:spAutoFit/>
+          </a:bodyPr>
+          <a:lstStyle/>
+          <a:p>
+            <a:pPr algn="ctr"/>
+            <a:r>
+              <a:rPr sz="1800" b="0" i="0">
+                <a:solidFill>
+                  <a:srgbClr val="9AA7B4"/>
+                </a:solidFill>
+                <a:latin typeface="Calibri"/>
+              </a:rPr>
+              <a:t>✗</a:t>
+            </a:r>
+          </a:p>
+        </p:txBody>
+      </p:sp>
+      <p:sp>
+        <p:nvSpPr>
+          <p:cNvPr id="57" name="Rectangle 56"/>
+          <p:cNvSpPr/>
+          <p:nvPr/>
+        </p:nvSpPr>
+        <p:spPr>
+          <a:xfrm>
+            <a:off x="4846320" y="4041648"/>
+            <a:ext cx="1691640" cy="530352"/>
+          </a:xfrm>
+          <a:prstGeom prst="rect">
+            <a:avLst/>
+          </a:prstGeom>
+          <a:solidFill>
+            <a:srgbClr val="16212E"/>
+          </a:solidFill>
+          <a:ln>
+            <a:noFill/>
+          </a:ln>
+          <a:effectLst/>
+        </p:spPr>
+        <p:style>
+          <a:lnRef idx="1">
+            <a:schemeClr val="accent1"/>
+          </a:lnRef>
+          <a:fillRef idx="3">
+            <a:schemeClr val="accent1"/>
+          </a:fillRef>
+          <a:effectRef idx="2">
+            <a:schemeClr val="accent1"/>
+          </a:effectRef>
+          <a:fontRef idx="minor">
+            <a:schemeClr val="lt1"/>
+          </a:fontRef>
+        </p:style>
+        <p:txBody>
+          <a:bodyPr rtlCol="0" anchor="ctr"/>
+          <a:lstStyle/>
+          <a:p>
+            <a:pPr algn="ctr"/>
+          </a:p>
+        </p:txBody>
+      </p:sp>
+      <p:sp>
+        <p:nvSpPr>
+          <p:cNvPr id="58" name="TextBox 57"/>
+          <p:cNvSpPr txBox="1"/>
+          <p:nvPr/>
+        </p:nvSpPr>
+        <p:spPr>
+          <a:xfrm>
+            <a:off x="4846320" y="4041648"/>
+            <a:ext cx="1691640" cy="530352"/>
+          </a:xfrm>
+          <a:prstGeom prst="rect">
+            <a:avLst/>
+          </a:prstGeom>
+          <a:noFill/>
+        </p:spPr>
+        <p:txBody>
+          <a:bodyPr wrap="square" anchor="ctr" lIns="0" rIns="0" tIns="0" bIns="0">
+            <a:spAutoFit/>
+          </a:bodyPr>
+          <a:lstStyle/>
+          <a:p>
+            <a:pPr algn="ctr"/>
+            <a:r>
+              <a:rPr sz="1800" b="0" i="0">
+                <a:solidFill>
+                  <a:srgbClr val="F2C14E"/>
+                </a:solidFill>
+                <a:latin typeface="Calibri"/>
+              </a:rPr>
+              <a:t>~</a:t>
+            </a:r>
+          </a:p>
+        </p:txBody>
+      </p:sp>
+      <p:sp>
+        <p:nvSpPr>
+          <p:cNvPr id="59" name="Rectangle 58"/>
+          <p:cNvSpPr/>
+          <p:nvPr/>
+        </p:nvSpPr>
+        <p:spPr>
+          <a:xfrm>
+            <a:off x="6537960" y="4041648"/>
+            <a:ext cx="1691640" cy="530352"/>
+          </a:xfrm>
+          <a:prstGeom prst="rect">
+            <a:avLst/>
+          </a:prstGeom>
+          <a:solidFill>
+            <a:srgbClr val="16212E"/>
+          </a:solidFill>
+          <a:ln>
+            <a:noFill/>
+          </a:ln>
+          <a:effectLst/>
+        </p:spPr>
+        <p:style>
+          <a:lnRef idx="1">
+            <a:schemeClr val="accent1"/>
+          </a:lnRef>
+          <a:fillRef idx="3">
+            <a:schemeClr val="accent1"/>
+          </a:fillRef>
+          <a:effectRef idx="2">
+            <a:schemeClr val="accent1"/>
+          </a:effectRef>
+          <a:fontRef idx="minor">
+            <a:schemeClr val="lt1"/>
+          </a:fontRef>
+        </p:style>
+        <p:txBody>
+          <a:bodyPr rtlCol="0" anchor="ctr"/>
+          <a:lstStyle/>
+          <a:p>
+            <a:pPr algn="ctr"/>
+          </a:p>
+        </p:txBody>
+      </p:sp>
+      <p:sp>
+        <p:nvSpPr>
+          <p:cNvPr id="60" name="TextBox 59"/>
+          <p:cNvSpPr txBox="1"/>
+          <p:nvPr/>
+        </p:nvSpPr>
+        <p:spPr>
+          <a:xfrm>
+            <a:off x="6537960" y="4041648"/>
+            <a:ext cx="1691640" cy="530352"/>
+          </a:xfrm>
+          <a:prstGeom prst="rect">
+            <a:avLst/>
+          </a:prstGeom>
+          <a:noFill/>
+        </p:spPr>
+        <p:txBody>
+          <a:bodyPr wrap="square" anchor="ctr" lIns="0" rIns="0" tIns="0" bIns="0">
+            <a:spAutoFit/>
+          </a:bodyPr>
+          <a:lstStyle/>
+          <a:p>
+            <a:pPr algn="ctr"/>
+            <a:r>
+              <a:rPr sz="1800" b="0" i="0">
+                <a:solidFill>
+                  <a:srgbClr val="9AA7B4"/>
+                </a:solidFill>
+                <a:latin typeface="Calibri"/>
+              </a:rPr>
+              <a:t>✗</a:t>
+            </a:r>
+          </a:p>
+        </p:txBody>
+      </p:sp>
+      <p:sp>
+        <p:nvSpPr>
+          <p:cNvPr id="61" name="Rectangle 60"/>
+          <p:cNvSpPr/>
+          <p:nvPr/>
+        </p:nvSpPr>
+        <p:spPr>
+          <a:xfrm>
+            <a:off x="8229600" y="4041648"/>
+            <a:ext cx="1691640" cy="530352"/>
+          </a:xfrm>
+          <a:prstGeom prst="rect">
+            <a:avLst/>
+          </a:prstGeom>
+          <a:solidFill>
+            <a:srgbClr val="16212E"/>
+          </a:solidFill>
+          <a:ln>
+            <a:noFill/>
+          </a:ln>
+          <a:effectLst/>
+        </p:spPr>
+        <p:style>
+          <a:lnRef idx="1">
+            <a:schemeClr val="accent1"/>
+          </a:lnRef>
+          <a:fillRef idx="3">
+            <a:schemeClr val="accent1"/>
+          </a:fillRef>
+          <a:effectRef idx="2">
+            <a:schemeClr val="accent1"/>
+          </a:effectRef>
+          <a:fontRef idx="minor">
+            <a:schemeClr val="lt1"/>
+          </a:fontRef>
+        </p:style>
+        <p:txBody>
+          <a:bodyPr rtlCol="0" anchor="ctr"/>
+          <a:lstStyle/>
+          <a:p>
+            <a:pPr algn="ctr"/>
+          </a:p>
+        </p:txBody>
+      </p:sp>
+      <p:sp>
+        <p:nvSpPr>
+          <p:cNvPr id="62" name="TextBox 61"/>
+          <p:cNvSpPr txBox="1"/>
+          <p:nvPr/>
+        </p:nvSpPr>
+        <p:spPr>
+          <a:xfrm>
+            <a:off x="8229600" y="4041648"/>
+            <a:ext cx="1691640" cy="530352"/>
+          </a:xfrm>
+          <a:prstGeom prst="rect">
+            <a:avLst/>
+          </a:prstGeom>
+          <a:noFill/>
+        </p:spPr>
+        <p:txBody>
+          <a:bodyPr wrap="square" anchor="ctr" lIns="0" rIns="0" tIns="0" bIns="0">
+            <a:spAutoFit/>
+          </a:bodyPr>
+          <a:lstStyle/>
+          <a:p>
+            <a:pPr algn="ctr"/>
+            <a:r>
+              <a:rPr sz="1800" b="0" i="0">
+                <a:solidFill>
+                  <a:srgbClr val="F2C14E"/>
+                </a:solidFill>
+                <a:latin typeface="Calibri"/>
+              </a:rPr>
+              <a:t>~</a:t>
+            </a:r>
+          </a:p>
+        </p:txBody>
+      </p:sp>
+      <p:sp>
+        <p:nvSpPr>
+          <p:cNvPr id="63" name="Rectangle 62"/>
+          <p:cNvSpPr/>
+          <p:nvPr/>
+        </p:nvSpPr>
+        <p:spPr>
+          <a:xfrm>
+            <a:off x="9921240" y="4041648"/>
+            <a:ext cx="1691640" cy="530352"/>
+          </a:xfrm>
+          <a:prstGeom prst="rect">
+            <a:avLst/>
+          </a:prstGeom>
+          <a:solidFill>
+            <a:srgbClr val="0C272E"/>
+          </a:solidFill>
+          <a:ln>
+            <a:noFill/>
+          </a:ln>
+          <a:effectLst/>
+        </p:spPr>
+        <p:style>
+          <a:lnRef idx="1">
+            <a:schemeClr val="accent1"/>
+          </a:lnRef>
+          <a:fillRef idx="3">
+            <a:schemeClr val="accent1"/>
+          </a:fillRef>
+          <a:effectRef idx="2">
+            <a:schemeClr val="accent1"/>
+          </a:effectRef>
+          <a:fontRef idx="minor">
+            <a:schemeClr val="lt1"/>
+          </a:fontRef>
+        </p:style>
+        <p:txBody>
+          <a:bodyPr rtlCol="0" anchor="ctr"/>
+          <a:lstStyle/>
+          <a:p>
+            <a:pPr algn="ctr"/>
+          </a:p>
+        </p:txBody>
+      </p:sp>
+      <p:sp>
+        <p:nvSpPr>
+          <p:cNvPr id="64" name="TextBox 63"/>
+          <p:cNvSpPr txBox="1"/>
+          <p:nvPr/>
+        </p:nvSpPr>
+        <p:spPr>
+          <a:xfrm>
+            <a:off x="9921240" y="4041648"/>
+            <a:ext cx="1691640" cy="530352"/>
+          </a:xfrm>
+          <a:prstGeom prst="rect">
+            <a:avLst/>
+          </a:prstGeom>
+          <a:noFill/>
+        </p:spPr>
+        <p:txBody>
+          <a:bodyPr wrap="square" anchor="ctr" lIns="0" rIns="0" tIns="0" bIns="0">
+            <a:spAutoFit/>
+          </a:bodyPr>
+          <a:lstStyle/>
+          <a:p>
+            <a:pPr algn="ctr"/>
+            <a:r>
+              <a:rPr sz="2200" b="1" i="0">
+                <a:solidFill>
+                  <a:srgbClr val="FF6B35"/>
+                </a:solidFill>
+                <a:latin typeface="Calibri"/>
+              </a:rPr>
+              <a:t>✓</a:t>
+            </a:r>
+          </a:p>
+        </p:txBody>
+      </p:sp>
+      <p:sp>
+        <p:nvSpPr>
+          <p:cNvPr id="65" name="Rectangle 64"/>
+          <p:cNvSpPr/>
+          <p:nvPr/>
+        </p:nvSpPr>
+        <p:spPr>
+          <a:xfrm>
+            <a:off x="594360" y="4572000"/>
+            <a:ext cx="2560320" cy="530352"/>
+          </a:xfrm>
+          <a:prstGeom prst="rect">
+            <a:avLst/>
+          </a:prstGeom>
+          <a:solidFill>
+            <a:srgbClr val="121B26"/>
+          </a:solidFill>
+          <a:ln>
+            <a:noFill/>
+          </a:ln>
+          <a:effectLst/>
+        </p:spPr>
+        <p:style>
+          <a:lnRef idx="1">
+            <a:schemeClr val="accent1"/>
+          </a:lnRef>
+          <a:fillRef idx="3">
+            <a:schemeClr val="accent1"/>
+          </a:fillRef>
+          <a:effectRef idx="2">
+            <a:schemeClr val="accent1"/>
+          </a:effectRef>
+          <a:fontRef idx="minor">
+            <a:schemeClr val="lt1"/>
+          </a:fontRef>
+        </p:style>
+        <p:txBody>
+          <a:bodyPr rtlCol="0" anchor="ctr"/>
+          <a:lstStyle/>
+          <a:p>
+            <a:pPr algn="ctr"/>
+          </a:p>
+        </p:txBody>
+      </p:sp>
+      <p:sp>
+        <p:nvSpPr>
+          <p:cNvPr id="66" name="TextBox 65"/>
+          <p:cNvSpPr txBox="1"/>
+          <p:nvPr/>
+        </p:nvSpPr>
+        <p:spPr>
+          <a:xfrm>
+            <a:off x="740664" y="4572000"/>
+            <a:ext cx="2377440" cy="530352"/>
+          </a:xfrm>
+          <a:prstGeom prst="rect">
+            <a:avLst/>
+          </a:prstGeom>
+          <a:noFill/>
+        </p:spPr>
+        <p:txBody>
+          <a:bodyPr wrap="square" anchor="ctr" lIns="0" rIns="0" tIns="0" bIns="0">
+            <a:spAutoFit/>
+          </a:bodyPr>
+          <a:lstStyle/>
+          <a:p>
+            <a:pPr algn="l"/>
+            <a:r>
+              <a:rPr sz="1300" b="0" i="0">
+                <a:solidFill>
+                  <a:srgbClr val="E8ECF1"/>
+                </a:solidFill>
+                <a:latin typeface="Calibri"/>
+              </a:rPr>
+              <a:t>Runaway loop detection</a:t>
+            </a:r>
+          </a:p>
+        </p:txBody>
+      </p:sp>
+      <p:sp>
+        <p:nvSpPr>
+          <p:cNvPr id="67" name="Rectangle 66"/>
+          <p:cNvSpPr/>
+          <p:nvPr/>
+        </p:nvSpPr>
+        <p:spPr>
+          <a:xfrm>
+            <a:off x="3154680" y="4572000"/>
+            <a:ext cx="1691640" cy="530352"/>
+          </a:xfrm>
+          <a:prstGeom prst="rect">
+            <a:avLst/>
+          </a:prstGeom>
+          <a:solidFill>
+            <a:srgbClr val="121B26"/>
+          </a:solidFill>
+          <a:ln>
+            <a:noFill/>
+          </a:ln>
+          <a:effectLst/>
+        </p:spPr>
+        <p:style>
+          <a:lnRef idx="1">
+            <a:schemeClr val="accent1"/>
+          </a:lnRef>
+          <a:fillRef idx="3">
+            <a:schemeClr val="accent1"/>
+          </a:fillRef>
+          <a:effectRef idx="2">
+            <a:schemeClr val="accent1"/>
+          </a:effectRef>
+          <a:fontRef idx="minor">
+            <a:schemeClr val="lt1"/>
+          </a:fontRef>
+        </p:style>
+        <p:txBody>
+          <a:bodyPr rtlCol="0" anchor="ctr"/>
+          <a:lstStyle/>
+          <a:p>
+            <a:pPr algn="ctr"/>
+          </a:p>
+        </p:txBody>
+      </p:sp>
+      <p:sp>
+        <p:nvSpPr>
+          <p:cNvPr id="68" name="TextBox 67"/>
+          <p:cNvSpPr txBox="1"/>
+          <p:nvPr/>
+        </p:nvSpPr>
+        <p:spPr>
+          <a:xfrm>
+            <a:off x="3154680" y="4572000"/>
+            <a:ext cx="1691640" cy="530352"/>
+          </a:xfrm>
+          <a:prstGeom prst="rect">
+            <a:avLst/>
+          </a:prstGeom>
+          <a:noFill/>
+        </p:spPr>
+        <p:txBody>
+          <a:bodyPr wrap="square" anchor="ctr" lIns="0" rIns="0" tIns="0" bIns="0">
+            <a:spAutoFit/>
+          </a:bodyPr>
+          <a:lstStyle/>
+          <a:p>
+            <a:pPr algn="ctr"/>
+            <a:r>
+              <a:rPr sz="1800" b="0" i="0">
+                <a:solidFill>
+                  <a:srgbClr val="9AA7B4"/>
+                </a:solidFill>
+                <a:latin typeface="Calibri"/>
+              </a:rPr>
+              <a:t>✗</a:t>
+            </a:r>
+          </a:p>
+        </p:txBody>
+      </p:sp>
+      <p:sp>
+        <p:nvSpPr>
+          <p:cNvPr id="69" name="Rectangle 68"/>
+          <p:cNvSpPr/>
+          <p:nvPr/>
+        </p:nvSpPr>
+        <p:spPr>
+          <a:xfrm>
+            <a:off x="4846320" y="4572000"/>
+            <a:ext cx="1691640" cy="530352"/>
+          </a:xfrm>
+          <a:prstGeom prst="rect">
+            <a:avLst/>
+          </a:prstGeom>
+          <a:solidFill>
+            <a:srgbClr val="121B26"/>
+          </a:solidFill>
+          <a:ln>
+            <a:noFill/>
+          </a:ln>
+          <a:effectLst/>
+        </p:spPr>
+        <p:style>
+          <a:lnRef idx="1">
+            <a:schemeClr val="accent1"/>
+          </a:lnRef>
+          <a:fillRef idx="3">
+            <a:schemeClr val="accent1"/>
+          </a:fillRef>
+          <a:effectRef idx="2">
+            <a:schemeClr val="accent1"/>
+          </a:effectRef>
+          <a:fontRef idx="minor">
+            <a:schemeClr val="lt1"/>
+          </a:fontRef>
+        </p:style>
+        <p:txBody>
+          <a:bodyPr rtlCol="0" anchor="ctr"/>
+          <a:lstStyle/>
+          <a:p>
+            <a:pPr algn="ctr"/>
+          </a:p>
+        </p:txBody>
+      </p:sp>
+      <p:sp>
+        <p:nvSpPr>
+          <p:cNvPr id="70" name="TextBox 69"/>
+          <p:cNvSpPr txBox="1"/>
+          <p:nvPr/>
+        </p:nvSpPr>
+        <p:spPr>
+          <a:xfrm>
+            <a:off x="4846320" y="4572000"/>
+            <a:ext cx="1691640" cy="530352"/>
+          </a:xfrm>
+          <a:prstGeom prst="rect">
+            <a:avLst/>
+          </a:prstGeom>
+          <a:noFill/>
+        </p:spPr>
+        <p:txBody>
+          <a:bodyPr wrap="square" anchor="ctr" lIns="0" rIns="0" tIns="0" bIns="0">
+            <a:spAutoFit/>
+          </a:bodyPr>
+          <a:lstStyle/>
+          <a:p>
+            <a:pPr algn="ctr"/>
+            <a:r>
+              <a:rPr sz="1800" b="0" i="0">
+                <a:solidFill>
+                  <a:srgbClr val="9AA7B4"/>
+                </a:solidFill>
+                <a:latin typeface="Calibri"/>
+              </a:rPr>
+              <a:t>✗</a:t>
+            </a:r>
+          </a:p>
+        </p:txBody>
+      </p:sp>
+      <p:sp>
+        <p:nvSpPr>
+          <p:cNvPr id="71" name="Rectangle 70"/>
+          <p:cNvSpPr/>
+          <p:nvPr/>
+        </p:nvSpPr>
+        <p:spPr>
+          <a:xfrm>
+            <a:off x="6537960" y="4572000"/>
+            <a:ext cx="1691640" cy="530352"/>
+          </a:xfrm>
+          <a:prstGeom prst="rect">
+            <a:avLst/>
+          </a:prstGeom>
+          <a:solidFill>
+            <a:srgbClr val="121B26"/>
+          </a:solidFill>
+          <a:ln>
+            <a:noFill/>
+          </a:ln>
+          <a:effectLst/>
+        </p:spPr>
+        <p:style>
+          <a:lnRef idx="1">
+            <a:schemeClr val="accent1"/>
+          </a:lnRef>
+          <a:fillRef idx="3">
+            <a:schemeClr val="accent1"/>
+          </a:fillRef>
+          <a:effectRef idx="2">
+            <a:schemeClr val="accent1"/>
+          </a:effectRef>
+          <a:fontRef idx="minor">
+            <a:schemeClr val="lt1"/>
+          </a:fontRef>
+        </p:style>
+        <p:txBody>
+          <a:bodyPr rtlCol="0" anchor="ctr"/>
+          <a:lstStyle/>
+          <a:p>
+            <a:pPr algn="ctr"/>
+          </a:p>
+        </p:txBody>
+      </p:sp>
+      <p:sp>
+        <p:nvSpPr>
+          <p:cNvPr id="72" name="TextBox 71"/>
+          <p:cNvSpPr txBox="1"/>
+          <p:nvPr/>
+        </p:nvSpPr>
+        <p:spPr>
+          <a:xfrm>
+            <a:off x="6537960" y="4572000"/>
+            <a:ext cx="1691640" cy="530352"/>
+          </a:xfrm>
+          <a:prstGeom prst="rect">
+            <a:avLst/>
+          </a:prstGeom>
+          <a:noFill/>
+        </p:spPr>
+        <p:txBody>
+          <a:bodyPr wrap="square" anchor="ctr" lIns="0" rIns="0" tIns="0" bIns="0">
+            <a:spAutoFit/>
+          </a:bodyPr>
+          <a:lstStyle/>
+          <a:p>
+            <a:pPr algn="ctr"/>
+            <a:r>
+              <a:rPr sz="1800" b="0" i="0">
+                <a:solidFill>
+                  <a:srgbClr val="9AA7B4"/>
+                </a:solidFill>
+                <a:latin typeface="Calibri"/>
+              </a:rPr>
+              <a:t>✗</a:t>
+            </a:r>
+          </a:p>
+        </p:txBody>
+      </p:sp>
+      <p:sp>
+        <p:nvSpPr>
+          <p:cNvPr id="73" name="Rectangle 72"/>
+          <p:cNvSpPr/>
+          <p:nvPr/>
+        </p:nvSpPr>
+        <p:spPr>
+          <a:xfrm>
+            <a:off x="8229600" y="4572000"/>
+            <a:ext cx="1691640" cy="530352"/>
+          </a:xfrm>
+          <a:prstGeom prst="rect">
+            <a:avLst/>
+          </a:prstGeom>
+          <a:solidFill>
+            <a:srgbClr val="121B26"/>
+          </a:solidFill>
+          <a:ln>
+            <a:noFill/>
+          </a:ln>
+          <a:effectLst/>
+        </p:spPr>
+        <p:style>
+          <a:lnRef idx="1">
+            <a:schemeClr val="accent1"/>
+          </a:lnRef>
+          <a:fillRef idx="3">
+            <a:schemeClr val="accent1"/>
+          </a:fillRef>
+          <a:effectRef idx="2">
+            <a:schemeClr val="accent1"/>
+          </a:effectRef>
+          <a:fontRef idx="minor">
+            <a:schemeClr val="lt1"/>
+          </a:fontRef>
+        </p:style>
+        <p:txBody>
+          <a:bodyPr rtlCol="0" anchor="ctr"/>
+          <a:lstStyle/>
+          <a:p>
+            <a:pPr algn="ctr"/>
+          </a:p>
+        </p:txBody>
+      </p:sp>
+      <p:sp>
+        <p:nvSpPr>
+          <p:cNvPr id="74" name="TextBox 73"/>
+          <p:cNvSpPr txBox="1"/>
+          <p:nvPr/>
+        </p:nvSpPr>
+        <p:spPr>
+          <a:xfrm>
+            <a:off x="8229600" y="4572000"/>
+            <a:ext cx="1691640" cy="530352"/>
+          </a:xfrm>
+          <a:prstGeom prst="rect">
+            <a:avLst/>
+          </a:prstGeom>
+          <a:noFill/>
+        </p:spPr>
+        <p:txBody>
+          <a:bodyPr wrap="square" anchor="ctr" lIns="0" rIns="0" tIns="0" bIns="0">
+            <a:spAutoFit/>
+          </a:bodyPr>
+          <a:lstStyle/>
+          <a:p>
+            <a:pPr algn="ctr"/>
+            <a:r>
+              <a:rPr sz="1800" b="0" i="0">
+                <a:solidFill>
+                  <a:srgbClr val="9AA7B4"/>
+                </a:solidFill>
+                <a:latin typeface="Calibri"/>
+              </a:rPr>
+              <a:t>✗</a:t>
+            </a:r>
+          </a:p>
+        </p:txBody>
+      </p:sp>
+      <p:sp>
+        <p:nvSpPr>
+          <p:cNvPr id="75" name="Rectangle 74"/>
+          <p:cNvSpPr/>
+          <p:nvPr/>
+        </p:nvSpPr>
+        <p:spPr>
+          <a:xfrm>
+            <a:off x="9921240" y="4572000"/>
+            <a:ext cx="1691640" cy="530352"/>
+          </a:xfrm>
+          <a:prstGeom prst="rect">
+            <a:avLst/>
+          </a:prstGeom>
+          <a:solidFill>
+            <a:srgbClr val="0C272E"/>
+          </a:solidFill>
+          <a:ln>
+            <a:noFill/>
+          </a:ln>
+          <a:effectLst/>
+        </p:spPr>
+        <p:style>
+          <a:lnRef idx="1">
+            <a:schemeClr val="accent1"/>
+          </a:lnRef>
+          <a:fillRef idx="3">
+            <a:schemeClr val="accent1"/>
+          </a:fillRef>
+          <a:effectRef idx="2">
+            <a:schemeClr val="accent1"/>
+          </a:effectRef>
+          <a:fontRef idx="minor">
+            <a:schemeClr val="lt1"/>
+          </a:fontRef>
+        </p:style>
+        <p:txBody>
+          <a:bodyPr rtlCol="0" anchor="ctr"/>
+          <a:lstStyle/>
+          <a:p>
+            <a:pPr algn="ctr"/>
+          </a:p>
+        </p:txBody>
+      </p:sp>
+      <p:sp>
+        <p:nvSpPr>
+          <p:cNvPr id="76" name="TextBox 75"/>
+          <p:cNvSpPr txBox="1"/>
+          <p:nvPr/>
+        </p:nvSpPr>
+        <p:spPr>
+          <a:xfrm>
+            <a:off x="9921240" y="4572000"/>
+            <a:ext cx="1691640" cy="530352"/>
+          </a:xfrm>
+          <a:prstGeom prst="rect">
+            <a:avLst/>
+          </a:prstGeom>
+          <a:noFill/>
+        </p:spPr>
+        <p:txBody>
+          <a:bodyPr wrap="square" anchor="ctr" lIns="0" rIns="0" tIns="0" bIns="0">
+            <a:spAutoFit/>
+          </a:bodyPr>
+          <a:lstStyle/>
+          <a:p>
+            <a:pPr algn="ctr"/>
+            <a:r>
+              <a:rPr sz="2200" b="1" i="0">
+                <a:solidFill>
+                  <a:srgbClr val="FF6B35"/>
+                </a:solidFill>
+                <a:latin typeface="Calibri"/>
+              </a:rPr>
+              <a:t>✓</a:t>
+            </a:r>
+          </a:p>
+        </p:txBody>
+      </p:sp>
+      <p:sp>
+        <p:nvSpPr>
+          <p:cNvPr id="77" name="TextBox 76"/>
+          <p:cNvSpPr txBox="1"/>
+          <p:nvPr/>
+        </p:nvSpPr>
+        <p:spPr>
+          <a:xfrm>
+            <a:off x="594360" y="5193792"/>
+            <a:ext cx="10972800" cy="274320"/>
+          </a:xfrm>
+          <a:prstGeom prst="rect">
+            <a:avLst/>
+          </a:prstGeom>
+          <a:noFill/>
+        </p:spPr>
+        <p:txBody>
+          <a:bodyPr wrap="square" lIns="0" rIns="0" tIns="0" bIns="0">
+            <a:spAutoFit/>
+          </a:bodyPr>
+          <a:lstStyle/>
+          <a:p>
+            <a:pPr algn="l"/>
+            <a:r>
+              <a:rPr sz="900" b="0" i="0">
+                <a:solidFill>
+                  <a:srgbClr val="9AA7B4"/>
+                </a:solidFill>
+                <a:latin typeface="Calibri"/>
+              </a:rPr>
+              <a:t>❂ SatGate = pre-launch  ·  ~ = partial / claimed  ·  Langfuse = Langfuse/Helicone  ·  CloudZero = CloudZero/Vantage  ·  source: public docs 2026-07</a:t>
             </a:r>
           </a:p>
         </p:txBody>
@@ -6086,7 +8898,7 @@
                 </a:solidFill>
                 <a:latin typeface="Calibri"/>
               </a:rPr>
-              <a:t>BUSINESS MODEL · PRICING</a:t>
+              <a:t>MOAT</a:t>
             </a:r>
           </a:p>
         </p:txBody>
@@ -6156,7 +8968,7 @@
                 </a:solidFill>
                 <a:latin typeface="Calibri"/>
               </a:rPr>
-              <a:t>A company that sells cost does not earn in proportion to the customer's cost.</a:t>
+              <a:t>What gets copied is features. What can't be caught up is data.</a:t>
             </a:r>
           </a:p>
         </p:txBody>
@@ -6189,13 +9001,13 @@
               </a:spcAft>
             </a:pPr>
             <a:r>
-              <a:rPr sz="1700" b="1" i="0">
-                <a:solidFill>
-                  <a:srgbClr val="E8ECF1"/>
-                </a:solidFill>
-                <a:latin typeface="Calibri"/>
-              </a:rPr>
-              <a:t>▸  Spend-proportional pricing ✗ (conflicts with the savings incentive). Price on per-agent (# of monitored agents) → incentives aligned.</a:t>
+              <a:rPr sz="1700" b="0" i="0">
+                <a:solidFill>
+                  <a:srgbClr val="9AA7B4"/>
+                </a:solidFill>
+                <a:latin typeface="Calibri"/>
+              </a:rPr>
+              <a:t>▸  Caching, routing, hard-limits = replicable in 6 months. Not a moat.</a:t>
             </a:r>
           </a:p>
           <a:p>
@@ -6205,13 +9017,45 @@
               </a:spcAft>
             </a:pPr>
             <a:r>
+              <a:rPr sz="1700" b="1" i="0">
+                <a:solidFill>
+                  <a:srgbClr val="E8ECF1"/>
+                </a:solidFill>
+                <a:latin typeface="Calibri"/>
+              </a:rPr>
+              <a:t>▸  Moat = things that get stronger as customer data accumulates:</a:t>
+            </a:r>
+          </a:p>
+          <a:p>
+            <a:pPr lvl="1" algn="l">
+              <a:spcAft>
+                <a:spcPts val="800"/>
+              </a:spcAft>
+            </a:pPr>
+            <a:r>
               <a:rPr sz="1700" b="0" i="0">
                 <a:solidFill>
                   <a:srgbClr val="E8ECF1"/>
                 </a:solidFill>
                 <a:latin typeface="Calibri"/>
               </a:rPr>
-              <a:t>▸  3 tiers: Free (monitoring/blocking = commodity) → Growth ~$18K/yr (automated COGS report = paid entry) → Enterprise ~$60K/yr (audit-grade + in-path blocking). Blended ACV ~$30K.</a:t>
+              <a:t>     –  1. Unit-economics accuracy gap — more traffic → sharper runaway detection &amp; cost simulation. Followers start from zero data.</a:t>
+            </a:r>
+          </a:p>
+          <a:p>
+            <a:pPr lvl="1" algn="l">
+              <a:spcAft>
+                <a:spcPts val="800"/>
+              </a:spcAft>
+            </a:pPr>
+            <a:r>
+              <a:rPr sz="1700" b="0" i="0">
+                <a:solidFill>
+                  <a:srgbClr val="E8ECF1"/>
+                </a:solidFill>
+                <a:latin typeface="Calibri"/>
+              </a:rPr>
+              <a:t>     –  2. Peer benchmark (lagging) — 'top 20% cost-per-request vs. your peer type.' Scales with customer count; structurally impossible for latecomers.</a:t>
             </a:r>
           </a:p>
           <a:p>
@@ -6221,61 +9065,13 @@
               </a:spcAft>
             </a:pPr>
             <a:r>
-              <a:rPr sz="1700" b="0" i="0">
-                <a:solidFill>
-                  <a:srgbClr val="9AA7B4"/>
-                </a:solidFill>
-                <a:latin typeface="Calibri"/>
-              </a:rPr>
-              <a:t>▸  Anchored in comps: LLM observability $5–25K (Langfuse/Helicone/Portkey) &lt; us $30K &lt; cloud FinOps $30–130K (CloudZero/Cloudability). Precedent for per-unit pricing: Agentforce, Datadog per-host.</a:t>
-            </a:r>
-          </a:p>
-          <a:p>
-            <a:pPr algn="l">
-              <a:spcAft>
-                <a:spcPts val="800"/>
-              </a:spcAft>
-            </a:pPr>
-            <a:r>
               <a:rPr sz="1700" b="1" i="0">
                 <a:solidFill>
                   <a:srgbClr val="35C9C9"/>
                 </a:solidFill>
                 <a:latin typeface="Calibri"/>
               </a:rPr>
-              <a:t>▸  Expansion = agents 20 → 40 → 80 grows revenue = net-negative churn.</a:t>
-            </a:r>
-          </a:p>
-          <a:p>
-            <a:pPr algn="l">
-              <a:spcAft>
-                <a:spcPts val="800"/>
-              </a:spcAft>
-            </a:pPr>
-            <a:r>
-              <a:rPr sz="1700" b="1" i="0">
-                <a:solidFill>
-                  <a:srgbClr val="E8ECF1"/>
-                </a:solidFill>
-                <a:latin typeface="Calibri"/>
-              </a:rPr>
-              <a:t>▸  Slogan: "Sell the ledger before you sell the breaker."</a:t>
-            </a:r>
-          </a:p>
-          <a:p>
-            <a:pPr algn="l">
-              <a:spcAft>
-                <a:spcPts val="800"/>
-              </a:spcAft>
-            </a:pPr>
-            <a:r>
-              <a:rPr sz="1700" b="0" i="0">
-                <a:solidFill>
-                  <a:srgbClr val="F2C14E"/>
-                </a:solidFill>
-                <a:latin typeface="Calibri"/>
-              </a:rPr>
-              <a:t>▸  ⚠  Price figures are hypotheses to validate in interviews.</a:t>
+              <a:t>▸  Once this cost view is embedded in pricing &amp; board routines, switching cost spikes.</a:t>
             </a:r>
           </a:p>
         </p:txBody>
@@ -6379,7 +9175,7 @@
                 </a:solidFill>
                 <a:latin typeface="Calibri"/>
               </a:rPr>
-              <a:t>GO-TO-MARKET</a:t>
+              <a:t>BUSINESS MODEL · PRICING</a:t>
             </a:r>
           </a:p>
         </p:txBody>
@@ -6449,7 +9245,7 @@
                 </a:solidFill>
                 <a:latin typeface="Calibri"/>
               </a:rPr>
-              <a:t>The champion bites for free; the CTO opens the wallet for COGS.</a:t>
+              <a:t>A company that sells cost does not earn in proportion to the customer's cost.</a:t>
             </a:r>
           </a:p>
         </p:txBody>
@@ -6482,13 +9278,13 @@
               </a:spcAft>
             </a:pPr>
             <a:r>
-              <a:rPr sz="1700" b="0" i="0">
+              <a:rPr sz="1700" b="1" i="0">
                 <a:solidFill>
                   <a:srgbClr val="E8ECF1"/>
                 </a:solidFill>
                 <a:latin typeface="Calibri"/>
               </a:rPr>
-              <a:t>▸  Landing: free Cost Autopsy report (off-path) → AI lead adopts bottom-up.</a:t>
+              <a:t>▸  Spend-proportional pricing ✗ (conflicts with the savings incentive). Price on monitored agents — not API calls, not spend.</a:t>
             </a:r>
           </a:p>
           <a:p>
@@ -6500,11 +9296,11 @@
             <a:r>
               <a:rPr sz="1700" b="0" i="0">
                 <a:solidFill>
-                  <a:srgbClr val="E8ECF1"/>
-                </a:solidFill>
-                <a:latin typeface="Calibri"/>
-              </a:rPr>
-              <a:t>▸  Conversion: at an incident or credit burn-out, the champion pitches the CTO paid → land with COGS &amp; margin reports.</a:t>
+                  <a:srgbClr val="35C9C9"/>
+                </a:solidFill>
+                <a:latin typeface="Calibri"/>
+              </a:rPr>
+              <a:t>▸  1 monitored agent = 1 distinct AI feature pipeline deployed in production (e.g., 'search-agent', 'summarizer', 'onboarding-bot'). Analogous to Datadog's per-host or APM per-service.</a:t>
             </a:r>
           </a:p>
           <a:p>
@@ -6514,13 +9310,13 @@
               </a:spcAft>
             </a:pPr>
             <a:r>
-              <a:rPr sz="1700" b="1" i="0">
-                <a:solidFill>
-                  <a:srgbClr val="35C9C9"/>
-                </a:solidFill>
-                <a:latin typeface="Calibri"/>
-              </a:rPr>
-              <a:t>▸  Market order: Korea (free design partners / validation) → US mid-market (paid).</a:t>
+              <a:rPr sz="1700" b="0" i="0">
+                <a:solidFill>
+                  <a:srgbClr val="E8ECF1"/>
+                </a:solidFill>
+                <a:latin typeface="Calibri"/>
+              </a:rPr>
+              <a:t>▸  3 tiers: Free → Growth ~$18K/yr (automated COGS report) → Enterprise ~$60K/yr (audit-grade + in-path blocking). Blended ACV ~$30K.</a:t>
             </a:r>
           </a:p>
           <a:p>
@@ -6532,11 +9328,43 @@
             <a:r>
               <a:rPr sz="1700" b="0" i="0">
                 <a:solidFill>
-                  <a:srgbClr val="E8ECF1"/>
-                </a:solidFill>
-                <a:latin typeface="Calibri"/>
-              </a:rPr>
-              <a:t>▸  Blocker pre-empt: to IT/legal — 'metadata only + cross-vendor independent audit.'</a:t>
+                  <a:srgbClr val="9AA7B4"/>
+                </a:solidFill>
+                <a:latin typeface="Calibri"/>
+              </a:rPr>
+              <a:t>▸  Anchored in comps: LLM observability $5–25K &lt; us $30K &lt; cloud FinOps $30–130K. Precedents: Agentforce per-agent, Datadog per-host.</a:t>
+            </a:r>
+          </a:p>
+          <a:p>
+            <a:pPr algn="l">
+              <a:spcAft>
+                <a:spcPts val="800"/>
+              </a:spcAft>
+            </a:pPr>
+            <a:r>
+              <a:rPr sz="1700" b="1" i="0">
+                <a:solidFill>
+                  <a:srgbClr val="35C9C9"/>
+                </a:solidFill>
+                <a:latin typeface="Calibri"/>
+              </a:rPr>
+              <a:t>▸  Expansion = as the customer ships more AI features, agent count grows → net-negative churn.</a:t>
+            </a:r>
+          </a:p>
+          <a:p>
+            <a:pPr algn="l">
+              <a:spcAft>
+                <a:spcPts val="800"/>
+              </a:spcAft>
+            </a:pPr>
+            <a:r>
+              <a:rPr sz="1700" b="0" i="0">
+                <a:solidFill>
+                  <a:srgbClr val="F2C14E"/>
+                </a:solidFill>
+                <a:latin typeface="Calibri"/>
+              </a:rPr>
+              <a:t>▸  ⚠  Price figures are hypotheses to validate in interviews.</a:t>
             </a:r>
           </a:p>
         </p:txBody>
@@ -6640,7 +9468,7 @@
                 </a:solidFill>
                 <a:latin typeface="Calibri"/>
               </a:rPr>
-              <a:t>TRACTION</a:t>
+              <a:t>GO-TO-MARKET</a:t>
             </a:r>
           </a:p>
         </p:txBody>
@@ -6710,7 +9538,7 @@
                 </a:solidFill>
                 <a:latin typeface="Calibri"/>
               </a:rPr>
-              <a:t>In place of traction, how precisely we've narrowed the problem — and our first real signal.</a:t>
+              <a:t>The champion bites for free; the CTO opens the wallet for COGS.</a:t>
             </a:r>
           </a:p>
         </p:txBody>
@@ -6743,13 +9571,13 @@
               </a:spcAft>
             </a:pPr>
             <a:r>
-              <a:rPr sz="1700" b="1" i="0">
+              <a:rPr sz="1700" b="0" i="0">
                 <a:solidFill>
                   <a:srgbClr val="E8ECF1"/>
                 </a:solidFill>
                 <a:latin typeface="Calibri"/>
               </a:rPr>
-              <a:t>▸  How we sell = we don't sell to everyone. A discipline that quickly filters anti-ICP.</a:t>
+              <a:t>▸  Landing: free Cost Autopsy report (off-path) → an AI / eng lead at an AI-native scaleup adopts bottom-up.</a:t>
             </a:r>
           </a:p>
           <a:p>
@@ -6761,11 +9589,11 @@
             <a:r>
               <a:rPr sz="1700" b="0" i="0">
                 <a:solidFill>
-                  <a:srgbClr val="35C9C9"/>
-                </a:solidFill>
-                <a:latin typeface="Calibri"/>
-              </a:rPr>
-              <a:t>▸  First real signal — an ML lead at a Korean AI-search company (2 rounds) confirmed build/buy splits cost structure, and that per-customer attribution needs deliberate data work.</a:t>
+                  <a:srgbClr val="E8ECF1"/>
+                </a:solidFill>
+                <a:latin typeface="Calibri"/>
+              </a:rPr>
+              <a:t>▸  Conversion: at an incident or credit burn-out, the champion pitches the CTO paid → land with COGS &amp; margin reports.</a:t>
             </a:r>
           </a:p>
           <a:p>
@@ -6775,13 +9603,13 @@
               </a:spcAft>
             </a:pPr>
             <a:r>
-              <a:rPr sz="1700" b="0" i="0">
-                <a:solidFill>
-                  <a:srgbClr val="E8ECF1"/>
-                </a:solidFill>
-                <a:latin typeface="Calibri"/>
-              </a:rPr>
-              <a:t>▸  Outreach sent (Korea AI startups + US mid-market Top 5). Design partners: N in progress.</a:t>
+              <a:rPr sz="1700" b="1" i="0">
+                <a:solidFill>
+                  <a:srgbClr val="35C9C9"/>
+                </a:solidFill>
+                <a:latin typeface="Calibri"/>
+              </a:rPr>
+              <a:t>▸  Market order: Korea AI startups (free design partners / validation) → US AI-native scaleups (paid beachhead) → non-AI-native mid-market expansion (logistics-first).</a:t>
             </a:r>
           </a:p>
           <a:p>
@@ -6797,23 +9625,7 @@
                 </a:solidFill>
                 <a:latin typeface="Calibri"/>
               </a:rPr>
-              <a:t>▸  Formal interviews: 0 → N in progress, first signal secured (pricing built on data, honestly stated).</a:t>
-            </a:r>
-          </a:p>
-          <a:p>
-            <a:pPr algn="l">
-              <a:spcAft>
-                <a:spcPts val="800"/>
-              </a:spcAft>
-            </a:pPr>
-            <a:r>
-              <a:rPr sz="1700" b="1" i="0">
-                <a:solidFill>
-                  <a:srgbClr val="E8ECF1"/>
-                </a:solidFill>
-                <a:latin typeface="Calibri"/>
-              </a:rPr>
-              <a:t>▸  Target metric = net-negative churn (agent expansion).</a:t>
+              <a:t>▸  Blocker pre-empt: to IT/legal — 'metadata only + cross-vendor independent audit.'</a:t>
             </a:r>
           </a:p>
         </p:txBody>
@@ -6917,7 +9729,7 @@
                 </a:solidFill>
                 <a:latin typeface="Calibri"/>
               </a:rPr>
-              <a:t>TEAM</a:t>
+              <a:t>TRACTION</a:t>
             </a:r>
           </a:p>
         </p:txBody>
@@ -6987,7 +9799,7 @@
                 </a:solidFill>
                 <a:latin typeface="Calibri"/>
               </a:rPr>
-              <a:t>Technology × customer development — a 2-person core.</a:t>
+              <a:t>In place of traction, how precisely we've narrowed the problem — and our first real signal.</a:t>
             </a:r>
           </a:p>
         </p:txBody>
@@ -7020,13 +9832,13 @@
               </a:spcAft>
             </a:pPr>
             <a:r>
-              <a:rPr sz="1700" b="0" i="0">
+              <a:rPr sz="1700" b="1" i="0">
                 <a:solidFill>
                   <a:srgbClr val="E8ECF1"/>
                 </a:solidFill>
                 <a:latin typeface="Calibri"/>
               </a:rPr>
-              <a:t>▸  Taewon — technology &amp; product (agent orchestration · infrastructure).</a:t>
+              <a:t>▸  How we sell = we don't sell to everyone. A discipline that quickly filters anti-ICP.</a:t>
             </a:r>
           </a:p>
           <a:p>
@@ -7038,11 +9850,11 @@
             <a:r>
               <a:rPr sz="1700" b="0" i="0">
                 <a:solidFill>
-                  <a:srgbClr val="E8ECF1"/>
-                </a:solidFill>
-                <a:latin typeface="Calibri"/>
-              </a:rPr>
-              <a:t>▸  Jaemin (Malik) — CEO · customer development · GTM · research.</a:t>
+                  <a:srgbClr val="35C9C9"/>
+                </a:solidFill>
+                <a:latin typeface="Calibri"/>
+              </a:rPr>
+              <a:t>▸  First real signal — an ML lead at a Korean AI-search company (2 rounds) confirmed build/buy splits cost structure, and that per-customer attribution needs deliberate data work.</a:t>
             </a:r>
           </a:p>
           <a:p>
@@ -7054,11 +9866,11 @@
             <a:r>
               <a:rPr sz="1700" b="0" i="0">
                 <a:solidFill>
-                  <a:srgbClr val="9AA7B4"/>
-                </a:solidFill>
-                <a:latin typeface="Calibri"/>
-              </a:rPr>
-              <a:t>▸  (Advisors &amp; design-partner relationships added as secured.)</a:t>
+                  <a:srgbClr val="E8ECF1"/>
+                </a:solidFill>
+                <a:latin typeface="Calibri"/>
+              </a:rPr>
+              <a:t>▸  Outreach sent (Korea AI startups + US mid-market Top 5). Design partners: N in progress.</a:t>
             </a:r>
           </a:p>
           <a:p>
@@ -7070,11 +9882,27 @@
             <a:r>
               <a:rPr sz="1700" b="0" i="0">
                 <a:solidFill>
-                  <a:srgbClr val="F2C14E"/>
-                </a:solidFill>
-                <a:latin typeface="Calibri"/>
-              </a:rPr>
-              <a:t>▸  ⚠  Confirm role split — deck vs. memory mismatch on who is CEO; align before the pitch.</a:t>
+                  <a:srgbClr val="E8ECF1"/>
+                </a:solidFill>
+                <a:latin typeface="Calibri"/>
+              </a:rPr>
+              <a:t>▸  Formal interviews: 0 → N in progress, first signal secured (pricing built on data, honestly stated).</a:t>
+            </a:r>
+          </a:p>
+          <a:p>
+            <a:pPr algn="l">
+              <a:spcAft>
+                <a:spcPts val="800"/>
+              </a:spcAft>
+            </a:pPr>
+            <a:r>
+              <a:rPr sz="1700" b="1" i="0">
+                <a:solidFill>
+                  <a:srgbClr val="E8ECF1"/>
+                </a:solidFill>
+                <a:latin typeface="Calibri"/>
+              </a:rPr>
+              <a:t>▸  Target metric = net-negative churn (agent expansion).</a:t>
             </a:r>
           </a:p>
         </p:txBody>
@@ -7178,7 +10006,7 @@
                 </a:solidFill>
                 <a:latin typeface="Calibri"/>
               </a:rPr>
-              <a:t>VISION · ASK</a:t>
+              <a:t>TEAM</a:t>
             </a:r>
           </a:p>
         </p:txBody>
@@ -7214,6 +10042,267 @@
                 <a:latin typeface="Calibri"/>
               </a:rPr>
               <a:t>16</a:t>
+            </a:r>
+          </a:p>
+        </p:txBody>
+      </p:sp>
+      <p:sp>
+        <p:nvSpPr>
+          <p:cNvPr id="5" name="TextBox 4"/>
+          <p:cNvSpPr txBox="1"/>
+          <p:nvPr/>
+        </p:nvSpPr>
+        <p:spPr>
+          <a:xfrm>
+            <a:off x="868680" y="1051560"/>
+            <a:ext cx="10607040" cy="1280160"/>
+          </a:xfrm>
+          <a:prstGeom prst="rect">
+            <a:avLst/>
+          </a:prstGeom>
+          <a:noFill/>
+        </p:spPr>
+        <p:txBody>
+          <a:bodyPr wrap="square">
+            <a:spAutoFit/>
+          </a:bodyPr>
+          <a:lstStyle/>
+          <a:p>
+            <a:pPr algn="l"/>
+            <a:r>
+              <a:rPr sz="2700" b="1" i="0">
+                <a:solidFill>
+                  <a:srgbClr val="E8ECF1"/>
+                </a:solidFill>
+                <a:latin typeface="Calibri"/>
+              </a:rPr>
+              <a:t>Technology × customer development — a 2-person core.</a:t>
+            </a:r>
+          </a:p>
+        </p:txBody>
+      </p:sp>
+      <p:sp>
+        <p:nvSpPr>
+          <p:cNvPr id="6" name="TextBox 5"/>
+          <p:cNvSpPr txBox="1"/>
+          <p:nvPr/>
+        </p:nvSpPr>
+        <p:spPr>
+          <a:xfrm>
+            <a:off x="868680" y="2148840"/>
+            <a:ext cx="10424160" cy="4023360"/>
+          </a:xfrm>
+          <a:prstGeom prst="rect">
+            <a:avLst/>
+          </a:prstGeom>
+          <a:noFill/>
+        </p:spPr>
+        <p:txBody>
+          <a:bodyPr wrap="square">
+            <a:spAutoFit/>
+          </a:bodyPr>
+          <a:lstStyle/>
+          <a:p>
+            <a:pPr algn="l">
+              <a:spcAft>
+                <a:spcPts val="800"/>
+              </a:spcAft>
+            </a:pPr>
+            <a:r>
+              <a:rPr sz="1700" b="0" i="0">
+                <a:solidFill>
+                  <a:srgbClr val="E8ECF1"/>
+                </a:solidFill>
+                <a:latin typeface="Calibri"/>
+              </a:rPr>
+              <a:t>▸  Taewon — technology &amp; product (agent orchestration · infrastructure).</a:t>
+            </a:r>
+          </a:p>
+          <a:p>
+            <a:pPr algn="l">
+              <a:spcAft>
+                <a:spcPts val="800"/>
+              </a:spcAft>
+            </a:pPr>
+            <a:r>
+              <a:rPr sz="1700" b="0" i="0">
+                <a:solidFill>
+                  <a:srgbClr val="E8ECF1"/>
+                </a:solidFill>
+                <a:latin typeface="Calibri"/>
+              </a:rPr>
+              <a:t>▸  Jaemin (Malik) — CEO · customer development · GTM · research.</a:t>
+            </a:r>
+          </a:p>
+          <a:p>
+            <a:pPr algn="l">
+              <a:spcAft>
+                <a:spcPts val="800"/>
+              </a:spcAft>
+            </a:pPr>
+            <a:r>
+              <a:rPr sz="1700" b="0" i="0">
+                <a:solidFill>
+                  <a:srgbClr val="9AA7B4"/>
+                </a:solidFill>
+                <a:latin typeface="Calibri"/>
+              </a:rPr>
+              <a:t>▸  (Advisors &amp; design-partner relationships added as secured.)</a:t>
+            </a:r>
+          </a:p>
+          <a:p>
+            <a:pPr algn="l">
+              <a:spcAft>
+                <a:spcPts val="800"/>
+              </a:spcAft>
+            </a:pPr>
+            <a:r>
+              <a:rPr sz="1700" b="0" i="0">
+                <a:solidFill>
+                  <a:srgbClr val="F2C14E"/>
+                </a:solidFill>
+                <a:latin typeface="Calibri"/>
+              </a:rPr>
+              <a:t>▸  ⚠  Confirm role split — deck vs. memory mismatch on who is CEO; align before the pitch.</a:t>
+            </a:r>
+          </a:p>
+        </p:txBody>
+      </p:sp>
+    </p:spTree>
+  </p:cSld>
+  <p:clrMapOvr>
+    <a:masterClrMapping/>
+  </p:clrMapOvr>
+</p:sld>
+</file>
+
+<file path=ppt/slides/slide17.xml><?xml version="1.0" encoding="utf-8"?>
+<p:sld xmlns:a="http://schemas.openxmlformats.org/drawingml/2006/main" xmlns:p="http://schemas.openxmlformats.org/presentationml/2006/main" xmlns:r="http://schemas.openxmlformats.org/officeDocument/2006/relationships">
+  <p:cSld>
+    <p:bg>
+      <p:bgPr>
+        <a:solidFill>
+          <a:srgbClr val="0E141B"/>
+        </a:solidFill>
+        <a:effectLst/>
+      </p:bgPr>
+    </p:bg>
+    <p:spTree>
+      <p:nvGrpSpPr>
+        <p:cNvPr id="1" name=""/>
+        <p:cNvGrpSpPr/>
+        <p:nvPr/>
+      </p:nvGrpSpPr>
+      <p:grpSpPr/>
+      <p:sp>
+        <p:nvSpPr>
+          <p:cNvPr id="2" name="Rectangle 1"/>
+          <p:cNvSpPr/>
+          <p:nvPr/>
+        </p:nvSpPr>
+        <p:spPr>
+          <a:xfrm>
+            <a:off x="640080" y="640080"/>
+            <a:ext cx="146304" cy="502920"/>
+          </a:xfrm>
+          <a:prstGeom prst="rect">
+            <a:avLst/>
+          </a:prstGeom>
+          <a:solidFill>
+            <a:srgbClr val="FF6B35"/>
+          </a:solidFill>
+          <a:ln>
+            <a:noFill/>
+          </a:ln>
+        </p:spPr>
+        <p:style>
+          <a:lnRef idx="1">
+            <a:schemeClr val="accent1"/>
+          </a:lnRef>
+          <a:fillRef idx="3">
+            <a:schemeClr val="accent1"/>
+          </a:fillRef>
+          <a:effectRef idx="2">
+            <a:schemeClr val="accent1"/>
+          </a:effectRef>
+          <a:fontRef idx="minor">
+            <a:schemeClr val="lt1"/>
+          </a:fontRef>
+        </p:style>
+        <p:txBody>
+          <a:bodyPr rtlCol="0" anchor="ctr"/>
+          <a:lstStyle/>
+          <a:p>
+            <a:pPr algn="ctr"/>
+          </a:p>
+        </p:txBody>
+      </p:sp>
+      <p:sp>
+        <p:nvSpPr>
+          <p:cNvPr id="3" name="TextBox 2"/>
+          <p:cNvSpPr txBox="1"/>
+          <p:nvPr/>
+        </p:nvSpPr>
+        <p:spPr>
+          <a:xfrm>
+            <a:off x="868680" y="566928"/>
+            <a:ext cx="8686800" cy="457200"/>
+          </a:xfrm>
+          <a:prstGeom prst="rect">
+            <a:avLst/>
+          </a:prstGeom>
+          <a:noFill/>
+        </p:spPr>
+        <p:txBody>
+          <a:bodyPr wrap="square">
+            <a:spAutoFit/>
+          </a:bodyPr>
+          <a:lstStyle/>
+          <a:p>
+            <a:pPr algn="l"/>
+            <a:r>
+              <a:rPr sz="1300" b="1" i="0">
+                <a:solidFill>
+                  <a:srgbClr val="35C9C9"/>
+                </a:solidFill>
+                <a:latin typeface="Calibri"/>
+              </a:rPr>
+              <a:t>VISION · ASK</a:t>
+            </a:r>
+          </a:p>
+        </p:txBody>
+      </p:sp>
+      <p:sp>
+        <p:nvSpPr>
+          <p:cNvPr id="4" name="TextBox 3"/>
+          <p:cNvSpPr txBox="1"/>
+          <p:nvPr/>
+        </p:nvSpPr>
+        <p:spPr>
+          <a:xfrm>
+            <a:off x="10972800" y="502920"/>
+            <a:ext cx="822960" cy="457200"/>
+          </a:xfrm>
+          <a:prstGeom prst="rect">
+            <a:avLst/>
+          </a:prstGeom>
+          <a:noFill/>
+        </p:spPr>
+        <p:txBody>
+          <a:bodyPr wrap="square">
+            <a:spAutoFit/>
+          </a:bodyPr>
+          <a:lstStyle/>
+          <a:p>
+            <a:pPr algn="r"/>
+            <a:r>
+              <a:rPr sz="1200" b="1" i="0">
+                <a:solidFill>
+                  <a:srgbClr val="9AA7B4"/>
+                </a:solidFill>
+                <a:latin typeface="Calibri"/>
+              </a:rPr>
+              <a:t>17</a:t>
             </a:r>
           </a:p>
         </p:txBody>
@@ -10335,7 +13424,7 @@
                 </a:solidFill>
                 <a:latin typeface="Calibri"/>
               </a:rPr>
-              <a:t>Can't build like Meta — but far more spend &amp; audit pressure than a startup.</a:t>
+              <a:t>Sell to the AI-native scaleups we reach now — ride the non-AI-native wave that can't build it.</a:t>
             </a:r>
           </a:p>
         </p:txBody>
@@ -10374,7 +13463,7 @@
                 </a:solidFill>
                 <a:latin typeface="Calibri"/>
               </a:rPr>
-              <a:t>▸  Paid target: mid-market / scale-up B2B — $50K–$500K/mo AI spend, 50–300 people, Series A–C. Not big enough to staff an infra team → can't build, must buy.</a:t>
+              <a:t>▸  Beachhead (paid now): AI-native scaleup B2B — $50K–$500K/mo AI spend, 50–300 people, Series A–C, high tool / external-API share. They own their execution path → our pre-execution control fits, and they're reachable for design partners.</a:t>
             </a:r>
           </a:p>
           <a:p>
@@ -10390,7 +13479,7 @@
                 </a:solidFill>
                 <a:latin typeface="Calibri"/>
               </a:rPr>
-              <a:t>▸  Why B2B: per-customer unit cost is a B2B need (customer = contract). B2C rolls cost up by category — a B2B CTO must defend margin per account. (An ML lead we spoke with framed it exactly this way.)</a:t>
+              <a:t>▸  Why start here: this is where our evidence, demo &amp; first real signal (an ML lead at an AI-search company) already point — and where the product coheres end to end.</a:t>
             </a:r>
           </a:p>
           <a:p>
@@ -10406,7 +13495,7 @@
                 </a:solidFill>
                 <a:latin typeface="Calibri"/>
               </a:rPr>
-              <a:t>▸  Tooling / spend = 1–3% (clear ROI). Skips the death valley (small = negative ROI / enterprise = builds its own). Buyer = CTO, champion = AI lead, finance = influencer.</a:t>
+              <a:t>▸  Expansion wave: non-AI-native mid-market in AX (logistics, manufacturing, finance) — $100K+/mo, 3+ vendors. No AI-engineering DNA → structurally can't build → the 'build it yourself' rebuttal dies, and the population dwarfs AI-natives.</a:t>
             </a:r>
           </a:p>
           <a:p>
@@ -10422,7 +13511,7 @@
                 </a:solidFill>
                 <a:latin typeface="Calibri"/>
               </a:rPr>
-              <a:t>▸  Korean AI startups = free design partners (data &amp; references); paid = US mid-market.</a:t>
+              <a:t>▸  Buyer = CTO (economic), champion = AI / data-ops lead, finance = influencer. Per-customer COGS = a B2B need (customer = contract). Korea AI startups = free design partners.</a:t>
             </a:r>
           </a:p>
           <a:p>
@@ -10438,7 +13527,7 @@
                 </a:solidFill>
                 <a:latin typeface="Calibri"/>
               </a:rPr>
-              <a:t>▸  ⚠  Bet, not fact: 'can't build → must buy' + the spend threshold &amp; buyer are what we are validating in interviews.</a:t>
+              <a:t>▸  ⚠  Bet, not fact: spend threshold, buyer, and the non-AI-native 'can't build' claim = validating in interviews.</a:t>
             </a:r>
           </a:p>
         </p:txBody>
@@ -10612,7 +13701,7 @@
                 </a:solidFill>
                 <a:latin typeface="Calibri"/>
               </a:rPr>
-              <a:t>Korea is the wedge; the market is global agent infra. Bet the slope, not the size.</a:t>
+              <a:t>Beachhead = reachable AI-native scaleups. Slope = the non-AI-native wave that can't build it. Bet the slope.</a:t>
             </a:r>
           </a:p>
         </p:txBody>
@@ -10651,7 +13740,7 @@
                 </a:solidFill>
                 <a:latin typeface="Calibri"/>
               </a:rPr>
-              <a:t>▸  Lens A (governed AI spend × ~1–2% take-rate) = main; Lens B (AI FinOps + LLMOps) = cross-check. CAGR ~20%.</a:t>
+              <a:t>▸  TAM ≈ $0.5–1.5B (2026) → $2–6B (2030): 1–2% of $50–60B enterprise GenAI spend (top-down, segment-agnostic; FinOps take-rate anchor). CAGR ~20%.</a:t>
             </a:r>
           </a:p>
           <a:p>
@@ -10661,13 +13750,13 @@
               </a:spcAft>
             </a:pPr>
             <a:r>
-              <a:rPr sz="1500" b="0" i="0">
+              <a:rPr sz="1500" b="1" i="0">
                 <a:solidFill>
                   <a:srgbClr val="E8ECF1"/>
                 </a:solidFill>
                 <a:latin typeface="Calibri"/>
               </a:rPr>
-              <a:t>▸  ACV $30K = median of competitor mid-market ACVs.</a:t>
+              <a:t>▸  SAM ≈ $0.24–0.45B → $0.8–1.8B: ICP-matching firms × ACV $30K — AI-native scaleups now, plus non-AI-native mid-market as it scales.</a:t>
             </a:r>
           </a:p>
           <a:p>
@@ -10683,7 +13772,7 @@
                 </a:solidFill>
                 <a:latin typeface="Calibri"/>
               </a:rPr>
-              <a:t>▸  SOM engine: 50–150 US paid, seeded by the Korea wedge + US network.</a:t>
+              <a:t>▸  SOM (3yr) ≈ $1.0–3.6M ARR: reachable AI-native beachhead (Korea design partners → US paid), expanding into non-AI-native adjacents.</a:t>
             </a:r>
           </a:p>
           <a:p>
@@ -10699,7 +13788,7 @@
                 </a:solidFill>
                 <a:latin typeface="Calibri"/>
               </a:rPr>
-              <a:t>▸  ⚠  SAM population (10–20K firms) = hypothesis, refined by interview screening pass-rate.</a:t>
+              <a:t>▸  ⚠  SAM population = hypothesis, refined by interview screening pass-rate.</a:t>
             </a:r>
           </a:p>
         </p:txBody>
@@ -10905,7 +13994,7 @@
                 </a:solidFill>
                 <a:latin typeface="Calibri"/>
               </a:rPr>
-              <a:t>$0.5–1.8B  (2026)</a:t>
+              <a:t>$0.5–1.5B  (2026)</a:t>
             </a:r>
           </a:p>
         </p:txBody>
@@ -10940,7 +14029,7 @@
                 </a:solidFill>
                 <a:latin typeface="Calibri"/>
               </a:rPr>
-              <a:t>SAM  $0.3–0.6B</a:t>
+              <a:t>SAM  $0.24–0.45B</a:t>
             </a:r>
           </a:p>
         </p:txBody>
@@ -11010,7 +14099,7 @@
                 </a:solidFill>
                 <a:latin typeface="Calibri"/>
               </a:rPr>
-              <a:t>$1.5–4.5M ARR</a:t>
+              <a:t>$1.0–3.6M ARR</a:t>
             </a:r>
           </a:p>
         </p:txBody>

--- a/deliverables/Pitch_Deck_VersionB_Hero-Hybrid_EN.pptx
+++ b/deliverables/Pitch_Deck_VersionB_Hero-Hybrid_EN.pptx
@@ -868,7 +868,7 @@
           <a:lstStyle/>
           <a:p>
             <a:r>
-              <a:t>Don't hide the 0 formal interviews — frame as 'building pricing on data.' Fill with real interview/design-partner counts before 8/6.</a:t>
+              <a:t>HONESTY for Q&amp;A: 2 real async LinkedIn screenings + 5 persona-based validations (role-play against researched personas) = 7 touchpoints; 0 formal live interviews yet. If asked 'were the 5 real people?' → answer straight: 'persona dry-runs of our Mom-Test guide to pressure-test H0 &amp; rebuttals before live outreach.' Do NOT imply they were live customers. Names are anonymized in this file (public repo, 7/23 confidentiality rule) — say the real identities on stage / keep them local-only, never in the deck source.</a:t>
             </a:r>
           </a:p>
         </p:txBody>
@@ -9799,7 +9799,7 @@
                 </a:solidFill>
                 <a:latin typeface="Calibri"/>
               </a:rPr>
-              <a:t>In place of traction, how precisely we've narrowed the problem — and our first real signal.</a:t>
+              <a:t>Customer development, not vanity metrics: 2 real screenings + 5 persona interviews — and how they sharpened the wedge.</a:t>
             </a:r>
           </a:p>
         </p:txBody>
@@ -9838,7 +9838,7 @@
                 </a:solidFill>
                 <a:latin typeface="Calibri"/>
               </a:rPr>
-              <a:t>▸  How we sell = we don't sell to everyone. A discipline that quickly filters anti-ICP.</a:t>
+              <a:t>▸  2 real external screenings (async LinkedIn): a Lead ML Eng at a Korean AI-search scaleup (2 rounds) — build/buy splits cost structure; per-customer attribution needs deliberate data work = validates our wedge. A US seed agentic-platform founder (2 rounds) — anti-ICP by design (pre-PMF, growth-first) → sharpened our ICP floor.</a:t>
             </a:r>
           </a:p>
           <a:p>
@@ -9854,7 +9854,7 @@
                 </a:solidFill>
                 <a:latin typeface="Calibri"/>
               </a:rPr>
-              <a:t>▸  First real signal — an ML lead at a Korean AI-search company (2 rounds) confirmed build/buy splits cost structure, and that per-customer attribution needs deliberate data work.</a:t>
+              <a:t>▸  5 structured persona interviews (Mom-Test guide vs researched buyer personas): H0 (tool / external-API ≥ 15% of cost) survived 2/5, 1 missing, 1 negative (6%), 1 disqualified (B2C). Two independent 'LiteLLM can't attribute external APIs' cases surfaced.</a:t>
             </a:r>
           </a:p>
           <a:p>
@@ -9866,11 +9866,11 @@
             <a:r>
               <a:rPr sz="1700" b="0" i="0">
                 <a:solidFill>
-                  <a:srgbClr val="E8ECF1"/>
-                </a:solidFill>
-                <a:latin typeface="Calibri"/>
-              </a:rPr>
-              <a:t>▸  Outreach sent (Korea AI startups + US mid-market Top 5). Design partners: N in progress.</a:t>
+                  <a:srgbClr val="9AA7B4"/>
+                </a:solidFill>
+                <a:latin typeface="Calibri"/>
+              </a:rPr>
+              <a:t>▸  'Disqualification data' is an asset — even anti-ICP screenings (the seed founder above; a B2C app) refined the ICP. How we sell = we don't sell to everyone.</a:t>
             </a:r>
           </a:p>
           <a:p>
@@ -9886,7 +9886,7 @@
                 </a:solidFill>
                 <a:latin typeface="Calibri"/>
               </a:rPr>
-              <a:t>▸  Formal interviews: 0 → N in progress, first signal secured (pricing built on data, honestly stated).</a:t>
+              <a:t>▸  Outreach live (Korea AI startups + US Top 5). Design partners: N in progress.</a:t>
             </a:r>
           </a:p>
           <a:p>

--- a/deliverables/Pitch_Deck_VersionB_Hero-Hybrid_EN.pptx
+++ b/deliverables/Pitch_Deck_VersionB_Hero-Hybrid_EN.pptx
@@ -4738,7 +4738,7 @@
                 </a:solidFill>
                 <a:latin typeface="Calibri"/>
               </a:rPr>
-              <a:t>Team · 2026 · Presenter</a:t>
+              <a:t>Team Kyber · 2026</a:t>
             </a:r>
           </a:p>
           <a:p>
@@ -9886,7 +9886,7 @@
                 </a:solidFill>
                 <a:latin typeface="Calibri"/>
               </a:rPr>
-              <a:t>▸  Outreach live (Korea AI startups + US Top 5). Design partners: N in progress.</a:t>
+              <a:t>▸  Outreach live (Korea AI startups + US Top 5) — design-partner intros are exactly what we ask for on the final slide.</a:t>
             </a:r>
           </a:p>
           <a:p>
@@ -10076,7 +10076,7 @@
                 </a:solidFill>
                 <a:latin typeface="Calibri"/>
               </a:rPr>
-              <a:t>Technology × customer development — a 2-person core.</a:t>
+              <a:t>Team Kyber — technology × customer development, a 2-person core.</a:t>
             </a:r>
           </a:p>
         </p:txBody>

--- a/deliverables/Pitch_Deck_VersionB_Hero-Hybrid_EN.pptx
+++ b/deliverables/Pitch_Deck_VersionB_Hero-Hybrid_EN.pptx
@@ -938,7 +938,7 @@
           <a:lstStyle/>
           <a:p>
             <a:r>
-              <a:t>Keep it short. One line on 'why us' to be filled by the team. Resolve the Team-slide role inconsistency before the pitch.</a:t>
+              <a:t>Roles RESOLVED (8/3): Taewon Kim = CEO (finance×CS, prior founder Nemo Scan, customer dev/GTM), Jaemin Yoo (Malik) = Co-founder / technical originator. Lead with founder-market fit — finance+CS is exactly the two lenses cost governance needs. ⚠ Jaemin's personal 'why us' line still TBD (per CEO).</a:t>
             </a:r>
           </a:p>
         </p:txBody>
@@ -10076,7 +10076,7 @@
                 </a:solidFill>
                 <a:latin typeface="Calibri"/>
               </a:rPr>
-              <a:t>Team Kyber — technology × customer development, a 2-person core.</a:t>
+              <a:t>Team Kyber — a founder who reads both the P&amp;L and the call stack.</a:t>
             </a:r>
           </a:p>
         </p:txBody>
@@ -10109,13 +10109,13 @@
               </a:spcAft>
             </a:pPr>
             <a:r>
-              <a:rPr sz="1700" b="0" i="0">
+              <a:rPr sz="1700" b="1" i="0">
                 <a:solidFill>
                   <a:srgbClr val="E8ECF1"/>
                 </a:solidFill>
                 <a:latin typeface="Calibri"/>
               </a:rPr>
-              <a:t>▸  Taewon — technology &amp; product (agent orchestration · infrastructure).</a:t>
+              <a:t>▸  Taewon Kim — CEO. Finance × Computer Science double major → reads AI cost as a financial P&amp;L AND understands the agent call system that generates it = founder-market fit for cost governance.</a:t>
             </a:r>
           </a:p>
           <a:p>
@@ -10127,11 +10127,11 @@
             <a:r>
               <a:rPr sz="1700" b="0" i="0">
                 <a:solidFill>
-                  <a:srgbClr val="E8ECF1"/>
-                </a:solidFill>
-                <a:latin typeface="Calibri"/>
-              </a:rPr>
-              <a:t>▸  Jaemin (Malik) — CEO · customer development · GTM · research.</a:t>
+                  <a:srgbClr val="35C9C9"/>
+                </a:solidFill>
+                <a:latin typeface="Calibri"/>
+              </a:rPr>
+              <a:t>▸  Prior founder — ran 'Nemo Scan', a book-scanning venture, through the full startup cycle. Not a first-timer.</a:t>
             </a:r>
           </a:p>
           <a:p>
@@ -10143,11 +10143,11 @@
             <a:r>
               <a:rPr sz="1700" b="0" i="0">
                 <a:solidFill>
-                  <a:srgbClr val="9AA7B4"/>
-                </a:solidFill>
-                <a:latin typeface="Calibri"/>
-              </a:rPr>
-              <a:t>▸  (Advisors &amp; design-partner relationships added as secured.)</a:t>
+                  <a:srgbClr val="E8ECF1"/>
+                </a:solidFill>
+                <a:latin typeface="Calibri"/>
+              </a:rPr>
+              <a:t>▸  Jaemin Yoo (Malik) — Co-founder · technical originator.</a:t>
             </a:r>
           </a:p>
           <a:p>
@@ -10159,11 +10159,11 @@
             <a:r>
               <a:rPr sz="1700" b="0" i="0">
                 <a:solidFill>
-                  <a:srgbClr val="F2C14E"/>
-                </a:solidFill>
-                <a:latin typeface="Calibri"/>
-              </a:rPr>
-              <a:t>▸  ⚠  Confirm role split — deck vs. memory mismatch on who is CEO; align before the pitch.</a:t>
+                  <a:srgbClr val="9AA7B4"/>
+                </a:solidFill>
+                <a:latin typeface="Calibri"/>
+              </a:rPr>
+              <a:t>▸  (Advisors &amp; design-partner relationships added as secured.)</a:t>
             </a:r>
           </a:p>
         </p:txBody>

--- a/deliverables/Pitch_Deck_VersionB_Hero-Hybrid_EN.pptx
+++ b/deliverables/Pitch_Deck_VersionB_Hero-Hybrid_EN.pptx
@@ -4570,7 +4570,7 @@
     <p:bg>
       <p:bgPr>
         <a:solidFill>
-          <a:srgbClr val="0E141B"/>
+          <a:srgbClr val="FFFFFF"/>
         </a:solidFill>
         <a:effectLst/>
       </p:bgPr>
@@ -4597,7 +4597,7 @@
             <a:avLst/>
           </a:prstGeom>
           <a:solidFill>
-            <a:srgbClr val="FF6B35"/>
+            <a:srgbClr val="EA5B2B"/>
           </a:solidFill>
           <a:ln>
             <a:noFill/>
@@ -4651,7 +4651,7 @@
             <a:r>
               <a:rPr sz="4000" b="1" i="0">
                 <a:solidFill>
-                  <a:srgbClr val="E8ECF1"/>
+                  <a:srgbClr val="1B222B"/>
                 </a:solidFill>
                 <a:latin typeface="Calibri"/>
               </a:rPr>
@@ -4667,7 +4667,7 @@
             <a:r>
               <a:rPr sz="2200" b="0" i="0">
                 <a:solidFill>
-                  <a:srgbClr val="35C9C9"/>
+                  <a:srgbClr val="0E8A8A"/>
                 </a:solidFill>
                 <a:latin typeface="Calibri"/>
               </a:rPr>
@@ -4683,7 +4683,7 @@
             <a:r>
               <a:rPr sz="2000" b="0" i="1">
                 <a:solidFill>
-                  <a:srgbClr val="E8ECF1"/>
+                  <a:srgbClr val="1B222B"/>
                 </a:solidFill>
                 <a:latin typeface="Calibri"/>
               </a:rPr>
@@ -4699,7 +4699,7 @@
             <a:r>
               <a:rPr sz="1400" b="0" i="0">
                 <a:solidFill>
-                  <a:srgbClr val="9AA7B4"/>
+                  <a:srgbClr val="5E6A76"/>
                 </a:solidFill>
                 <a:latin typeface="Calibri"/>
               </a:rPr>
@@ -4734,7 +4734,7 @@
             <a:r>
               <a:rPr sz="1300" b="0" i="0">
                 <a:solidFill>
-                  <a:srgbClr val="9AA7B4"/>
+                  <a:srgbClr val="5E6A76"/>
                 </a:solidFill>
                 <a:latin typeface="Calibri"/>
               </a:rPr>
@@ -4746,7 +4746,7 @@
             <a:r>
               <a:rPr sz="1100" b="1" i="0">
                 <a:solidFill>
-                  <a:srgbClr val="FF6B35"/>
+                  <a:srgbClr val="EA5B2B"/>
                 </a:solidFill>
                 <a:latin typeface="Calibri"/>
               </a:rPr>
@@ -4769,7 +4769,7 @@
     <p:bg>
       <p:bgPr>
         <a:solidFill>
-          <a:srgbClr val="0E141B"/>
+          <a:srgbClr val="FFFFFF"/>
         </a:solidFill>
         <a:effectLst/>
       </p:bgPr>
@@ -4796,7 +4796,7 @@
             <a:avLst/>
           </a:prstGeom>
           <a:solidFill>
-            <a:srgbClr val="FF6B35"/>
+            <a:srgbClr val="EA5B2B"/>
           </a:solidFill>
           <a:ln>
             <a:noFill/>
@@ -4850,7 +4850,7 @@
             <a:r>
               <a:rPr sz="1300" b="1" i="0">
                 <a:solidFill>
-                  <a:srgbClr val="35C9C9"/>
+                  <a:srgbClr val="0E8A8A"/>
                 </a:solidFill>
                 <a:latin typeface="Calibri"/>
               </a:rPr>
@@ -4885,7 +4885,7 @@
             <a:r>
               <a:rPr sz="1200" b="1" i="0">
                 <a:solidFill>
-                  <a:srgbClr val="9AA7B4"/>
+                  <a:srgbClr val="5E6A76"/>
                 </a:solidFill>
                 <a:latin typeface="Calibri"/>
               </a:rPr>
@@ -4920,7 +4920,7 @@
             <a:r>
               <a:rPr sz="2500" b="1" i="0">
                 <a:solidFill>
-                  <a:srgbClr val="E8ECF1"/>
+                  <a:srgbClr val="1B222B"/>
                 </a:solidFill>
                 <a:latin typeface="Calibri"/>
               </a:rPr>
@@ -4959,7 +4959,7 @@
             <a:r>
               <a:rPr sz="1500" b="1" i="0">
                 <a:solidFill>
-                  <a:srgbClr val="E8ECF1"/>
+                  <a:srgbClr val="1B222B"/>
                 </a:solidFill>
                 <a:latin typeface="Calibri"/>
               </a:rPr>
@@ -4975,7 +4975,7 @@
             <a:r>
               <a:rPr sz="1500" b="1" i="0">
                 <a:solidFill>
-                  <a:srgbClr val="35C9C9"/>
+                  <a:srgbClr val="0E8A8A"/>
                 </a:solidFill>
                 <a:latin typeface="Calibri"/>
               </a:rPr>
@@ -4991,7 +4991,7 @@
             <a:r>
               <a:rPr sz="1500" b="0" i="0">
                 <a:solidFill>
-                  <a:srgbClr val="E8ECF1"/>
+                  <a:srgbClr val="1B222B"/>
                 </a:solidFill>
                 <a:latin typeface="Calibri"/>
               </a:rPr>
@@ -5007,7 +5007,7 @@
             <a:r>
               <a:rPr sz="1500" b="1" i="0">
                 <a:solidFill>
-                  <a:srgbClr val="E8ECF1"/>
+                  <a:srgbClr val="1B222B"/>
                 </a:solidFill>
                 <a:latin typeface="Calibri"/>
               </a:rPr>
@@ -5031,7 +5031,7 @@
             <a:avLst/>
           </a:prstGeom>
           <a:solidFill>
-            <a:srgbClr val="14303A"/>
+            <a:srgbClr val="DCF2EE"/>
           </a:solidFill>
           <a:ln>
             <a:noFill/>
@@ -5076,7 +5076,7 @@
           </a:prstGeom>
           <a:ln w="15875">
             <a:solidFill>
-              <a:srgbClr val="9AA7B4"/>
+              <a:srgbClr val="5E6A76"/>
             </a:solidFill>
           </a:ln>
           <a:effectLst/>
@@ -5112,7 +5112,7 @@
           </a:prstGeom>
           <a:ln w="15875">
             <a:solidFill>
-              <a:srgbClr val="9AA7B4"/>
+              <a:srgbClr val="5E6A76"/>
             </a:solidFill>
           </a:ln>
           <a:effectLst/>
@@ -5158,7 +5158,7 @@
             <a:r>
               <a:rPr sz="900" b="0" i="0">
                 <a:solidFill>
-                  <a:srgbClr val="9AA7B4"/>
+                  <a:srgbClr val="5E6A76"/>
                 </a:solidFill>
                 <a:latin typeface="Calibri"/>
               </a:rPr>
@@ -5193,7 +5193,7 @@
             <a:r>
               <a:rPr sz="900" b="0" i="0">
                 <a:solidFill>
-                  <a:srgbClr val="9AA7B4"/>
+                  <a:srgbClr val="5E6A76"/>
                 </a:solidFill>
                 <a:latin typeface="Calibri"/>
               </a:rPr>
@@ -5228,7 +5228,7 @@
             <a:r>
               <a:rPr sz="900" b="1" i="0">
                 <a:solidFill>
-                  <a:srgbClr val="35C9C9"/>
+                  <a:srgbClr val="0E8A8A"/>
                 </a:solidFill>
                 <a:latin typeface="Calibri"/>
               </a:rPr>
@@ -5263,7 +5263,7 @@
             <a:r>
               <a:rPr sz="900" b="0" i="0">
                 <a:solidFill>
-                  <a:srgbClr val="9AA7B4"/>
+                  <a:srgbClr val="5E6A76"/>
                 </a:solidFill>
                 <a:latin typeface="Calibri"/>
               </a:rPr>
@@ -5287,7 +5287,7 @@
             <a:avLst/>
           </a:prstGeom>
           <a:solidFill>
-            <a:srgbClr val="9AA7B4"/>
+            <a:srgbClr val="5E6A76"/>
           </a:solidFill>
           <a:ln>
             <a:noFill/>
@@ -5342,7 +5342,7 @@
             <a:r>
               <a:rPr sz="900" b="0" i="0">
                 <a:solidFill>
-                  <a:srgbClr val="E8ECF1"/>
+                  <a:srgbClr val="1B222B"/>
                 </a:solidFill>
                 <a:latin typeface="Calibri"/>
               </a:rPr>
@@ -5366,7 +5366,7 @@
             <a:avLst/>
           </a:prstGeom>
           <a:solidFill>
-            <a:srgbClr val="9AA7B4"/>
+            <a:srgbClr val="5E6A76"/>
           </a:solidFill>
           <a:ln>
             <a:noFill/>
@@ -5421,7 +5421,7 @@
             <a:r>
               <a:rPr sz="900" b="0" i="0">
                 <a:solidFill>
-                  <a:srgbClr val="E8ECF1"/>
+                  <a:srgbClr val="1B222B"/>
                 </a:solidFill>
                 <a:latin typeface="Calibri"/>
               </a:rPr>
@@ -5445,7 +5445,7 @@
             <a:avLst/>
           </a:prstGeom>
           <a:solidFill>
-            <a:srgbClr val="9AA7B4"/>
+            <a:srgbClr val="5E6A76"/>
           </a:solidFill>
           <a:ln>
             <a:noFill/>
@@ -5500,7 +5500,7 @@
             <a:r>
               <a:rPr sz="900" b="0" i="0">
                 <a:solidFill>
-                  <a:srgbClr val="E8ECF1"/>
+                  <a:srgbClr val="1B222B"/>
                 </a:solidFill>
                 <a:latin typeface="Calibri"/>
               </a:rPr>
@@ -5524,7 +5524,7 @@
             <a:avLst/>
           </a:prstGeom>
           <a:solidFill>
-            <a:srgbClr val="9AA7B4"/>
+            <a:srgbClr val="5E6A76"/>
           </a:solidFill>
           <a:ln>
             <a:noFill/>
@@ -5579,7 +5579,7 @@
             <a:r>
               <a:rPr sz="900" b="0" i="0">
                 <a:solidFill>
-                  <a:srgbClr val="E8ECF1"/>
+                  <a:srgbClr val="1B222B"/>
                 </a:solidFill>
                 <a:latin typeface="Calibri"/>
               </a:rPr>
@@ -5603,7 +5603,7 @@
             <a:avLst/>
           </a:prstGeom>
           <a:solidFill>
-            <a:srgbClr val="F2C14E"/>
+            <a:srgbClr val="B5820A"/>
           </a:solidFill>
           <a:ln>
             <a:noFill/>
@@ -5658,7 +5658,7 @@
             <a:r>
               <a:rPr sz="900" b="0" i="0">
                 <a:solidFill>
-                  <a:srgbClr val="F2C14E"/>
+                  <a:srgbClr val="B5820A"/>
                 </a:solidFill>
                 <a:latin typeface="Calibri"/>
               </a:rPr>
@@ -5682,7 +5682,7 @@
             <a:avLst/>
           </a:prstGeom>
           <a:solidFill>
-            <a:srgbClr val="FF6B35"/>
+            <a:srgbClr val="EA5B2B"/>
           </a:solidFill>
           <a:ln>
             <a:noFill/>
@@ -5737,7 +5737,7 @@
             <a:r>
               <a:rPr sz="1000" b="1" i="0">
                 <a:solidFill>
-                  <a:srgbClr val="FF6B35"/>
+                  <a:srgbClr val="EA5B2B"/>
                 </a:solidFill>
                 <a:latin typeface="Calibri"/>
               </a:rPr>
@@ -5772,7 +5772,7 @@
             <a:r>
               <a:rPr sz="900" b="0" i="0">
                 <a:solidFill>
-                  <a:srgbClr val="9AA7B4"/>
+                  <a:srgbClr val="5E6A76"/>
                 </a:solidFill>
                 <a:latin typeface="Calibri"/>
               </a:rPr>
@@ -5795,7 +5795,7 @@
     <p:bg>
       <p:bgPr>
         <a:solidFill>
-          <a:srgbClr val="0E141B"/>
+          <a:srgbClr val="FFFFFF"/>
         </a:solidFill>
         <a:effectLst/>
       </p:bgPr>
@@ -5822,7 +5822,7 @@
             <a:avLst/>
           </a:prstGeom>
           <a:solidFill>
-            <a:srgbClr val="FF6B35"/>
+            <a:srgbClr val="EA5B2B"/>
           </a:solidFill>
           <a:ln>
             <a:noFill/>
@@ -5876,7 +5876,7 @@
             <a:r>
               <a:rPr sz="1300" b="1" i="0">
                 <a:solidFill>
-                  <a:srgbClr val="35C9C9"/>
+                  <a:srgbClr val="0E8A8A"/>
                 </a:solidFill>
                 <a:latin typeface="Calibri"/>
               </a:rPr>
@@ -5911,7 +5911,7 @@
             <a:r>
               <a:rPr sz="1200" b="1" i="0">
                 <a:solidFill>
-                  <a:srgbClr val="9AA7B4"/>
+                  <a:srgbClr val="5E6A76"/>
                 </a:solidFill>
                 <a:latin typeface="Calibri"/>
               </a:rPr>
@@ -5946,7 +5946,7 @@
             <a:r>
               <a:rPr sz="2400" b="1" i="0">
                 <a:solidFill>
-                  <a:srgbClr val="E8ECF1"/>
+                  <a:srgbClr val="1B222B"/>
                 </a:solidFill>
                 <a:latin typeface="Calibri"/>
               </a:rPr>
@@ -5970,7 +5970,7 @@
             <a:avLst/>
           </a:prstGeom>
           <a:solidFill>
-            <a:srgbClr val="16202B"/>
+            <a:srgbClr val="EDF0F3"/>
           </a:solidFill>
           <a:ln>
             <a:noFill/>
@@ -6014,7 +6014,7 @@
             <a:avLst/>
           </a:prstGeom>
           <a:solidFill>
-            <a:srgbClr val="16202B"/>
+            <a:srgbClr val="EDF0F3"/>
           </a:solidFill>
           <a:ln>
             <a:noFill/>
@@ -6069,7 +6069,7 @@
             <a:r>
               <a:rPr sz="1000" b="0" i="0">
                 <a:solidFill>
-                  <a:srgbClr val="9AA7B4"/>
+                  <a:srgbClr val="5E6A76"/>
                 </a:solidFill>
                 <a:latin typeface="Calibri"/>
               </a:rPr>
@@ -6093,7 +6093,7 @@
             <a:avLst/>
           </a:prstGeom>
           <a:solidFill>
-            <a:srgbClr val="16202B"/>
+            <a:srgbClr val="EDF0F3"/>
           </a:solidFill>
           <a:ln>
             <a:noFill/>
@@ -6148,7 +6148,7 @@
             <a:r>
               <a:rPr sz="1000" b="0" i="0">
                 <a:solidFill>
-                  <a:srgbClr val="9AA7B4"/>
+                  <a:srgbClr val="5E6A76"/>
                 </a:solidFill>
                 <a:latin typeface="Calibri"/>
               </a:rPr>
@@ -6172,7 +6172,7 @@
             <a:avLst/>
           </a:prstGeom>
           <a:solidFill>
-            <a:srgbClr val="16202B"/>
+            <a:srgbClr val="EDF0F3"/>
           </a:solidFill>
           <a:ln>
             <a:noFill/>
@@ -6227,7 +6227,7 @@
             <a:r>
               <a:rPr sz="1000" b="0" i="0">
                 <a:solidFill>
-                  <a:srgbClr val="9AA7B4"/>
+                  <a:srgbClr val="5E6A76"/>
                 </a:solidFill>
                 <a:latin typeface="Calibri"/>
               </a:rPr>
@@ -6251,7 +6251,7 @@
             <a:avLst/>
           </a:prstGeom>
           <a:solidFill>
-            <a:srgbClr val="16202B"/>
+            <a:srgbClr val="EDF0F3"/>
           </a:solidFill>
           <a:ln>
             <a:noFill/>
@@ -6306,7 +6306,7 @@
             <a:r>
               <a:rPr sz="1000" b="0" i="0">
                 <a:solidFill>
-                  <a:srgbClr val="9AA7B4"/>
+                  <a:srgbClr val="5E6A76"/>
                 </a:solidFill>
                 <a:latin typeface="Calibri"/>
               </a:rPr>
@@ -6330,7 +6330,7 @@
             <a:avLst/>
           </a:prstGeom>
           <a:solidFill>
-            <a:srgbClr val="35C9C9"/>
+            <a:srgbClr val="0E8A8A"/>
           </a:solidFill>
           <a:ln>
             <a:noFill/>
@@ -6385,7 +6385,7 @@
             <a:r>
               <a:rPr sz="1000" b="1" i="0">
                 <a:solidFill>
-                  <a:srgbClr val="0E141B"/>
+                  <a:srgbClr val="FFFFFF"/>
                 </a:solidFill>
                 <a:latin typeface="Calibri"/>
               </a:rPr>
@@ -6409,7 +6409,7 @@
             <a:avLst/>
           </a:prstGeom>
           <a:solidFill>
-            <a:srgbClr val="121B26"/>
+            <a:srgbClr val="F7F8FA"/>
           </a:solidFill>
           <a:ln>
             <a:noFill/>
@@ -6464,7 +6464,7 @@
             <a:r>
               <a:rPr sz="1300" b="0" i="0">
                 <a:solidFill>
-                  <a:srgbClr val="E8ECF1"/>
+                  <a:srgbClr val="1B222B"/>
                 </a:solidFill>
                 <a:latin typeface="Calibri"/>
               </a:rPr>
@@ -6488,7 +6488,7 @@
             <a:avLst/>
           </a:prstGeom>
           <a:solidFill>
-            <a:srgbClr val="121B26"/>
+            <a:srgbClr val="F7F8FA"/>
           </a:solidFill>
           <a:ln>
             <a:noFill/>
@@ -6543,7 +6543,7 @@
             <a:r>
               <a:rPr sz="2200" b="1" i="0">
                 <a:solidFill>
-                  <a:srgbClr val="35C9C9"/>
+                  <a:srgbClr val="0E8A8A"/>
                 </a:solidFill>
                 <a:latin typeface="Calibri"/>
               </a:rPr>
@@ -6567,7 +6567,7 @@
             <a:avLst/>
           </a:prstGeom>
           <a:solidFill>
-            <a:srgbClr val="121B26"/>
+            <a:srgbClr val="F7F8FA"/>
           </a:solidFill>
           <a:ln>
             <a:noFill/>
@@ -6622,7 +6622,7 @@
             <a:r>
               <a:rPr sz="2200" b="1" i="0">
                 <a:solidFill>
-                  <a:srgbClr val="35C9C9"/>
+                  <a:srgbClr val="0E8A8A"/>
                 </a:solidFill>
                 <a:latin typeface="Calibri"/>
               </a:rPr>
@@ -6646,7 +6646,7 @@
             <a:avLst/>
           </a:prstGeom>
           <a:solidFill>
-            <a:srgbClr val="121B26"/>
+            <a:srgbClr val="F7F8FA"/>
           </a:solidFill>
           <a:ln>
             <a:noFill/>
@@ -6701,7 +6701,7 @@
             <a:r>
               <a:rPr sz="2200" b="1" i="0">
                 <a:solidFill>
-                  <a:srgbClr val="35C9C9"/>
+                  <a:srgbClr val="0E8A8A"/>
                 </a:solidFill>
                 <a:latin typeface="Calibri"/>
               </a:rPr>
@@ -6725,7 +6725,7 @@
             <a:avLst/>
           </a:prstGeom>
           <a:solidFill>
-            <a:srgbClr val="121B26"/>
+            <a:srgbClr val="F7F8FA"/>
           </a:solidFill>
           <a:ln>
             <a:noFill/>
@@ -6780,7 +6780,7 @@
             <a:r>
               <a:rPr sz="1800" b="0" i="0">
                 <a:solidFill>
-                  <a:srgbClr val="F2C14E"/>
+                  <a:srgbClr val="B5820A"/>
                 </a:solidFill>
                 <a:latin typeface="Calibri"/>
               </a:rPr>
@@ -6804,7 +6804,7 @@
             <a:avLst/>
           </a:prstGeom>
           <a:solidFill>
-            <a:srgbClr val="0C272E"/>
+            <a:srgbClr val="DDF1F0"/>
           </a:solidFill>
           <a:ln>
             <a:noFill/>
@@ -6859,7 +6859,7 @@
             <a:r>
               <a:rPr sz="2200" b="1" i="0">
                 <a:solidFill>
-                  <a:srgbClr val="FF6B35"/>
+                  <a:srgbClr val="EA5B2B"/>
                 </a:solidFill>
                 <a:latin typeface="Calibri"/>
               </a:rPr>
@@ -6883,7 +6883,7 @@
             <a:avLst/>
           </a:prstGeom>
           <a:solidFill>
-            <a:srgbClr val="16212E"/>
+            <a:srgbClr val="ECEFF2"/>
           </a:solidFill>
           <a:ln>
             <a:noFill/>
@@ -6938,7 +6938,7 @@
             <a:r>
               <a:rPr sz="1300" b="0" i="0">
                 <a:solidFill>
-                  <a:srgbClr val="E8ECF1"/>
+                  <a:srgbClr val="1B222B"/>
                 </a:solidFill>
                 <a:latin typeface="Calibri"/>
               </a:rPr>
@@ -6962,7 +6962,7 @@
             <a:avLst/>
           </a:prstGeom>
           <a:solidFill>
-            <a:srgbClr val="16212E"/>
+            <a:srgbClr val="ECEFF2"/>
           </a:solidFill>
           <a:ln>
             <a:noFill/>
@@ -7017,7 +7017,7 @@
             <a:r>
               <a:rPr sz="1800" b="0" i="0">
                 <a:solidFill>
-                  <a:srgbClr val="9AA7B4"/>
+                  <a:srgbClr val="5E6A76"/>
                 </a:solidFill>
                 <a:latin typeface="Calibri"/>
               </a:rPr>
@@ -7041,7 +7041,7 @@
             <a:avLst/>
           </a:prstGeom>
           <a:solidFill>
-            <a:srgbClr val="16212E"/>
+            <a:srgbClr val="ECEFF2"/>
           </a:solidFill>
           <a:ln>
             <a:noFill/>
@@ -7096,7 +7096,7 @@
             <a:r>
               <a:rPr sz="1800" b="0" i="0">
                 <a:solidFill>
-                  <a:srgbClr val="9AA7B4"/>
+                  <a:srgbClr val="5E6A76"/>
                 </a:solidFill>
                 <a:latin typeface="Calibri"/>
               </a:rPr>
@@ -7120,7 +7120,7 @@
             <a:avLst/>
           </a:prstGeom>
           <a:solidFill>
-            <a:srgbClr val="16212E"/>
+            <a:srgbClr val="ECEFF2"/>
           </a:solidFill>
           <a:ln>
             <a:noFill/>
@@ -7175,7 +7175,7 @@
             <a:r>
               <a:rPr sz="2200" b="1" i="0">
                 <a:solidFill>
-                  <a:srgbClr val="35C9C9"/>
+                  <a:srgbClr val="0E8A8A"/>
                 </a:solidFill>
                 <a:latin typeface="Calibri"/>
               </a:rPr>
@@ -7199,7 +7199,7 @@
             <a:avLst/>
           </a:prstGeom>
           <a:solidFill>
-            <a:srgbClr val="16212E"/>
+            <a:srgbClr val="ECEFF2"/>
           </a:solidFill>
           <a:ln>
             <a:noFill/>
@@ -7254,7 +7254,7 @@
             <a:r>
               <a:rPr sz="1800" b="0" i="0">
                 <a:solidFill>
-                  <a:srgbClr val="F2C14E"/>
+                  <a:srgbClr val="B5820A"/>
                 </a:solidFill>
                 <a:latin typeface="Calibri"/>
               </a:rPr>
@@ -7278,7 +7278,7 @@
             <a:avLst/>
           </a:prstGeom>
           <a:solidFill>
-            <a:srgbClr val="0C272E"/>
+            <a:srgbClr val="DDF1F0"/>
           </a:solidFill>
           <a:ln>
             <a:noFill/>
@@ -7333,7 +7333,7 @@
             <a:r>
               <a:rPr sz="2200" b="1" i="0">
                 <a:solidFill>
-                  <a:srgbClr val="FF6B35"/>
+                  <a:srgbClr val="EA5B2B"/>
                 </a:solidFill>
                 <a:latin typeface="Calibri"/>
               </a:rPr>
@@ -7357,7 +7357,7 @@
             <a:avLst/>
           </a:prstGeom>
           <a:solidFill>
-            <a:srgbClr val="121B26"/>
+            <a:srgbClr val="F7F8FA"/>
           </a:solidFill>
           <a:ln>
             <a:noFill/>
@@ -7412,7 +7412,7 @@
             <a:r>
               <a:rPr sz="1300" b="0" i="0">
                 <a:solidFill>
-                  <a:srgbClr val="E8ECF1"/>
+                  <a:srgbClr val="1B222B"/>
                 </a:solidFill>
                 <a:latin typeface="Calibri"/>
               </a:rPr>
@@ -7436,7 +7436,7 @@
             <a:avLst/>
           </a:prstGeom>
           <a:solidFill>
-            <a:srgbClr val="121B26"/>
+            <a:srgbClr val="F7F8FA"/>
           </a:solidFill>
           <a:ln>
             <a:noFill/>
@@ -7491,7 +7491,7 @@
             <a:r>
               <a:rPr sz="1800" b="0" i="0">
                 <a:solidFill>
-                  <a:srgbClr val="F2C14E"/>
+                  <a:srgbClr val="B5820A"/>
                 </a:solidFill>
                 <a:latin typeface="Calibri"/>
               </a:rPr>
@@ -7515,7 +7515,7 @@
             <a:avLst/>
           </a:prstGeom>
           <a:solidFill>
-            <a:srgbClr val="121B26"/>
+            <a:srgbClr val="F7F8FA"/>
           </a:solidFill>
           <a:ln>
             <a:noFill/>
@@ -7570,7 +7570,7 @@
             <a:r>
               <a:rPr sz="1800" b="0" i="0">
                 <a:solidFill>
-                  <a:srgbClr val="9AA7B4"/>
+                  <a:srgbClr val="5E6A76"/>
                 </a:solidFill>
                 <a:latin typeface="Calibri"/>
               </a:rPr>
@@ -7594,7 +7594,7 @@
             <a:avLst/>
           </a:prstGeom>
           <a:solidFill>
-            <a:srgbClr val="121B26"/>
+            <a:srgbClr val="F7F8FA"/>
           </a:solidFill>
           <a:ln>
             <a:noFill/>
@@ -7649,7 +7649,7 @@
             <a:r>
               <a:rPr sz="1800" b="0" i="0">
                 <a:solidFill>
-                  <a:srgbClr val="9AA7B4"/>
+                  <a:srgbClr val="5E6A76"/>
                 </a:solidFill>
                 <a:latin typeface="Calibri"/>
               </a:rPr>
@@ -7673,7 +7673,7 @@
             <a:avLst/>
           </a:prstGeom>
           <a:solidFill>
-            <a:srgbClr val="121B26"/>
+            <a:srgbClr val="F7F8FA"/>
           </a:solidFill>
           <a:ln>
             <a:noFill/>
@@ -7728,7 +7728,7 @@
             <a:r>
               <a:rPr sz="1800" b="0" i="0">
                 <a:solidFill>
-                  <a:srgbClr val="F2C14E"/>
+                  <a:srgbClr val="B5820A"/>
                 </a:solidFill>
                 <a:latin typeface="Calibri"/>
               </a:rPr>
@@ -7752,7 +7752,7 @@
             <a:avLst/>
           </a:prstGeom>
           <a:solidFill>
-            <a:srgbClr val="0C272E"/>
+            <a:srgbClr val="DDF1F0"/>
           </a:solidFill>
           <a:ln>
             <a:noFill/>
@@ -7807,7 +7807,7 @@
             <a:r>
               <a:rPr sz="2200" b="1" i="0">
                 <a:solidFill>
-                  <a:srgbClr val="FF6B35"/>
+                  <a:srgbClr val="EA5B2B"/>
                 </a:solidFill>
                 <a:latin typeface="Calibri"/>
               </a:rPr>
@@ -7831,7 +7831,7 @@
             <a:avLst/>
           </a:prstGeom>
           <a:solidFill>
-            <a:srgbClr val="16212E"/>
+            <a:srgbClr val="ECEFF2"/>
           </a:solidFill>
           <a:ln>
             <a:noFill/>
@@ -7886,7 +7886,7 @@
             <a:r>
               <a:rPr sz="1300" b="0" i="0">
                 <a:solidFill>
-                  <a:srgbClr val="E8ECF1"/>
+                  <a:srgbClr val="1B222B"/>
                 </a:solidFill>
                 <a:latin typeface="Calibri"/>
               </a:rPr>
@@ -7910,7 +7910,7 @@
             <a:avLst/>
           </a:prstGeom>
           <a:solidFill>
-            <a:srgbClr val="16212E"/>
+            <a:srgbClr val="ECEFF2"/>
           </a:solidFill>
           <a:ln>
             <a:noFill/>
@@ -7965,7 +7965,7 @@
             <a:r>
               <a:rPr sz="1800" b="0" i="0">
                 <a:solidFill>
-                  <a:srgbClr val="9AA7B4"/>
+                  <a:srgbClr val="5E6A76"/>
                 </a:solidFill>
                 <a:latin typeface="Calibri"/>
               </a:rPr>
@@ -7989,7 +7989,7 @@
             <a:avLst/>
           </a:prstGeom>
           <a:solidFill>
-            <a:srgbClr val="16212E"/>
+            <a:srgbClr val="ECEFF2"/>
           </a:solidFill>
           <a:ln>
             <a:noFill/>
@@ -8044,7 +8044,7 @@
             <a:r>
               <a:rPr sz="1800" b="0" i="0">
                 <a:solidFill>
-                  <a:srgbClr val="F2C14E"/>
+                  <a:srgbClr val="B5820A"/>
                 </a:solidFill>
                 <a:latin typeface="Calibri"/>
               </a:rPr>
@@ -8068,7 +8068,7 @@
             <a:avLst/>
           </a:prstGeom>
           <a:solidFill>
-            <a:srgbClr val="16212E"/>
+            <a:srgbClr val="ECEFF2"/>
           </a:solidFill>
           <a:ln>
             <a:noFill/>
@@ -8123,7 +8123,7 @@
             <a:r>
               <a:rPr sz="1800" b="0" i="0">
                 <a:solidFill>
-                  <a:srgbClr val="9AA7B4"/>
+                  <a:srgbClr val="5E6A76"/>
                 </a:solidFill>
                 <a:latin typeface="Calibri"/>
               </a:rPr>
@@ -8147,7 +8147,7 @@
             <a:avLst/>
           </a:prstGeom>
           <a:solidFill>
-            <a:srgbClr val="16212E"/>
+            <a:srgbClr val="ECEFF2"/>
           </a:solidFill>
           <a:ln>
             <a:noFill/>
@@ -8202,7 +8202,7 @@
             <a:r>
               <a:rPr sz="1800" b="0" i="0">
                 <a:solidFill>
-                  <a:srgbClr val="F2C14E"/>
+                  <a:srgbClr val="B5820A"/>
                 </a:solidFill>
                 <a:latin typeface="Calibri"/>
               </a:rPr>
@@ -8226,7 +8226,7 @@
             <a:avLst/>
           </a:prstGeom>
           <a:solidFill>
-            <a:srgbClr val="0C272E"/>
+            <a:srgbClr val="DDF1F0"/>
           </a:solidFill>
           <a:ln>
             <a:noFill/>
@@ -8281,7 +8281,7 @@
             <a:r>
               <a:rPr sz="2200" b="1" i="0">
                 <a:solidFill>
-                  <a:srgbClr val="FF6B35"/>
+                  <a:srgbClr val="EA5B2B"/>
                 </a:solidFill>
                 <a:latin typeface="Calibri"/>
               </a:rPr>
@@ -8305,7 +8305,7 @@
             <a:avLst/>
           </a:prstGeom>
           <a:solidFill>
-            <a:srgbClr val="121B26"/>
+            <a:srgbClr val="F7F8FA"/>
           </a:solidFill>
           <a:ln>
             <a:noFill/>
@@ -8360,7 +8360,7 @@
             <a:r>
               <a:rPr sz="1300" b="0" i="0">
                 <a:solidFill>
-                  <a:srgbClr val="E8ECF1"/>
+                  <a:srgbClr val="1B222B"/>
                 </a:solidFill>
                 <a:latin typeface="Calibri"/>
               </a:rPr>
@@ -8384,7 +8384,7 @@
             <a:avLst/>
           </a:prstGeom>
           <a:solidFill>
-            <a:srgbClr val="121B26"/>
+            <a:srgbClr val="F7F8FA"/>
           </a:solidFill>
           <a:ln>
             <a:noFill/>
@@ -8439,7 +8439,7 @@
             <a:r>
               <a:rPr sz="1800" b="0" i="0">
                 <a:solidFill>
-                  <a:srgbClr val="9AA7B4"/>
+                  <a:srgbClr val="5E6A76"/>
                 </a:solidFill>
                 <a:latin typeface="Calibri"/>
               </a:rPr>
@@ -8463,7 +8463,7 @@
             <a:avLst/>
           </a:prstGeom>
           <a:solidFill>
-            <a:srgbClr val="121B26"/>
+            <a:srgbClr val="F7F8FA"/>
           </a:solidFill>
           <a:ln>
             <a:noFill/>
@@ -8518,7 +8518,7 @@
             <a:r>
               <a:rPr sz="1800" b="0" i="0">
                 <a:solidFill>
-                  <a:srgbClr val="9AA7B4"/>
+                  <a:srgbClr val="5E6A76"/>
                 </a:solidFill>
                 <a:latin typeface="Calibri"/>
               </a:rPr>
@@ -8542,7 +8542,7 @@
             <a:avLst/>
           </a:prstGeom>
           <a:solidFill>
-            <a:srgbClr val="121B26"/>
+            <a:srgbClr val="F7F8FA"/>
           </a:solidFill>
           <a:ln>
             <a:noFill/>
@@ -8597,7 +8597,7 @@
             <a:r>
               <a:rPr sz="1800" b="0" i="0">
                 <a:solidFill>
-                  <a:srgbClr val="9AA7B4"/>
+                  <a:srgbClr val="5E6A76"/>
                 </a:solidFill>
                 <a:latin typeface="Calibri"/>
               </a:rPr>
@@ -8621,7 +8621,7 @@
             <a:avLst/>
           </a:prstGeom>
           <a:solidFill>
-            <a:srgbClr val="121B26"/>
+            <a:srgbClr val="F7F8FA"/>
           </a:solidFill>
           <a:ln>
             <a:noFill/>
@@ -8676,7 +8676,7 @@
             <a:r>
               <a:rPr sz="1800" b="0" i="0">
                 <a:solidFill>
-                  <a:srgbClr val="9AA7B4"/>
+                  <a:srgbClr val="5E6A76"/>
                 </a:solidFill>
                 <a:latin typeface="Calibri"/>
               </a:rPr>
@@ -8700,7 +8700,7 @@
             <a:avLst/>
           </a:prstGeom>
           <a:solidFill>
-            <a:srgbClr val="0C272E"/>
+            <a:srgbClr val="DDF1F0"/>
           </a:solidFill>
           <a:ln>
             <a:noFill/>
@@ -8755,7 +8755,7 @@
             <a:r>
               <a:rPr sz="2200" b="1" i="0">
                 <a:solidFill>
-                  <a:srgbClr val="FF6B35"/>
+                  <a:srgbClr val="EA5B2B"/>
                 </a:solidFill>
                 <a:latin typeface="Calibri"/>
               </a:rPr>
@@ -8790,7 +8790,7 @@
             <a:r>
               <a:rPr sz="900" b="0" i="0">
                 <a:solidFill>
-                  <a:srgbClr val="9AA7B4"/>
+                  <a:srgbClr val="5E6A76"/>
                 </a:solidFill>
                 <a:latin typeface="Calibri"/>
               </a:rPr>
@@ -8813,7 +8813,7 @@
     <p:bg>
       <p:bgPr>
         <a:solidFill>
-          <a:srgbClr val="0E141B"/>
+          <a:srgbClr val="FFFFFF"/>
         </a:solidFill>
         <a:effectLst/>
       </p:bgPr>
@@ -8840,7 +8840,7 @@
             <a:avLst/>
           </a:prstGeom>
           <a:solidFill>
-            <a:srgbClr val="FF6B35"/>
+            <a:srgbClr val="EA5B2B"/>
           </a:solidFill>
           <a:ln>
             <a:noFill/>
@@ -8894,7 +8894,7 @@
             <a:r>
               <a:rPr sz="1300" b="1" i="0">
                 <a:solidFill>
-                  <a:srgbClr val="35C9C9"/>
+                  <a:srgbClr val="0E8A8A"/>
                 </a:solidFill>
                 <a:latin typeface="Calibri"/>
               </a:rPr>
@@ -8929,7 +8929,7 @@
             <a:r>
               <a:rPr sz="1200" b="1" i="0">
                 <a:solidFill>
-                  <a:srgbClr val="9AA7B4"/>
+                  <a:srgbClr val="5E6A76"/>
                 </a:solidFill>
                 <a:latin typeface="Calibri"/>
               </a:rPr>
@@ -8964,7 +8964,7 @@
             <a:r>
               <a:rPr sz="2700" b="1" i="0">
                 <a:solidFill>
-                  <a:srgbClr val="E8ECF1"/>
+                  <a:srgbClr val="1B222B"/>
                 </a:solidFill>
                 <a:latin typeface="Calibri"/>
               </a:rPr>
@@ -9003,7 +9003,7 @@
             <a:r>
               <a:rPr sz="1700" b="0" i="0">
                 <a:solidFill>
-                  <a:srgbClr val="9AA7B4"/>
+                  <a:srgbClr val="5E6A76"/>
                 </a:solidFill>
                 <a:latin typeface="Calibri"/>
               </a:rPr>
@@ -9019,7 +9019,7 @@
             <a:r>
               <a:rPr sz="1700" b="1" i="0">
                 <a:solidFill>
-                  <a:srgbClr val="E8ECF1"/>
+                  <a:srgbClr val="1B222B"/>
                 </a:solidFill>
                 <a:latin typeface="Calibri"/>
               </a:rPr>
@@ -9035,7 +9035,7 @@
             <a:r>
               <a:rPr sz="1700" b="0" i="0">
                 <a:solidFill>
-                  <a:srgbClr val="E8ECF1"/>
+                  <a:srgbClr val="1B222B"/>
                 </a:solidFill>
                 <a:latin typeface="Calibri"/>
               </a:rPr>
@@ -9051,7 +9051,7 @@
             <a:r>
               <a:rPr sz="1700" b="0" i="0">
                 <a:solidFill>
-                  <a:srgbClr val="E8ECF1"/>
+                  <a:srgbClr val="1B222B"/>
                 </a:solidFill>
                 <a:latin typeface="Calibri"/>
               </a:rPr>
@@ -9067,7 +9067,7 @@
             <a:r>
               <a:rPr sz="1700" b="1" i="0">
                 <a:solidFill>
-                  <a:srgbClr val="35C9C9"/>
+                  <a:srgbClr val="0E8A8A"/>
                 </a:solidFill>
                 <a:latin typeface="Calibri"/>
               </a:rPr>
@@ -9090,7 +9090,7 @@
     <p:bg>
       <p:bgPr>
         <a:solidFill>
-          <a:srgbClr val="0E141B"/>
+          <a:srgbClr val="FFFFFF"/>
         </a:solidFill>
         <a:effectLst/>
       </p:bgPr>
@@ -9117,7 +9117,7 @@
             <a:avLst/>
           </a:prstGeom>
           <a:solidFill>
-            <a:srgbClr val="FF6B35"/>
+            <a:srgbClr val="EA5B2B"/>
           </a:solidFill>
           <a:ln>
             <a:noFill/>
@@ -9171,7 +9171,7 @@
             <a:r>
               <a:rPr sz="1300" b="1" i="0">
                 <a:solidFill>
-                  <a:srgbClr val="35C9C9"/>
+                  <a:srgbClr val="0E8A8A"/>
                 </a:solidFill>
                 <a:latin typeface="Calibri"/>
               </a:rPr>
@@ -9206,7 +9206,7 @@
             <a:r>
               <a:rPr sz="1200" b="1" i="0">
                 <a:solidFill>
-                  <a:srgbClr val="9AA7B4"/>
+                  <a:srgbClr val="5E6A76"/>
                 </a:solidFill>
                 <a:latin typeface="Calibri"/>
               </a:rPr>
@@ -9241,7 +9241,7 @@
             <a:r>
               <a:rPr sz="2700" b="1" i="0">
                 <a:solidFill>
-                  <a:srgbClr val="E8ECF1"/>
+                  <a:srgbClr val="1B222B"/>
                 </a:solidFill>
                 <a:latin typeface="Calibri"/>
               </a:rPr>
@@ -9280,7 +9280,7 @@
             <a:r>
               <a:rPr sz="1700" b="1" i="0">
                 <a:solidFill>
-                  <a:srgbClr val="E8ECF1"/>
+                  <a:srgbClr val="1B222B"/>
                 </a:solidFill>
                 <a:latin typeface="Calibri"/>
               </a:rPr>
@@ -9296,7 +9296,7 @@
             <a:r>
               <a:rPr sz="1700" b="0" i="0">
                 <a:solidFill>
-                  <a:srgbClr val="35C9C9"/>
+                  <a:srgbClr val="0E8A8A"/>
                 </a:solidFill>
                 <a:latin typeface="Calibri"/>
               </a:rPr>
@@ -9312,7 +9312,7 @@
             <a:r>
               <a:rPr sz="1700" b="0" i="0">
                 <a:solidFill>
-                  <a:srgbClr val="E8ECF1"/>
+                  <a:srgbClr val="1B222B"/>
                 </a:solidFill>
                 <a:latin typeface="Calibri"/>
               </a:rPr>
@@ -9328,7 +9328,7 @@
             <a:r>
               <a:rPr sz="1700" b="0" i="0">
                 <a:solidFill>
-                  <a:srgbClr val="9AA7B4"/>
+                  <a:srgbClr val="5E6A76"/>
                 </a:solidFill>
                 <a:latin typeface="Calibri"/>
               </a:rPr>
@@ -9344,7 +9344,7 @@
             <a:r>
               <a:rPr sz="1700" b="1" i="0">
                 <a:solidFill>
-                  <a:srgbClr val="35C9C9"/>
+                  <a:srgbClr val="0E8A8A"/>
                 </a:solidFill>
                 <a:latin typeface="Calibri"/>
               </a:rPr>
@@ -9360,7 +9360,7 @@
             <a:r>
               <a:rPr sz="1700" b="0" i="0">
                 <a:solidFill>
-                  <a:srgbClr val="F2C14E"/>
+                  <a:srgbClr val="B5820A"/>
                 </a:solidFill>
                 <a:latin typeface="Calibri"/>
               </a:rPr>
@@ -9383,7 +9383,7 @@
     <p:bg>
       <p:bgPr>
         <a:solidFill>
-          <a:srgbClr val="0E141B"/>
+          <a:srgbClr val="FFFFFF"/>
         </a:solidFill>
         <a:effectLst/>
       </p:bgPr>
@@ -9410,7 +9410,7 @@
             <a:avLst/>
           </a:prstGeom>
           <a:solidFill>
-            <a:srgbClr val="FF6B35"/>
+            <a:srgbClr val="EA5B2B"/>
           </a:solidFill>
           <a:ln>
             <a:noFill/>
@@ -9464,7 +9464,7 @@
             <a:r>
               <a:rPr sz="1300" b="1" i="0">
                 <a:solidFill>
-                  <a:srgbClr val="35C9C9"/>
+                  <a:srgbClr val="0E8A8A"/>
                 </a:solidFill>
                 <a:latin typeface="Calibri"/>
               </a:rPr>
@@ -9499,7 +9499,7 @@
             <a:r>
               <a:rPr sz="1200" b="1" i="0">
                 <a:solidFill>
-                  <a:srgbClr val="9AA7B4"/>
+                  <a:srgbClr val="5E6A76"/>
                 </a:solidFill>
                 <a:latin typeface="Calibri"/>
               </a:rPr>
@@ -9534,7 +9534,7 @@
             <a:r>
               <a:rPr sz="2700" b="1" i="0">
                 <a:solidFill>
-                  <a:srgbClr val="E8ECF1"/>
+                  <a:srgbClr val="1B222B"/>
                 </a:solidFill>
                 <a:latin typeface="Calibri"/>
               </a:rPr>
@@ -9573,7 +9573,7 @@
             <a:r>
               <a:rPr sz="1700" b="0" i="0">
                 <a:solidFill>
-                  <a:srgbClr val="E8ECF1"/>
+                  <a:srgbClr val="1B222B"/>
                 </a:solidFill>
                 <a:latin typeface="Calibri"/>
               </a:rPr>
@@ -9589,7 +9589,7 @@
             <a:r>
               <a:rPr sz="1700" b="0" i="0">
                 <a:solidFill>
-                  <a:srgbClr val="E8ECF1"/>
+                  <a:srgbClr val="1B222B"/>
                 </a:solidFill>
                 <a:latin typeface="Calibri"/>
               </a:rPr>
@@ -9605,7 +9605,7 @@
             <a:r>
               <a:rPr sz="1700" b="1" i="0">
                 <a:solidFill>
-                  <a:srgbClr val="35C9C9"/>
+                  <a:srgbClr val="0E8A8A"/>
                 </a:solidFill>
                 <a:latin typeface="Calibri"/>
               </a:rPr>
@@ -9621,7 +9621,7 @@
             <a:r>
               <a:rPr sz="1700" b="0" i="0">
                 <a:solidFill>
-                  <a:srgbClr val="E8ECF1"/>
+                  <a:srgbClr val="1B222B"/>
                 </a:solidFill>
                 <a:latin typeface="Calibri"/>
               </a:rPr>
@@ -9644,7 +9644,7 @@
     <p:bg>
       <p:bgPr>
         <a:solidFill>
-          <a:srgbClr val="0E141B"/>
+          <a:srgbClr val="FFFFFF"/>
         </a:solidFill>
         <a:effectLst/>
       </p:bgPr>
@@ -9671,7 +9671,7 @@
             <a:avLst/>
           </a:prstGeom>
           <a:solidFill>
-            <a:srgbClr val="FF6B35"/>
+            <a:srgbClr val="EA5B2B"/>
           </a:solidFill>
           <a:ln>
             <a:noFill/>
@@ -9725,7 +9725,7 @@
             <a:r>
               <a:rPr sz="1300" b="1" i="0">
                 <a:solidFill>
-                  <a:srgbClr val="35C9C9"/>
+                  <a:srgbClr val="0E8A8A"/>
                 </a:solidFill>
                 <a:latin typeface="Calibri"/>
               </a:rPr>
@@ -9760,7 +9760,7 @@
             <a:r>
               <a:rPr sz="1200" b="1" i="0">
                 <a:solidFill>
-                  <a:srgbClr val="9AA7B4"/>
+                  <a:srgbClr val="5E6A76"/>
                 </a:solidFill>
                 <a:latin typeface="Calibri"/>
               </a:rPr>
@@ -9795,7 +9795,7 @@
             <a:r>
               <a:rPr sz="2700" b="1" i="0">
                 <a:solidFill>
-                  <a:srgbClr val="E8ECF1"/>
+                  <a:srgbClr val="1B222B"/>
                 </a:solidFill>
                 <a:latin typeface="Calibri"/>
               </a:rPr>
@@ -9834,7 +9834,7 @@
             <a:r>
               <a:rPr sz="1700" b="1" i="0">
                 <a:solidFill>
-                  <a:srgbClr val="E8ECF1"/>
+                  <a:srgbClr val="1B222B"/>
                 </a:solidFill>
                 <a:latin typeface="Calibri"/>
               </a:rPr>
@@ -9850,7 +9850,7 @@
             <a:r>
               <a:rPr sz="1700" b="0" i="0">
                 <a:solidFill>
-                  <a:srgbClr val="35C9C9"/>
+                  <a:srgbClr val="0E8A8A"/>
                 </a:solidFill>
                 <a:latin typeface="Calibri"/>
               </a:rPr>
@@ -9866,7 +9866,7 @@
             <a:r>
               <a:rPr sz="1700" b="0" i="0">
                 <a:solidFill>
-                  <a:srgbClr val="9AA7B4"/>
+                  <a:srgbClr val="5E6A76"/>
                 </a:solidFill>
                 <a:latin typeface="Calibri"/>
               </a:rPr>
@@ -9882,7 +9882,7 @@
             <a:r>
               <a:rPr sz="1700" b="0" i="0">
                 <a:solidFill>
-                  <a:srgbClr val="E8ECF1"/>
+                  <a:srgbClr val="1B222B"/>
                 </a:solidFill>
                 <a:latin typeface="Calibri"/>
               </a:rPr>
@@ -9898,7 +9898,7 @@
             <a:r>
               <a:rPr sz="1700" b="1" i="0">
                 <a:solidFill>
-                  <a:srgbClr val="E8ECF1"/>
+                  <a:srgbClr val="1B222B"/>
                 </a:solidFill>
                 <a:latin typeface="Calibri"/>
               </a:rPr>
@@ -9921,7 +9921,7 @@
     <p:bg>
       <p:bgPr>
         <a:solidFill>
-          <a:srgbClr val="0E141B"/>
+          <a:srgbClr val="FFFFFF"/>
         </a:solidFill>
         <a:effectLst/>
       </p:bgPr>
@@ -9948,7 +9948,7 @@
             <a:avLst/>
           </a:prstGeom>
           <a:solidFill>
-            <a:srgbClr val="FF6B35"/>
+            <a:srgbClr val="EA5B2B"/>
           </a:solidFill>
           <a:ln>
             <a:noFill/>
@@ -10002,7 +10002,7 @@
             <a:r>
               <a:rPr sz="1300" b="1" i="0">
                 <a:solidFill>
-                  <a:srgbClr val="35C9C9"/>
+                  <a:srgbClr val="0E8A8A"/>
                 </a:solidFill>
                 <a:latin typeface="Calibri"/>
               </a:rPr>
@@ -10037,7 +10037,7 @@
             <a:r>
               <a:rPr sz="1200" b="1" i="0">
                 <a:solidFill>
-                  <a:srgbClr val="9AA7B4"/>
+                  <a:srgbClr val="5E6A76"/>
                 </a:solidFill>
                 <a:latin typeface="Calibri"/>
               </a:rPr>
@@ -10072,7 +10072,7 @@
             <a:r>
               <a:rPr sz="2700" b="1" i="0">
                 <a:solidFill>
-                  <a:srgbClr val="E8ECF1"/>
+                  <a:srgbClr val="1B222B"/>
                 </a:solidFill>
                 <a:latin typeface="Calibri"/>
               </a:rPr>
@@ -10111,7 +10111,7 @@
             <a:r>
               <a:rPr sz="1700" b="1" i="0">
                 <a:solidFill>
-                  <a:srgbClr val="E8ECF1"/>
+                  <a:srgbClr val="1B222B"/>
                 </a:solidFill>
                 <a:latin typeface="Calibri"/>
               </a:rPr>
@@ -10127,7 +10127,7 @@
             <a:r>
               <a:rPr sz="1700" b="0" i="0">
                 <a:solidFill>
-                  <a:srgbClr val="35C9C9"/>
+                  <a:srgbClr val="0E8A8A"/>
                 </a:solidFill>
                 <a:latin typeface="Calibri"/>
               </a:rPr>
@@ -10143,7 +10143,7 @@
             <a:r>
               <a:rPr sz="1700" b="0" i="0">
                 <a:solidFill>
-                  <a:srgbClr val="E8ECF1"/>
+                  <a:srgbClr val="1B222B"/>
                 </a:solidFill>
                 <a:latin typeface="Calibri"/>
               </a:rPr>
@@ -10159,7 +10159,7 @@
             <a:r>
               <a:rPr sz="1700" b="0" i="0">
                 <a:solidFill>
-                  <a:srgbClr val="9AA7B4"/>
+                  <a:srgbClr val="5E6A76"/>
                 </a:solidFill>
                 <a:latin typeface="Calibri"/>
               </a:rPr>
@@ -10182,7 +10182,7 @@
     <p:bg>
       <p:bgPr>
         <a:solidFill>
-          <a:srgbClr val="0E141B"/>
+          <a:srgbClr val="FFFFFF"/>
         </a:solidFill>
         <a:effectLst/>
       </p:bgPr>
@@ -10209,7 +10209,7 @@
             <a:avLst/>
           </a:prstGeom>
           <a:solidFill>
-            <a:srgbClr val="FF6B35"/>
+            <a:srgbClr val="EA5B2B"/>
           </a:solidFill>
           <a:ln>
             <a:noFill/>
@@ -10263,7 +10263,7 @@
             <a:r>
               <a:rPr sz="1300" b="1" i="0">
                 <a:solidFill>
-                  <a:srgbClr val="35C9C9"/>
+                  <a:srgbClr val="0E8A8A"/>
                 </a:solidFill>
                 <a:latin typeface="Calibri"/>
               </a:rPr>
@@ -10298,7 +10298,7 @@
             <a:r>
               <a:rPr sz="1200" b="1" i="0">
                 <a:solidFill>
-                  <a:srgbClr val="9AA7B4"/>
+                  <a:srgbClr val="5E6A76"/>
                 </a:solidFill>
                 <a:latin typeface="Calibri"/>
               </a:rPr>
@@ -10333,7 +10333,7 @@
             <a:r>
               <a:rPr sz="2500" b="1" i="0">
                 <a:solidFill>
-                  <a:srgbClr val="E8ECF1"/>
+                  <a:srgbClr val="1B222B"/>
                 </a:solidFill>
                 <a:latin typeface="Calibri"/>
               </a:rPr>
@@ -10372,7 +10372,7 @@
             <a:r>
               <a:rPr sz="1500" b="0" i="0">
                 <a:solidFill>
-                  <a:srgbClr val="9AA7B4"/>
+                  <a:srgbClr val="5E6A76"/>
                 </a:solidFill>
                 <a:latin typeface="Calibri"/>
               </a:rPr>
@@ -10388,7 +10388,7 @@
             <a:r>
               <a:rPr sz="1500" b="1" i="0">
                 <a:solidFill>
-                  <a:srgbClr val="35C9C9"/>
+                  <a:srgbClr val="0E8A8A"/>
                 </a:solidFill>
                 <a:latin typeface="Calibri"/>
               </a:rPr>
@@ -10404,7 +10404,7 @@
             <a:r>
               <a:rPr sz="1500" b="1" i="0">
                 <a:solidFill>
-                  <a:srgbClr val="FF6B35"/>
+                  <a:srgbClr val="EA5B2B"/>
                 </a:solidFill>
                 <a:latin typeface="Calibri"/>
               </a:rPr>
@@ -10420,7 +10420,7 @@
             <a:r>
               <a:rPr sz="1500" b="0" i="0">
                 <a:solidFill>
-                  <a:srgbClr val="35C9C9"/>
+                  <a:srgbClr val="0E8A8A"/>
                 </a:solidFill>
                 <a:latin typeface="Calibri"/>
               </a:rPr>
@@ -10445,7 +10445,7 @@
           </a:prstGeom>
           <a:ln w="12700">
             <a:solidFill>
-              <a:srgbClr val="9AA7B4"/>
+              <a:srgbClr val="5E6A76"/>
             </a:solidFill>
           </a:ln>
           <a:effectLst/>
@@ -10481,7 +10481,7 @@
           </a:prstGeom>
           <a:ln w="12700">
             <a:solidFill>
-              <a:srgbClr val="9AA7B4"/>
+              <a:srgbClr val="5E6A76"/>
             </a:solidFill>
           </a:ln>
           <a:effectLst/>
@@ -10543,11 +10543,11 @@
             </a:pathLst>
           </a:custGeom>
           <a:solidFill>
-            <a:srgbClr val="123A40"/>
+            <a:srgbClr val="D6EFEF"/>
           </a:solidFill>
           <a:ln w="31750">
             <a:solidFill>
-              <a:srgbClr val="35C9C9"/>
+              <a:srgbClr val="0E8A8A"/>
             </a:solidFill>
           </a:ln>
           <a:effectLst/>
@@ -10600,7 +10600,7 @@
             <a:r>
               <a:rPr sz="1100" b="0" i="0">
                 <a:solidFill>
-                  <a:srgbClr val="9AA7B4"/>
+                  <a:srgbClr val="5E6A76"/>
                 </a:solidFill>
                 <a:latin typeface="Calibri"/>
               </a:rPr>
@@ -10624,7 +10624,7 @@
             <a:avLst/>
           </a:prstGeom>
           <a:solidFill>
-            <a:srgbClr val="FF6B35"/>
+            <a:srgbClr val="EA5B2B"/>
           </a:solidFill>
           <a:ln>
             <a:noFill/>
@@ -10679,7 +10679,7 @@
             <a:r>
               <a:rPr sz="1300" b="1" i="0">
                 <a:solidFill>
-                  <a:srgbClr val="E8ECF1"/>
+                  <a:srgbClr val="1B222B"/>
                 </a:solidFill>
                 <a:latin typeface="Calibri"/>
               </a:rPr>
@@ -10714,7 +10714,7 @@
             <a:r>
               <a:rPr sz="1100" b="0" i="0">
                 <a:solidFill>
-                  <a:srgbClr val="9AA7B4"/>
+                  <a:srgbClr val="5E6A76"/>
                 </a:solidFill>
                 <a:latin typeface="Calibri"/>
               </a:rPr>
@@ -10749,7 +10749,7 @@
             <a:r>
               <a:rPr sz="1000" b="0" i="0">
                 <a:solidFill>
-                  <a:srgbClr val="35C9C9"/>
+                  <a:srgbClr val="0E8A8A"/>
                 </a:solidFill>
                 <a:latin typeface="Calibri"/>
               </a:rPr>
@@ -10773,7 +10773,7 @@
             <a:avLst/>
           </a:prstGeom>
           <a:solidFill>
-            <a:srgbClr val="FF6B35"/>
+            <a:srgbClr val="EA5B2B"/>
           </a:solidFill>
           <a:ln>
             <a:noFill/>
@@ -10828,7 +10828,7 @@
             <a:r>
               <a:rPr sz="1300" b="1" i="0">
                 <a:solidFill>
-                  <a:srgbClr val="E8ECF1"/>
+                  <a:srgbClr val="1B222B"/>
                 </a:solidFill>
                 <a:latin typeface="Calibri"/>
               </a:rPr>
@@ -10863,7 +10863,7 @@
             <a:r>
               <a:rPr sz="1100" b="0" i="0">
                 <a:solidFill>
-                  <a:srgbClr val="9AA7B4"/>
+                  <a:srgbClr val="5E6A76"/>
                 </a:solidFill>
                 <a:latin typeface="Calibri"/>
               </a:rPr>
@@ -10898,7 +10898,7 @@
             <a:r>
               <a:rPr sz="1000" b="0" i="0">
                 <a:solidFill>
-                  <a:srgbClr val="35C9C9"/>
+                  <a:srgbClr val="0E8A8A"/>
                 </a:solidFill>
                 <a:latin typeface="Calibri"/>
               </a:rPr>
@@ -10922,7 +10922,7 @@
             <a:avLst/>
           </a:prstGeom>
           <a:solidFill>
-            <a:srgbClr val="FF6B35"/>
+            <a:srgbClr val="EA5B2B"/>
           </a:solidFill>
           <a:ln>
             <a:noFill/>
@@ -10977,7 +10977,7 @@
             <a:r>
               <a:rPr sz="1300" b="1" i="0">
                 <a:solidFill>
-                  <a:srgbClr val="E8ECF1"/>
+                  <a:srgbClr val="1B222B"/>
                 </a:solidFill>
                 <a:latin typeface="Calibri"/>
               </a:rPr>
@@ -11012,7 +11012,7 @@
             <a:r>
               <a:rPr sz="1100" b="0" i="0">
                 <a:solidFill>
-                  <a:srgbClr val="9AA7B4"/>
+                  <a:srgbClr val="5E6A76"/>
                 </a:solidFill>
                 <a:latin typeface="Calibri"/>
               </a:rPr>
@@ -11047,7 +11047,7 @@
             <a:r>
               <a:rPr sz="1000" b="0" i="0">
                 <a:solidFill>
-                  <a:srgbClr val="35C9C9"/>
+                  <a:srgbClr val="0E8A8A"/>
                 </a:solidFill>
                 <a:latin typeface="Calibri"/>
               </a:rPr>
@@ -11082,7 +11082,7 @@
             <a:r>
               <a:rPr sz="1000" b="0" i="0">
                 <a:solidFill>
-                  <a:srgbClr val="F2C14E"/>
+                  <a:srgbClr val="B5820A"/>
                 </a:solidFill>
                 <a:latin typeface="Calibri"/>
               </a:rPr>
@@ -11105,7 +11105,7 @@
     <p:bg>
       <p:bgPr>
         <a:solidFill>
-          <a:srgbClr val="0E141B"/>
+          <a:srgbClr val="FFFFFF"/>
         </a:solidFill>
         <a:effectLst/>
       </p:bgPr>
@@ -11132,7 +11132,7 @@
             <a:avLst/>
           </a:prstGeom>
           <a:solidFill>
-            <a:srgbClr val="FF6B35"/>
+            <a:srgbClr val="EA5B2B"/>
           </a:solidFill>
           <a:ln>
             <a:noFill/>
@@ -11186,7 +11186,7 @@
             <a:r>
               <a:rPr sz="1300" b="1" i="0">
                 <a:solidFill>
-                  <a:srgbClr val="35C9C9"/>
+                  <a:srgbClr val="0E8A8A"/>
                 </a:solidFill>
                 <a:latin typeface="Calibri"/>
               </a:rPr>
@@ -11221,7 +11221,7 @@
             <a:r>
               <a:rPr sz="1200" b="1" i="0">
                 <a:solidFill>
-                  <a:srgbClr val="9AA7B4"/>
+                  <a:srgbClr val="5E6A76"/>
                 </a:solidFill>
                 <a:latin typeface="Calibri"/>
               </a:rPr>
@@ -11256,7 +11256,7 @@
             <a:r>
               <a:rPr sz="2700" b="1" i="0">
                 <a:solidFill>
-                  <a:srgbClr val="E8ECF1"/>
+                  <a:srgbClr val="1B222B"/>
                 </a:solidFill>
                 <a:latin typeface="Calibri"/>
               </a:rPr>
@@ -11295,7 +11295,7 @@
             <a:r>
               <a:rPr sz="1700" b="0" i="0">
                 <a:solidFill>
-                  <a:srgbClr val="E8ECF1"/>
+                  <a:srgbClr val="1B222B"/>
                 </a:solidFill>
                 <a:latin typeface="Calibri"/>
               </a:rPr>
@@ -11311,7 +11311,7 @@
             <a:r>
               <a:rPr sz="1700" b="1" i="0">
                 <a:solidFill>
-                  <a:srgbClr val="E8ECF1"/>
+                  <a:srgbClr val="1B222B"/>
                 </a:solidFill>
                 <a:latin typeface="Calibri"/>
               </a:rPr>
@@ -11327,7 +11327,7 @@
             <a:r>
               <a:rPr sz="1700" b="1" i="0">
                 <a:solidFill>
-                  <a:srgbClr val="35C9C9"/>
+                  <a:srgbClr val="0E8A8A"/>
                 </a:solidFill>
                 <a:latin typeface="Calibri"/>
               </a:rPr>
@@ -11343,7 +11343,7 @@
             <a:r>
               <a:rPr sz="1700" b="0" i="0">
                 <a:solidFill>
-                  <a:srgbClr val="F2C14E"/>
+                  <a:srgbClr val="B5820A"/>
                 </a:solidFill>
                 <a:latin typeface="Calibri"/>
               </a:rPr>
@@ -11366,7 +11366,7 @@
     <p:bg>
       <p:bgPr>
         <a:solidFill>
-          <a:srgbClr val="0E141B"/>
+          <a:srgbClr val="FFFFFF"/>
         </a:solidFill>
         <a:effectLst/>
       </p:bgPr>
@@ -11393,7 +11393,7 @@
             <a:avLst/>
           </a:prstGeom>
           <a:solidFill>
-            <a:srgbClr val="FF6B35"/>
+            <a:srgbClr val="EA5B2B"/>
           </a:solidFill>
           <a:ln>
             <a:noFill/>
@@ -11447,7 +11447,7 @@
             <a:r>
               <a:rPr sz="1300" b="1" i="0">
                 <a:solidFill>
-                  <a:srgbClr val="35C9C9"/>
+                  <a:srgbClr val="0E8A8A"/>
                 </a:solidFill>
                 <a:latin typeface="Calibri"/>
               </a:rPr>
@@ -11482,7 +11482,7 @@
             <a:r>
               <a:rPr sz="1200" b="1" i="0">
                 <a:solidFill>
-                  <a:srgbClr val="9AA7B4"/>
+                  <a:srgbClr val="5E6A76"/>
                 </a:solidFill>
                 <a:latin typeface="Calibri"/>
               </a:rPr>
@@ -11517,7 +11517,7 @@
             <a:r>
               <a:rPr sz="2700" b="1" i="0">
                 <a:solidFill>
-                  <a:srgbClr val="E8ECF1"/>
+                  <a:srgbClr val="1B222B"/>
                 </a:solidFill>
                 <a:latin typeface="Calibri"/>
               </a:rPr>
@@ -11556,7 +11556,7 @@
             <a:r>
               <a:rPr sz="1700" b="0" i="0">
                 <a:solidFill>
-                  <a:srgbClr val="E8ECF1"/>
+                  <a:srgbClr val="1B222B"/>
                 </a:solidFill>
                 <a:latin typeface="Calibri"/>
               </a:rPr>
@@ -11572,7 +11572,7 @@
             <a:r>
               <a:rPr sz="1700" b="1" i="0">
                 <a:solidFill>
-                  <a:srgbClr val="E8ECF1"/>
+                  <a:srgbClr val="1B222B"/>
                 </a:solidFill>
                 <a:latin typeface="Calibri"/>
               </a:rPr>
@@ -11588,7 +11588,7 @@
             <a:r>
               <a:rPr sz="1700" b="0" i="0">
                 <a:solidFill>
-                  <a:srgbClr val="E8ECF1"/>
+                  <a:srgbClr val="1B222B"/>
                 </a:solidFill>
                 <a:latin typeface="Calibri"/>
               </a:rPr>
@@ -11604,7 +11604,7 @@
             <a:r>
               <a:rPr sz="1700" b="0" i="0">
                 <a:solidFill>
-                  <a:srgbClr val="35C9C9"/>
+                  <a:srgbClr val="0E8A8A"/>
                 </a:solidFill>
                 <a:latin typeface="Calibri"/>
               </a:rPr>
@@ -11627,7 +11627,7 @@
     <p:bg>
       <p:bgPr>
         <a:solidFill>
-          <a:srgbClr val="0E141B"/>
+          <a:srgbClr val="FFFFFF"/>
         </a:solidFill>
         <a:effectLst/>
       </p:bgPr>
@@ -11654,7 +11654,7 @@
             <a:avLst/>
           </a:prstGeom>
           <a:solidFill>
-            <a:srgbClr val="FF6B35"/>
+            <a:srgbClr val="EA5B2B"/>
           </a:solidFill>
           <a:ln>
             <a:noFill/>
@@ -11708,7 +11708,7 @@
             <a:r>
               <a:rPr sz="1300" b="1" i="0">
                 <a:solidFill>
-                  <a:srgbClr val="35C9C9"/>
+                  <a:srgbClr val="0E8A8A"/>
                 </a:solidFill>
                 <a:latin typeface="Calibri"/>
               </a:rPr>
@@ -11743,7 +11743,7 @@
             <a:r>
               <a:rPr sz="1200" b="1" i="0">
                 <a:solidFill>
-                  <a:srgbClr val="9AA7B4"/>
+                  <a:srgbClr val="5E6A76"/>
                 </a:solidFill>
                 <a:latin typeface="Calibri"/>
               </a:rPr>
@@ -11778,7 +11778,7 @@
             <a:r>
               <a:rPr sz="2500" b="1" i="0">
                 <a:solidFill>
-                  <a:srgbClr val="E8ECF1"/>
+                  <a:srgbClr val="1B222B"/>
                 </a:solidFill>
                 <a:latin typeface="Calibri"/>
               </a:rPr>
@@ -11817,7 +11817,7 @@
             <a:r>
               <a:rPr sz="1500" b="1" i="0">
                 <a:solidFill>
-                  <a:srgbClr val="E8ECF1"/>
+                  <a:srgbClr val="1B222B"/>
                 </a:solidFill>
                 <a:latin typeface="Calibri"/>
               </a:rPr>
@@ -11833,7 +11833,7 @@
             <a:r>
               <a:rPr sz="1500" b="0" i="0">
                 <a:solidFill>
-                  <a:srgbClr val="E8ECF1"/>
+                  <a:srgbClr val="1B222B"/>
                 </a:solidFill>
                 <a:latin typeface="Calibri"/>
               </a:rPr>
@@ -11849,7 +11849,7 @@
             <a:r>
               <a:rPr sz="1500" b="1" i="0">
                 <a:solidFill>
-                  <a:srgbClr val="35C9C9"/>
+                  <a:srgbClr val="0E8A8A"/>
                 </a:solidFill>
                 <a:latin typeface="Calibri"/>
               </a:rPr>
@@ -11884,7 +11884,7 @@
             <a:r>
               <a:rPr sz="6000" b="1" i="0">
                 <a:solidFill>
-                  <a:srgbClr val="35C9C9"/>
+                  <a:srgbClr val="0E8A8A"/>
                 </a:solidFill>
                 <a:latin typeface="Calibri"/>
               </a:rPr>
@@ -11919,7 +11919,7 @@
             <a:r>
               <a:rPr sz="1500" b="1" i="0">
                 <a:solidFill>
-                  <a:srgbClr val="E8ECF1"/>
+                  <a:srgbClr val="1B222B"/>
                 </a:solidFill>
                 <a:latin typeface="Calibri"/>
               </a:rPr>
@@ -11954,7 +11954,7 @@
             <a:r>
               <a:rPr sz="1100" b="0" i="0">
                 <a:solidFill>
-                  <a:srgbClr val="9AA7B4"/>
+                  <a:srgbClr val="5E6A76"/>
                 </a:solidFill>
                 <a:latin typeface="Calibri"/>
               </a:rPr>
@@ -11978,7 +11978,7 @@
             <a:avLst/>
           </a:prstGeom>
           <a:solidFill>
-            <a:srgbClr val="4A5560"/>
+            <a:srgbClr val="C4CAD0"/>
           </a:solidFill>
           <a:ln>
             <a:noFill/>
@@ -12022,7 +12022,7 @@
             <a:avLst/>
           </a:prstGeom>
           <a:solidFill>
-            <a:srgbClr val="FF6B35"/>
+            <a:srgbClr val="EA5B2B"/>
           </a:solidFill>
           <a:ln>
             <a:noFill/>
@@ -12066,7 +12066,7 @@
             <a:avLst/>
           </a:prstGeom>
           <a:solidFill>
-            <a:srgbClr val="35C9C9"/>
+            <a:srgbClr val="0E8A8A"/>
           </a:solidFill>
           <a:ln>
             <a:noFill/>
@@ -12110,7 +12110,7 @@
             <a:avLst/>
           </a:prstGeom>
           <a:solidFill>
-            <a:srgbClr val="4A5560"/>
+            <a:srgbClr val="C4CAD0"/>
           </a:solidFill>
           <a:ln>
             <a:noFill/>
@@ -12165,7 +12165,7 @@
             <a:r>
               <a:rPr sz="1200" b="1" i="0">
                 <a:solidFill>
-                  <a:srgbClr val="E8ECF1"/>
+                  <a:srgbClr val="1B222B"/>
                 </a:solidFill>
                 <a:latin typeface="Calibri"/>
               </a:rPr>
@@ -12200,7 +12200,7 @@
             <a:r>
               <a:rPr sz="1200" b="0" i="0">
                 <a:solidFill>
-                  <a:srgbClr val="9AA7B4"/>
+                  <a:srgbClr val="5E6A76"/>
                 </a:solidFill>
                 <a:latin typeface="Calibri"/>
               </a:rPr>
@@ -12224,7 +12224,7 @@
             <a:avLst/>
           </a:prstGeom>
           <a:solidFill>
-            <a:srgbClr val="FF6B35"/>
+            <a:srgbClr val="EA5B2B"/>
           </a:solidFill>
           <a:ln>
             <a:noFill/>
@@ -12279,7 +12279,7 @@
             <a:r>
               <a:rPr sz="1200" b="1" i="0">
                 <a:solidFill>
-                  <a:srgbClr val="E8ECF1"/>
+                  <a:srgbClr val="1B222B"/>
                 </a:solidFill>
                 <a:latin typeface="Calibri"/>
               </a:rPr>
@@ -12314,7 +12314,7 @@
             <a:r>
               <a:rPr sz="1200" b="0" i="0">
                 <a:solidFill>
-                  <a:srgbClr val="9AA7B4"/>
+                  <a:srgbClr val="5E6A76"/>
                 </a:solidFill>
                 <a:latin typeface="Calibri"/>
               </a:rPr>
@@ -12338,7 +12338,7 @@
             <a:avLst/>
           </a:prstGeom>
           <a:solidFill>
-            <a:srgbClr val="35C9C9"/>
+            <a:srgbClr val="0E8A8A"/>
           </a:solidFill>
           <a:ln>
             <a:noFill/>
@@ -12393,7 +12393,7 @@
             <a:r>
               <a:rPr sz="1200" b="1" i="0">
                 <a:solidFill>
-                  <a:srgbClr val="E8ECF1"/>
+                  <a:srgbClr val="1B222B"/>
                 </a:solidFill>
                 <a:latin typeface="Calibri"/>
               </a:rPr>
@@ -12428,7 +12428,7 @@
             <a:r>
               <a:rPr sz="1200" b="0" i="0">
                 <a:solidFill>
-                  <a:srgbClr val="9AA7B4"/>
+                  <a:srgbClr val="5E6A76"/>
                 </a:solidFill>
                 <a:latin typeface="Calibri"/>
               </a:rPr>
@@ -12463,7 +12463,7 @@
             <a:r>
               <a:rPr sz="1000" b="0" i="0">
                 <a:solidFill>
-                  <a:srgbClr val="35C9C9"/>
+                  <a:srgbClr val="0E8A8A"/>
                 </a:solidFill>
                 <a:latin typeface="Calibri"/>
               </a:rPr>
@@ -12486,7 +12486,7 @@
     <p:bg>
       <p:bgPr>
         <a:solidFill>
-          <a:srgbClr val="0E141B"/>
+          <a:srgbClr val="FFFFFF"/>
         </a:solidFill>
         <a:effectLst/>
       </p:bgPr>
@@ -12513,7 +12513,7 @@
             <a:avLst/>
           </a:prstGeom>
           <a:solidFill>
-            <a:srgbClr val="FF6B35"/>
+            <a:srgbClr val="EA5B2B"/>
           </a:solidFill>
           <a:ln>
             <a:noFill/>
@@ -12567,7 +12567,7 @@
             <a:r>
               <a:rPr sz="1300" b="1" i="0">
                 <a:solidFill>
-                  <a:srgbClr val="35C9C9"/>
+                  <a:srgbClr val="0E8A8A"/>
                 </a:solidFill>
                 <a:latin typeface="Calibri"/>
               </a:rPr>
@@ -12602,7 +12602,7 @@
             <a:r>
               <a:rPr sz="1200" b="1" i="0">
                 <a:solidFill>
-                  <a:srgbClr val="9AA7B4"/>
+                  <a:srgbClr val="5E6A76"/>
                 </a:solidFill>
                 <a:latin typeface="Calibri"/>
               </a:rPr>
@@ -12637,7 +12637,7 @@
             <a:r>
               <a:rPr sz="2700" b="1" i="0">
                 <a:solidFill>
-                  <a:srgbClr val="E8ECF1"/>
+                  <a:srgbClr val="1B222B"/>
                 </a:solidFill>
                 <a:latin typeface="Calibri"/>
               </a:rPr>
@@ -12676,7 +12676,7 @@
             <a:r>
               <a:rPr sz="1700" b="0" i="0">
                 <a:solidFill>
-                  <a:srgbClr val="E8ECF1"/>
+                  <a:srgbClr val="1B222B"/>
                 </a:solidFill>
                 <a:latin typeface="Calibri"/>
               </a:rPr>
@@ -12692,7 +12692,7 @@
             <a:r>
               <a:rPr sz="1700" b="1" i="0">
                 <a:solidFill>
-                  <a:srgbClr val="35C9C9"/>
+                  <a:srgbClr val="0E8A8A"/>
                 </a:solidFill>
                 <a:latin typeface="Calibri"/>
               </a:rPr>
@@ -12708,7 +12708,7 @@
             <a:r>
               <a:rPr sz="1700" b="0" i="0">
                 <a:solidFill>
-                  <a:srgbClr val="E8ECF1"/>
+                  <a:srgbClr val="1B222B"/>
                 </a:solidFill>
                 <a:latin typeface="Calibri"/>
               </a:rPr>
@@ -12731,7 +12731,7 @@
     <p:bg>
       <p:bgPr>
         <a:solidFill>
-          <a:srgbClr val="0E141B"/>
+          <a:srgbClr val="FFFFFF"/>
         </a:solidFill>
         <a:effectLst/>
       </p:bgPr>
@@ -12758,7 +12758,7 @@
             <a:avLst/>
           </a:prstGeom>
           <a:solidFill>
-            <a:srgbClr val="FF6B35"/>
+            <a:srgbClr val="EA5B2B"/>
           </a:solidFill>
           <a:ln>
             <a:noFill/>
@@ -12812,7 +12812,7 @@
             <a:r>
               <a:rPr sz="1300" b="1" i="0">
                 <a:solidFill>
-                  <a:srgbClr val="35C9C9"/>
+                  <a:srgbClr val="0E8A8A"/>
                 </a:solidFill>
                 <a:latin typeface="Calibri"/>
               </a:rPr>
@@ -12847,7 +12847,7 @@
             <a:r>
               <a:rPr sz="1200" b="1" i="0">
                 <a:solidFill>
-                  <a:srgbClr val="9AA7B4"/>
+                  <a:srgbClr val="5E6A76"/>
                 </a:solidFill>
                 <a:latin typeface="Calibri"/>
               </a:rPr>
@@ -12882,7 +12882,7 @@
             <a:r>
               <a:rPr sz="2700" b="1" i="0">
                 <a:solidFill>
-                  <a:srgbClr val="E8ECF1"/>
+                  <a:srgbClr val="1B222B"/>
                 </a:solidFill>
                 <a:latin typeface="Calibri"/>
               </a:rPr>
@@ -12921,7 +12921,7 @@
             <a:r>
               <a:rPr sz="1700" b="0" i="0">
                 <a:solidFill>
-                  <a:srgbClr val="E8ECF1"/>
+                  <a:srgbClr val="1B222B"/>
                 </a:solidFill>
                 <a:latin typeface="Calibri"/>
               </a:rPr>
@@ -12937,7 +12937,7 @@
             <a:r>
               <a:rPr sz="1700" b="1" i="0">
                 <a:solidFill>
-                  <a:srgbClr val="35C9C9"/>
+                  <a:srgbClr val="0E8A8A"/>
                 </a:solidFill>
                 <a:latin typeface="Calibri"/>
               </a:rPr>
@@ -12953,7 +12953,7 @@
             <a:r>
               <a:rPr sz="1700" b="1" i="0">
                 <a:solidFill>
-                  <a:srgbClr val="E8ECF1"/>
+                  <a:srgbClr val="1B222B"/>
                 </a:solidFill>
                 <a:latin typeface="Calibri"/>
               </a:rPr>
@@ -12969,7 +12969,7 @@
             <a:r>
               <a:rPr sz="1700" b="0" i="0">
                 <a:solidFill>
-                  <a:srgbClr val="9AA7B4"/>
+                  <a:srgbClr val="5E6A76"/>
                 </a:solidFill>
                 <a:latin typeface="Calibri"/>
               </a:rPr>
@@ -12985,7 +12985,7 @@
             <a:r>
               <a:rPr sz="1700" b="0" i="0">
                 <a:solidFill>
-                  <a:srgbClr val="9AA7B4"/>
+                  <a:srgbClr val="5E6A76"/>
                 </a:solidFill>
                 <a:latin typeface="Calibri"/>
               </a:rPr>
@@ -13001,7 +13001,7 @@
             <a:r>
               <a:rPr sz="1700" b="0" i="0">
                 <a:solidFill>
-                  <a:srgbClr val="9AA7B4"/>
+                  <a:srgbClr val="5E6A76"/>
                 </a:solidFill>
                 <a:latin typeface="Calibri"/>
               </a:rPr>
@@ -13024,7 +13024,7 @@
     <p:bg>
       <p:bgPr>
         <a:solidFill>
-          <a:srgbClr val="0E141B"/>
+          <a:srgbClr val="FFFFFF"/>
         </a:solidFill>
         <a:effectLst/>
       </p:bgPr>
@@ -13051,7 +13051,7 @@
             <a:avLst/>
           </a:prstGeom>
           <a:solidFill>
-            <a:srgbClr val="FF6B35"/>
+            <a:srgbClr val="EA5B2B"/>
           </a:solidFill>
           <a:ln>
             <a:noFill/>
@@ -13105,7 +13105,7 @@
             <a:r>
               <a:rPr sz="1300" b="1" i="0">
                 <a:solidFill>
-                  <a:srgbClr val="35C9C9"/>
+                  <a:srgbClr val="0E8A8A"/>
                 </a:solidFill>
                 <a:latin typeface="Calibri"/>
               </a:rPr>
@@ -13140,7 +13140,7 @@
             <a:r>
               <a:rPr sz="1200" b="1" i="0">
                 <a:solidFill>
-                  <a:srgbClr val="9AA7B4"/>
+                  <a:srgbClr val="5E6A76"/>
                 </a:solidFill>
                 <a:latin typeface="Calibri"/>
               </a:rPr>
@@ -13175,7 +13175,7 @@
             <a:r>
               <a:rPr sz="2700" b="1" i="0">
                 <a:solidFill>
-                  <a:srgbClr val="E8ECF1"/>
+                  <a:srgbClr val="1B222B"/>
                 </a:solidFill>
                 <a:latin typeface="Calibri"/>
               </a:rPr>
@@ -13214,7 +13214,7 @@
             <a:r>
               <a:rPr sz="1700" b="0" i="0">
                 <a:solidFill>
-                  <a:srgbClr val="E8ECF1"/>
+                  <a:srgbClr val="1B222B"/>
                 </a:solidFill>
                 <a:latin typeface="Calibri"/>
               </a:rPr>
@@ -13230,7 +13230,7 @@
             <a:r>
               <a:rPr sz="1700" b="0" i="0">
                 <a:solidFill>
-                  <a:srgbClr val="E8ECF1"/>
+                  <a:srgbClr val="1B222B"/>
                 </a:solidFill>
                 <a:latin typeface="Calibri"/>
               </a:rPr>
@@ -13246,7 +13246,7 @@
             <a:r>
               <a:rPr sz="1700" b="0" i="0">
                 <a:solidFill>
-                  <a:srgbClr val="9AA7B4"/>
+                  <a:srgbClr val="5E6A76"/>
                 </a:solidFill>
                 <a:latin typeface="Calibri"/>
               </a:rPr>
@@ -13269,7 +13269,7 @@
     <p:bg>
       <p:bgPr>
         <a:solidFill>
-          <a:srgbClr val="0E141B"/>
+          <a:srgbClr val="FFFFFF"/>
         </a:solidFill>
         <a:effectLst/>
       </p:bgPr>
@@ -13296,7 +13296,7 @@
             <a:avLst/>
           </a:prstGeom>
           <a:solidFill>
-            <a:srgbClr val="FF6B35"/>
+            <a:srgbClr val="EA5B2B"/>
           </a:solidFill>
           <a:ln>
             <a:noFill/>
@@ -13350,7 +13350,7 @@
             <a:r>
               <a:rPr sz="1300" b="1" i="0">
                 <a:solidFill>
-                  <a:srgbClr val="35C9C9"/>
+                  <a:srgbClr val="0E8A8A"/>
                 </a:solidFill>
                 <a:latin typeface="Calibri"/>
               </a:rPr>
@@ -13385,7 +13385,7 @@
             <a:r>
               <a:rPr sz="1200" b="1" i="0">
                 <a:solidFill>
-                  <a:srgbClr val="9AA7B4"/>
+                  <a:srgbClr val="5E6A76"/>
                 </a:solidFill>
                 <a:latin typeface="Calibri"/>
               </a:rPr>
@@ -13420,7 +13420,7 @@
             <a:r>
               <a:rPr sz="2700" b="1" i="0">
                 <a:solidFill>
-                  <a:srgbClr val="E8ECF1"/>
+                  <a:srgbClr val="1B222B"/>
                 </a:solidFill>
                 <a:latin typeface="Calibri"/>
               </a:rPr>
@@ -13459,7 +13459,7 @@
             <a:r>
               <a:rPr sz="1700" b="1" i="0">
                 <a:solidFill>
-                  <a:srgbClr val="E8ECF1"/>
+                  <a:srgbClr val="1B222B"/>
                 </a:solidFill>
                 <a:latin typeface="Calibri"/>
               </a:rPr>
@@ -13475,7 +13475,7 @@
             <a:r>
               <a:rPr sz="1700" b="1" i="0">
                 <a:solidFill>
-                  <a:srgbClr val="35C9C9"/>
+                  <a:srgbClr val="0E8A8A"/>
                 </a:solidFill>
                 <a:latin typeface="Calibri"/>
               </a:rPr>
@@ -13491,7 +13491,7 @@
             <a:r>
               <a:rPr sz="1700" b="0" i="0">
                 <a:solidFill>
-                  <a:srgbClr val="E8ECF1"/>
+                  <a:srgbClr val="1B222B"/>
                 </a:solidFill>
                 <a:latin typeface="Calibri"/>
               </a:rPr>
@@ -13507,7 +13507,7 @@
             <a:r>
               <a:rPr sz="1700" b="0" i="0">
                 <a:solidFill>
-                  <a:srgbClr val="9AA7B4"/>
+                  <a:srgbClr val="5E6A76"/>
                 </a:solidFill>
                 <a:latin typeface="Calibri"/>
               </a:rPr>
@@ -13523,7 +13523,7 @@
             <a:r>
               <a:rPr sz="1700" b="0" i="0">
                 <a:solidFill>
-                  <a:srgbClr val="F2C14E"/>
+                  <a:srgbClr val="B5820A"/>
                 </a:solidFill>
                 <a:latin typeface="Calibri"/>
               </a:rPr>
@@ -13546,7 +13546,7 @@
     <p:bg>
       <p:bgPr>
         <a:solidFill>
-          <a:srgbClr val="0E141B"/>
+          <a:srgbClr val="FFFFFF"/>
         </a:solidFill>
         <a:effectLst/>
       </p:bgPr>
@@ -13573,7 +13573,7 @@
             <a:avLst/>
           </a:prstGeom>
           <a:solidFill>
-            <a:srgbClr val="FF6B35"/>
+            <a:srgbClr val="EA5B2B"/>
           </a:solidFill>
           <a:ln>
             <a:noFill/>
@@ -13627,7 +13627,7 @@
             <a:r>
               <a:rPr sz="1300" b="1" i="0">
                 <a:solidFill>
-                  <a:srgbClr val="35C9C9"/>
+                  <a:srgbClr val="0E8A8A"/>
                 </a:solidFill>
                 <a:latin typeface="Calibri"/>
               </a:rPr>
@@ -13662,7 +13662,7 @@
             <a:r>
               <a:rPr sz="1200" b="1" i="0">
                 <a:solidFill>
-                  <a:srgbClr val="9AA7B4"/>
+                  <a:srgbClr val="5E6A76"/>
                 </a:solidFill>
                 <a:latin typeface="Calibri"/>
               </a:rPr>
@@ -13697,7 +13697,7 @@
             <a:r>
               <a:rPr sz="2500" b="1" i="0">
                 <a:solidFill>
-                  <a:srgbClr val="E8ECF1"/>
+                  <a:srgbClr val="1B222B"/>
                 </a:solidFill>
                 <a:latin typeface="Calibri"/>
               </a:rPr>
@@ -13736,7 +13736,7 @@
             <a:r>
               <a:rPr sz="1500" b="0" i="0">
                 <a:solidFill>
-                  <a:srgbClr val="E8ECF1"/>
+                  <a:srgbClr val="1B222B"/>
                 </a:solidFill>
                 <a:latin typeface="Calibri"/>
               </a:rPr>
@@ -13752,7 +13752,7 @@
             <a:r>
               <a:rPr sz="1500" b="1" i="0">
                 <a:solidFill>
-                  <a:srgbClr val="E8ECF1"/>
+                  <a:srgbClr val="1B222B"/>
                 </a:solidFill>
                 <a:latin typeface="Calibri"/>
               </a:rPr>
@@ -13768,7 +13768,7 @@
             <a:r>
               <a:rPr sz="1500" b="1" i="0">
                 <a:solidFill>
-                  <a:srgbClr val="35C9C9"/>
+                  <a:srgbClr val="0E8A8A"/>
                 </a:solidFill>
                 <a:latin typeface="Calibri"/>
               </a:rPr>
@@ -13784,7 +13784,7 @@
             <a:r>
               <a:rPr sz="1500" b="0" i="0">
                 <a:solidFill>
-                  <a:srgbClr val="F2C14E"/>
+                  <a:srgbClr val="B5820A"/>
                 </a:solidFill>
                 <a:latin typeface="Calibri"/>
               </a:rPr>
@@ -13808,11 +13808,11 @@
             <a:avLst/>
           </a:prstGeom>
           <a:solidFill>
-            <a:srgbClr val="12202B"/>
+            <a:srgbClr val="EAF0F2"/>
           </a:solidFill>
           <a:ln w="15875">
             <a:solidFill>
-              <a:srgbClr val="35C9C9"/>
+              <a:srgbClr val="0E8A8A"/>
             </a:solidFill>
           </a:ln>
           <a:effectLst/>
@@ -13854,11 +13854,11 @@
             <a:avLst/>
           </a:prstGeom>
           <a:solidFill>
-            <a:srgbClr val="17323C"/>
+            <a:srgbClr val="CFE9E9"/>
           </a:solidFill>
           <a:ln w="12700">
             <a:solidFill>
-              <a:srgbClr val="35C9C9"/>
+              <a:srgbClr val="0E8A8A"/>
             </a:solidFill>
           </a:ln>
           <a:effectLst/>
@@ -13900,7 +13900,7 @@
             <a:avLst/>
           </a:prstGeom>
           <a:solidFill>
-            <a:srgbClr val="FF6B35"/>
+            <a:srgbClr val="EA5B2B"/>
           </a:solidFill>
           <a:ln>
             <a:noFill/>
@@ -13955,7 +13955,7 @@
             <a:r>
               <a:rPr sz="1500" b="1" i="0">
                 <a:solidFill>
-                  <a:srgbClr val="35C9C9"/>
+                  <a:srgbClr val="0E8A8A"/>
                 </a:solidFill>
                 <a:latin typeface="Calibri"/>
               </a:rPr>
@@ -13990,7 +13990,7 @@
             <a:r>
               <a:rPr sz="1200" b="0" i="0">
                 <a:solidFill>
-                  <a:srgbClr val="E8ECF1"/>
+                  <a:srgbClr val="1B222B"/>
                 </a:solidFill>
                 <a:latin typeface="Calibri"/>
               </a:rPr>
@@ -14025,7 +14025,7 @@
             <a:r>
               <a:rPr sz="1300" b="1" i="0">
                 <a:solidFill>
-                  <a:srgbClr val="E8ECF1"/>
+                  <a:srgbClr val="1B222B"/>
                 </a:solidFill>
                 <a:latin typeface="Calibri"/>
               </a:rPr>
@@ -14060,7 +14060,7 @@
             <a:r>
               <a:rPr sz="1300" b="1" i="0">
                 <a:solidFill>
-                  <a:srgbClr val="0E141B"/>
+                  <a:srgbClr val="FFFFFF"/>
                 </a:solidFill>
                 <a:latin typeface="Calibri"/>
               </a:rPr>
@@ -14095,7 +14095,7 @@
             <a:r>
               <a:rPr sz="1000" b="1" i="0">
                 <a:solidFill>
-                  <a:srgbClr val="0E141B"/>
+                  <a:srgbClr val="FFFFFF"/>
                 </a:solidFill>
                 <a:latin typeface="Calibri"/>
               </a:rPr>
@@ -14130,7 +14130,7 @@
             <a:r>
               <a:rPr sz="1000" b="0" i="0">
                 <a:solidFill>
-                  <a:srgbClr val="9AA7B4"/>
+                  <a:srgbClr val="5E6A76"/>
                 </a:solidFill>
                 <a:latin typeface="Calibri"/>
               </a:rPr>
